--- a/submissions/track-2/yijian/YIJIAN-Track-2-Presentation.pptx
+++ b/submissions/track-2/yijian/YIJIAN-Track-2-Presentation.pptx
@@ -1,31 +1,126 @@
 
 <file path=ppt/presentation.xml><?xml version="1.0" encoding="utf-8"?>
-<p:presentation xmlns:p="http://schemas.openxmlformats.org/presentationml/2006/main">
+<p:presentation xmlns:a="http://schemas.openxmlformats.org/drawingml/2006/main" xmlns:r="http://schemas.openxmlformats.org/officeDocument/2006/relationships" xmlns:p="http://schemas.openxmlformats.org/presentationml/2006/main">
   <p:sldMasterIdLst>
-    <p:sldMasterId xmlns:r="http://schemas.openxmlformats.org/officeDocument/2006/relationships" id="2147483648" r:id="R8ef2b74cf0f54a18"/>
+    <p:sldMasterId id="2147483648" r:id="rId1"/>
   </p:sldMasterIdLst>
   <p:notesMasterIdLst>
-    <p:notesMasterId xmlns:r="http://schemas.openxmlformats.org/officeDocument/2006/relationships" r:id="Rd55ef4fbd6d14857"/>
+    <p:notesMasterId r:id="rId8"/>
   </p:notesMasterIdLst>
   <p:sldIdLst>
-    <p:sldId xmlns:r="http://schemas.openxmlformats.org/officeDocument/2006/relationships" id="256" r:id="Rfa0f548d51d24b31"/>
-    <p:sldId xmlns:r="http://schemas.openxmlformats.org/officeDocument/2006/relationships" id="257" r:id="Rcc6d2b389f3e4997"/>
-    <p:sldId xmlns:r="http://schemas.openxmlformats.org/officeDocument/2006/relationships" id="258" r:id="Rab72f63ce01e4e63"/>
-    <p:sldId xmlns:r="http://schemas.openxmlformats.org/officeDocument/2006/relationships" id="259" r:id="R443899340fa14ca3"/>
-    <p:sldId xmlns:r="http://schemas.openxmlformats.org/officeDocument/2006/relationships" id="260" r:id="R3d3bc80d2f214875"/>
-    <p:sldId xmlns:r="http://schemas.openxmlformats.org/officeDocument/2006/relationships" id="261" r:id="R4c056a693fe149ee"/>
+    <p:sldId id="256" r:id="rId2"/>
+    <p:sldId id="257" r:id="rId3"/>
+    <p:sldId id="258" r:id="rId4"/>
+    <p:sldId id="259" r:id="rId5"/>
+    <p:sldId id="260" r:id="rId6"/>
+    <p:sldId id="261" r:id="rId7"/>
   </p:sldIdLst>
   <p:sldSz cx="12192000" cy="6858000"/>
   <p:notesSz cx="6858000" cy="9144000"/>
+  <p:defaultTextStyle>
+    <a:defPPr>
+      <a:defRPr lang="zh-CN"/>
+    </a:defPPr>
+    <a:lvl1pPr marL="0" algn="l" defTabSz="914400" rtl="0" eaLnBrk="1" latinLnBrk="0" hangingPunct="1">
+      <a:defRPr sz="1800" kern="1200">
+        <a:solidFill>
+          <a:schemeClr val="tx1"/>
+        </a:solidFill>
+        <a:latin typeface="+mn-lt"/>
+        <a:ea typeface="+mn-ea"/>
+        <a:cs typeface="+mn-cs"/>
+      </a:defRPr>
+    </a:lvl1pPr>
+    <a:lvl2pPr marL="457200" algn="l" defTabSz="914400" rtl="0" eaLnBrk="1" latinLnBrk="0" hangingPunct="1">
+      <a:defRPr sz="1800" kern="1200">
+        <a:solidFill>
+          <a:schemeClr val="tx1"/>
+        </a:solidFill>
+        <a:latin typeface="+mn-lt"/>
+        <a:ea typeface="+mn-ea"/>
+        <a:cs typeface="+mn-cs"/>
+      </a:defRPr>
+    </a:lvl2pPr>
+    <a:lvl3pPr marL="914400" algn="l" defTabSz="914400" rtl="0" eaLnBrk="1" latinLnBrk="0" hangingPunct="1">
+      <a:defRPr sz="1800" kern="1200">
+        <a:solidFill>
+          <a:schemeClr val="tx1"/>
+        </a:solidFill>
+        <a:latin typeface="+mn-lt"/>
+        <a:ea typeface="+mn-ea"/>
+        <a:cs typeface="+mn-cs"/>
+      </a:defRPr>
+    </a:lvl3pPr>
+    <a:lvl4pPr marL="1371600" algn="l" defTabSz="914400" rtl="0" eaLnBrk="1" latinLnBrk="0" hangingPunct="1">
+      <a:defRPr sz="1800" kern="1200">
+        <a:solidFill>
+          <a:schemeClr val="tx1"/>
+        </a:solidFill>
+        <a:latin typeface="+mn-lt"/>
+        <a:ea typeface="+mn-ea"/>
+        <a:cs typeface="+mn-cs"/>
+      </a:defRPr>
+    </a:lvl4pPr>
+    <a:lvl5pPr marL="1828800" algn="l" defTabSz="914400" rtl="0" eaLnBrk="1" latinLnBrk="0" hangingPunct="1">
+      <a:defRPr sz="1800" kern="1200">
+        <a:solidFill>
+          <a:schemeClr val="tx1"/>
+        </a:solidFill>
+        <a:latin typeface="+mn-lt"/>
+        <a:ea typeface="+mn-ea"/>
+        <a:cs typeface="+mn-cs"/>
+      </a:defRPr>
+    </a:lvl5pPr>
+    <a:lvl6pPr marL="2286000" algn="l" defTabSz="914400" rtl="0" eaLnBrk="1" latinLnBrk="0" hangingPunct="1">
+      <a:defRPr sz="1800" kern="1200">
+        <a:solidFill>
+          <a:schemeClr val="tx1"/>
+        </a:solidFill>
+        <a:latin typeface="+mn-lt"/>
+        <a:ea typeface="+mn-ea"/>
+        <a:cs typeface="+mn-cs"/>
+      </a:defRPr>
+    </a:lvl6pPr>
+    <a:lvl7pPr marL="2743200" algn="l" defTabSz="914400" rtl="0" eaLnBrk="1" latinLnBrk="0" hangingPunct="1">
+      <a:defRPr sz="1800" kern="1200">
+        <a:solidFill>
+          <a:schemeClr val="tx1"/>
+        </a:solidFill>
+        <a:latin typeface="+mn-lt"/>
+        <a:ea typeface="+mn-ea"/>
+        <a:cs typeface="+mn-cs"/>
+      </a:defRPr>
+    </a:lvl7pPr>
+    <a:lvl8pPr marL="3200400" algn="l" defTabSz="914400" rtl="0" eaLnBrk="1" latinLnBrk="0" hangingPunct="1">
+      <a:defRPr sz="1800" kern="1200">
+        <a:solidFill>
+          <a:schemeClr val="tx1"/>
+        </a:solidFill>
+        <a:latin typeface="+mn-lt"/>
+        <a:ea typeface="+mn-ea"/>
+        <a:cs typeface="+mn-cs"/>
+      </a:defRPr>
+    </a:lvl8pPr>
+    <a:lvl9pPr marL="3657600" algn="l" defTabSz="914400" rtl="0" eaLnBrk="1" latinLnBrk="0" hangingPunct="1">
+      <a:defRPr sz="1800" kern="1200">
+        <a:solidFill>
+          <a:schemeClr val="tx1"/>
+        </a:solidFill>
+        <a:latin typeface="+mn-lt"/>
+        <a:ea typeface="+mn-ea"/>
+        <a:cs typeface="+mn-cs"/>
+      </a:defRPr>
+    </a:lvl9pPr>
+  </p:defaultTextStyle>
 </p:presentation>
 </file>
 
 <file path=ppt/notesMasters/notesMaster1.xml><?xml version="1.0" encoding="utf-8"?>
-<p:notesMaster xmlns:p="http://schemas.openxmlformats.org/presentationml/2006/main">
+<p:notesMaster xmlns:a="http://schemas.openxmlformats.org/drawingml/2006/main" xmlns:r="http://schemas.openxmlformats.org/officeDocument/2006/relationships" xmlns:p="http://schemas.openxmlformats.org/presentationml/2006/main">
   <p:cSld>
     <p:bg>
       <p:bgRef idx="1001">
-        <a:schemeClr xmlns:a="http://schemas.openxmlformats.org/drawingml/2006/main" val="bg1"/>
+        <a:schemeClr val="bg1"/>
       </p:bgRef>
     </p:bg>
     <p:spTree>
@@ -35,380 +130,164 @@
         <p:nvPr/>
       </p:nvGrpSpPr>
       <p:grpSpPr>
-        <a:xfrm xmlns:a="http://schemas.openxmlformats.org/drawingml/2006/main"/>
+        <a:xfrm>
+          <a:off x="0" y="0"/>
+          <a:ext cx="0" cy="0"/>
+          <a:chOff x="0" y="0"/>
+          <a:chExt cx="0" cy="0"/>
+        </a:xfrm>
       </p:grpSpPr>
       <p:sp>
         <p:nvSpPr>
           <p:cNvPr id="2" name="Header Placeholder"/>
-          <p:cNvSpPr/>
+          <p:cNvSpPr>
+            <a:spLocks noGrp="1"/>
+          </p:cNvSpPr>
           <p:nvPr>
             <p:ph type="hdr" sz="quarter"/>
           </p:nvPr>
         </p:nvSpPr>
         <p:spPr>
-          <a:prstGeom xmlns:a="http://schemas.openxmlformats.org/drawingml/2006/main" prst="rect">
-            <a:avLst/>
-          </a:prstGeom>
-        </p:spPr>
-        <p:txBody>
-          <a:bodyPr xmlns:a="http://schemas.openxmlformats.org/drawingml/2006/main"/>
-          <a:lstStyle xmlns:a="http://schemas.openxmlformats.org/drawingml/2006/main"/>
-          <a:p xmlns:a="http://schemas.openxmlformats.org/drawingml/2006/main"/>
+          <a:prstGeom prst="rect">
+            <a:avLst/>
+          </a:prstGeom>
+        </p:spPr>
+        <p:txBody>
+          <a:bodyPr/>
+          <a:lstStyle/>
+          <a:p>
+            <a:endParaRPr/>
+          </a:p>
         </p:txBody>
       </p:sp>
       <p:sp>
         <p:nvSpPr>
           <p:cNvPr id="3" name="Date Placeholder"/>
-          <p:cNvSpPr/>
+          <p:cNvSpPr>
+            <a:spLocks noGrp="1"/>
+          </p:cNvSpPr>
           <p:nvPr>
             <p:ph type="dt" sz="quarter" idx="1"/>
           </p:nvPr>
         </p:nvSpPr>
         <p:spPr>
-          <a:prstGeom xmlns:a="http://schemas.openxmlformats.org/drawingml/2006/main" prst="rect">
-            <a:avLst/>
-          </a:prstGeom>
-        </p:spPr>
-        <p:txBody>
-          <a:bodyPr xmlns:a="http://schemas.openxmlformats.org/drawingml/2006/main"/>
-          <a:lstStyle xmlns:a="http://schemas.openxmlformats.org/drawingml/2006/main"/>
-          <a:p xmlns:a="http://schemas.openxmlformats.org/drawingml/2006/main"/>
+          <a:prstGeom prst="rect">
+            <a:avLst/>
+          </a:prstGeom>
+        </p:spPr>
+        <p:txBody>
+          <a:bodyPr/>
+          <a:lstStyle/>
+          <a:p>
+            <a:endParaRPr/>
+          </a:p>
         </p:txBody>
       </p:sp>
       <p:sp>
         <p:nvSpPr>
           <p:cNvPr id="4" name="Slide Image Placeholder"/>
-          <p:cNvSpPr/>
+          <p:cNvSpPr>
+            <a:spLocks noGrp="1" noRot="1" noChangeAspect="1"/>
+          </p:cNvSpPr>
           <p:nvPr>
             <p:ph type="sldImg" idx="2"/>
           </p:nvPr>
         </p:nvSpPr>
         <p:spPr>
-          <a:prstGeom xmlns:a="http://schemas.openxmlformats.org/drawingml/2006/main" prst="rect">
-            <a:avLst/>
-          </a:prstGeom>
-        </p:spPr>
-        <p:txBody>
-          <a:bodyPr xmlns:a="http://schemas.openxmlformats.org/drawingml/2006/main"/>
-          <a:lstStyle xmlns:a="http://schemas.openxmlformats.org/drawingml/2006/main"/>
-          <a:p xmlns:a="http://schemas.openxmlformats.org/drawingml/2006/main"/>
+          <a:prstGeom prst="rect">
+            <a:avLst/>
+          </a:prstGeom>
+        </p:spPr>
+        <p:txBody>
+          <a:bodyPr/>
+          <a:lstStyle/>
+          <a:p>
+            <a:endParaRPr/>
+          </a:p>
         </p:txBody>
       </p:sp>
       <p:sp>
         <p:nvSpPr>
           <p:cNvPr id="5" name="Notes Placeholder"/>
-          <p:cNvSpPr/>
+          <p:cNvSpPr>
+            <a:spLocks noGrp="1"/>
+          </p:cNvSpPr>
           <p:nvPr>
             <p:ph type="body" sz="quarter" idx="3"/>
           </p:nvPr>
         </p:nvSpPr>
         <p:spPr>
-          <a:prstGeom xmlns:a="http://schemas.openxmlformats.org/drawingml/2006/main" prst="rect">
-            <a:avLst/>
-          </a:prstGeom>
-        </p:spPr>
-        <p:txBody>
-          <a:bodyPr xmlns:a="http://schemas.openxmlformats.org/drawingml/2006/main"/>
-          <a:lstStyle xmlns:a="http://schemas.openxmlformats.org/drawingml/2006/main"/>
-          <a:p xmlns:a="http://schemas.openxmlformats.org/drawingml/2006/main"/>
+          <a:prstGeom prst="rect">
+            <a:avLst/>
+          </a:prstGeom>
+        </p:spPr>
+        <p:txBody>
+          <a:bodyPr/>
+          <a:lstStyle/>
+          <a:p>
+            <a:endParaRPr/>
+          </a:p>
         </p:txBody>
       </p:sp>
       <p:sp>
         <p:nvSpPr>
           <p:cNvPr id="6" name="Footer Placeholder"/>
-          <p:cNvSpPr/>
+          <p:cNvSpPr>
+            <a:spLocks noGrp="1"/>
+          </p:cNvSpPr>
           <p:nvPr>
             <p:ph type="ftr" sz="quarter" idx="4"/>
           </p:nvPr>
         </p:nvSpPr>
         <p:spPr>
-          <a:prstGeom xmlns:a="http://schemas.openxmlformats.org/drawingml/2006/main" prst="rect">
-            <a:avLst/>
-          </a:prstGeom>
-        </p:spPr>
-        <p:txBody>
-          <a:bodyPr xmlns:a="http://schemas.openxmlformats.org/drawingml/2006/main"/>
-          <a:lstStyle xmlns:a="http://schemas.openxmlformats.org/drawingml/2006/main"/>
-          <a:p xmlns:a="http://schemas.openxmlformats.org/drawingml/2006/main"/>
+          <a:prstGeom prst="rect">
+            <a:avLst/>
+          </a:prstGeom>
+        </p:spPr>
+        <p:txBody>
+          <a:bodyPr/>
+          <a:lstStyle/>
+          <a:p>
+            <a:endParaRPr/>
+          </a:p>
         </p:txBody>
       </p:sp>
       <p:sp>
         <p:nvSpPr>
           <p:cNvPr id="7" name="Slide Number Placeholder"/>
-          <p:cNvSpPr/>
+          <p:cNvSpPr>
+            <a:spLocks noGrp="1"/>
+          </p:cNvSpPr>
           <p:nvPr>
             <p:ph type="sldNum" sz="quarter" idx="5"/>
           </p:nvPr>
         </p:nvSpPr>
         <p:spPr>
-          <a:prstGeom xmlns:a="http://schemas.openxmlformats.org/drawingml/2006/main" prst="rect">
-            <a:avLst/>
-          </a:prstGeom>
-        </p:spPr>
-        <p:txBody>
-          <a:bodyPr xmlns:a="http://schemas.openxmlformats.org/drawingml/2006/main"/>
-          <a:lstStyle xmlns:a="http://schemas.openxmlformats.org/drawingml/2006/main"/>
-          <a:p xmlns:a="http://schemas.openxmlformats.org/drawingml/2006/main"/>
+          <a:prstGeom prst="rect">
+            <a:avLst/>
+          </a:prstGeom>
+        </p:spPr>
+        <p:txBody>
+          <a:bodyPr/>
+          <a:lstStyle/>
+          <a:p>
+            <a:endParaRPr/>
+          </a:p>
         </p:txBody>
       </p:sp>
     </p:spTree>
   </p:cSld>
   <p:clrMap bg1="lt1" tx1="dk1" bg2="lt2" tx2="dk2" accent1="accent1" accent2="accent2" accent3="accent3" accent4="accent4" accent5="accent5" accent6="accent6" hlink="hlink" folHlink="folHlink"/>
   <p:notesStyle>
-    <a:lvl1pPr xmlns:a="http://schemas.openxmlformats.org/drawingml/2006/main" marL="0" algn="l" defTabSz="914400" rtl="0" eaLnBrk="1" latinLnBrk="0" hangingPunct="1">
+    <a:lvl1pPr marL="0" algn="l" defTabSz="914400" rtl="0" eaLnBrk="1" latinLnBrk="0" hangingPunct="1">
       <a:defRPr sz="1200" kern="1200"/>
     </a:lvl1pPr>
   </p:notesStyle>
 </p:notesMaster>
 </file>
 
-<file path=ppt/notesMasters/theme/theme3.xml><?xml version="1.0" encoding="utf-8"?>
-<a:theme xmlns:a="http://schemas.openxmlformats.org/drawingml/2006/main" name="ChatGPT">
-  <a:themeElements>
-    <a:clrScheme name="ChatGPT">
-      <a:dk1>
-        <a:srgbClr val="000000"/>
-      </a:dk1>
-      <a:lt1>
-        <a:srgbClr val="FFFFFF"/>
-      </a:lt1>
-      <a:dk2>
-        <a:srgbClr val="0E2841"/>
-      </a:dk2>
-      <a:lt2>
-        <a:srgbClr val="E8E8E8"/>
-      </a:lt2>
-      <a:accent1>
-        <a:srgbClr val="156082"/>
-      </a:accent1>
-      <a:accent2>
-        <a:srgbClr val="E97132"/>
-      </a:accent2>
-      <a:accent3>
-        <a:srgbClr val="196B24"/>
-      </a:accent3>
-      <a:accent4>
-        <a:srgbClr val="0F9ED5"/>
-      </a:accent4>
-      <a:accent5>
-        <a:srgbClr val="A02B93"/>
-      </a:accent5>
-      <a:accent6>
-        <a:srgbClr val="4EA72E"/>
-      </a:accent6>
-      <a:hlink>
-        <a:srgbClr val="467886"/>
-      </a:hlink>
-      <a:folHlink>
-        <a:srgbClr val="96607D"/>
-      </a:folHlink>
-    </a:clrScheme>
-    <a:fontScheme name="Office">
-      <a:majorFont>
-        <a:latin typeface="Calibri Light"/>
-        <a:ea typeface="Calibri Light"/>
-        <a:cs typeface="Calibri Light"/>
-      </a:majorFont>
-      <a:minorFont>
-        <a:latin typeface="Calibri"/>
-        <a:ea typeface="Calibri"/>
-        <a:cs typeface="Calibri"/>
-      </a:minorFont>
-    </a:fontScheme>
-    <a:fmtScheme name="ChatGPT">
-      <a:fillStyleLst>
-        <a:solidFill>
-          <a:schemeClr val="phClr"/>
-        </a:solidFill>
-        <a:gradFill>
-          <a:gsLst>
-            <a:gs pos="0">
-              <a:schemeClr val="phClr">
-                <a:tint val="67000"/>
-                <a:lumMod val="110000"/>
-                <a:satMod val="105000"/>
-              </a:schemeClr>
-            </a:gs>
-            <a:gs pos="50000">
-              <a:schemeClr val="phClr">
-                <a:tint val="73000"/>
-                <a:lumMod val="105000"/>
-                <a:satMod val="103000"/>
-              </a:schemeClr>
-            </a:gs>
-            <a:gs pos="100000">
-              <a:schemeClr val="phClr">
-                <a:tint val="81000"/>
-                <a:lumMod val="105000"/>
-                <a:satMod val="109000"/>
-              </a:schemeClr>
-            </a:gs>
-          </a:gsLst>
-          <a:lin ang="5400000" scaled="0"/>
-        </a:gradFill>
-        <a:gradFill>
-          <a:gsLst>
-            <a:gs pos="0">
-              <a:schemeClr val="phClr">
-                <a:tint val="94000"/>
-                <a:lumMod val="102000"/>
-                <a:satMod val="103000"/>
-              </a:schemeClr>
-            </a:gs>
-            <a:gs pos="50000">
-              <a:schemeClr val="phClr">
-                <a:shade val="100000"/>
-                <a:lumMod val="100000"/>
-                <a:satMod val="110000"/>
-              </a:schemeClr>
-            </a:gs>
-            <a:gs pos="100000">
-              <a:schemeClr val="phClr">
-                <a:shade val="78000"/>
-                <a:lumMod val="99000"/>
-                <a:satMod val="120000"/>
-              </a:schemeClr>
-            </a:gs>
-          </a:gsLst>
-          <a:lin ang="5400000" scaled="0"/>
-        </a:gradFill>
-      </a:fillStyleLst>
-      <a:lnStyleLst>
-        <a:ln w="12700">
-          <a:solidFill>
-            <a:schemeClr val="phClr"/>
-          </a:solidFill>
-          <a:prstDash val="solid"/>
-        </a:ln>
-        <a:ln w="19050">
-          <a:solidFill>
-            <a:schemeClr val="phClr"/>
-          </a:solidFill>
-          <a:prstDash val="solid"/>
-        </a:ln>
-        <a:ln w="25400">
-          <a:solidFill>
-            <a:schemeClr val="phClr"/>
-          </a:solidFill>
-          <a:prstDash val="solid"/>
-        </a:ln>
-      </a:lnStyleLst>
-      <a:effectStyleLst>
-        <a:effectStyle>
-          <a:effectLst/>
-        </a:effectStyle>
-        <a:effectStyle>
-          <a:effectLst/>
-        </a:effectStyle>
-        <a:effectStyle>
-          <a:effectLst>
-            <a:outerShdw blurRad="57150" dist="19050" dir="5400000">
-              <a:srgbClr val="000000">
-                <a:alpha val="16000"/>
-              </a:srgbClr>
-            </a:outerShdw>
-          </a:effectLst>
-        </a:effectStyle>
-        <a:effectStyle>
-          <a:effectLst>
-            <a:outerShdw blurRad="19050" dist="9525" dir="5400000">
-              <a:srgbClr val="000000">
-                <a:alpha val="6000"/>
-              </a:srgbClr>
-            </a:outerShdw>
-          </a:effectLst>
-        </a:effectStyle>
-        <a:effectStyle>
-          <a:effectLst>
-            <a:outerShdw blurRad="28575" dist="9525" dir="5400000">
-              <a:srgbClr val="000000">
-                <a:alpha val="8000"/>
-              </a:srgbClr>
-            </a:outerShdw>
-          </a:effectLst>
-        </a:effectStyle>
-        <a:effectStyle>
-          <a:effectLst>
-            <a:outerShdw blurRad="57150" dist="19050" dir="5400000">
-              <a:srgbClr val="000000">
-                <a:alpha val="10000"/>
-              </a:srgbClr>
-            </a:outerShdw>
-          </a:effectLst>
-        </a:effectStyle>
-        <a:effectStyle>
-          <a:effectLst>
-            <a:outerShdw blurRad="114300" dist="38100" dir="5400000">
-              <a:srgbClr val="000000">
-                <a:alpha val="12000"/>
-              </a:srgbClr>
-            </a:outerShdw>
-          </a:effectLst>
-        </a:effectStyle>
-        <a:effectStyle>
-          <a:effectLst>
-            <a:outerShdw blurRad="171450" dist="57150" dir="5400000">
-              <a:srgbClr val="000000">
-                <a:alpha val="16000"/>
-              </a:srgbClr>
-            </a:outerShdw>
-          </a:effectLst>
-        </a:effectStyle>
-        <a:effectStyle>
-          <a:effectLst>
-            <a:outerShdw blurRad="266700" dist="95250" dir="5400000">
-              <a:srgbClr val="000000">
-                <a:alpha val="24000"/>
-              </a:srgbClr>
-            </a:outerShdw>
-          </a:effectLst>
-        </a:effectStyle>
-      </a:effectStyleLst>
-      <a:bgFillStyleLst>
-        <a:solidFill>
-          <a:schemeClr val="phClr"/>
-        </a:solidFill>
-        <a:solidFill>
-          <a:schemeClr val="phClr">
-            <a:tint val="95000"/>
-            <a:satMod val="170000"/>
-          </a:schemeClr>
-        </a:solidFill>
-        <a:gradFill>
-          <a:gsLst>
-            <a:gs pos="0">
-              <a:schemeClr val="phClr">
-                <a:tint val="93000"/>
-                <a:shade val="98000"/>
-                <a:lumMod val="102000"/>
-                <a:satMod val="150000"/>
-              </a:schemeClr>
-            </a:gs>
-            <a:gs pos="50000">
-              <a:schemeClr val="phClr">
-                <a:tint val="98000"/>
-                <a:shade val="90000"/>
-                <a:lumMod val="103000"/>
-                <a:satMod val="130000"/>
-              </a:schemeClr>
-            </a:gs>
-            <a:gs pos="100000">
-              <a:schemeClr val="phClr">
-                <a:shade val="63000"/>
-                <a:satMod val="120000"/>
-              </a:schemeClr>
-            </a:gs>
-          </a:gsLst>
-          <a:lin ang="5400000" scaled="0"/>
-        </a:gradFill>
-      </a:bgFillStyleLst>
-    </a:fmtScheme>
-  </a:themeElements>
-</a:theme>
-</file>
-
 <file path=ppt/notesSlides/notesSlide1.xml><?xml version="1.0" encoding="utf-8"?>
-<p:notes xmlns:p="http://schemas.openxmlformats.org/presentationml/2006/main">
+<p:notes xmlns:a="http://schemas.openxmlformats.org/drawingml/2006/main" xmlns:r="http://schemas.openxmlformats.org/officeDocument/2006/relationships" xmlns:p="http://schemas.openxmlformats.org/presentationml/2006/main">
   <p:cSld>
     <p:spTree>
       <p:nvGrpSpPr>
@@ -417,16 +296,21 @@
         <p:nvPr/>
       </p:nvGrpSpPr>
       <p:grpSpPr>
-        <a:xfrm xmlns:a="http://schemas.openxmlformats.org/drawingml/2006/main"/>
+        <a:xfrm>
+          <a:off x="0" y="0"/>
+          <a:ext cx="0" cy="0"/>
+          <a:chOff x="0" y="0"/>
+          <a:chExt cx="0" cy="0"/>
+        </a:xfrm>
       </p:grpSpPr>
       <p:sp>
         <p:nvSpPr>
           <p:cNvPr id="2" name="Slide Image Placeholder 1"/>
           <p:cNvSpPr>
-            <a:spLocks xmlns:a="http://schemas.openxmlformats.org/drawingml/2006/main" noGrp="1"/>
+            <a:spLocks noGrp="1" noRot="1" noChangeAspect="1"/>
           </p:cNvSpPr>
           <p:nvPr>
-            <p:ph type="sldImg" idx="0"/>
+            <p:ph type="sldImg"/>
           </p:nvPr>
         </p:nvSpPr>
         <p:spPr/>
@@ -435,7 +319,7 @@
         <p:nvSpPr>
           <p:cNvPr id="3" name="Notes Placeholder 2"/>
           <p:cNvSpPr>
-            <a:spLocks xmlns:a="http://schemas.openxmlformats.org/drawingml/2006/main" noGrp="1"/>
+            <a:spLocks noGrp="1"/>
           </p:cNvSpPr>
           <p:nvPr>
             <p:ph type="body" idx="1"/>
@@ -443,29 +327,27 @@
         </p:nvSpPr>
         <p:spPr/>
         <p:txBody>
-          <a:bodyPr xmlns:a="http://schemas.openxmlformats.org/drawingml/2006/main"/>
-          <a:lstStyle xmlns:a="http://schemas.openxmlformats.org/drawingml/2006/main"/>
-          <a:p xmlns:a="http://schemas.openxmlformats.org/drawingml/2006/main">
+          <a:bodyPr/>
+          <a:lstStyle/>
+          <a:p>
             <a:r>
               <a:t>Open with the product promise: engine strength becomes a teachable reason.</a:t>
             </a:r>
           </a:p>
-          <a:p xmlns:a="http://schemas.openxmlformats.org/drawingml/2006/main">
-            <a:r>
-              <a:t/>
-            </a:r>
-          </a:p>
-          <a:p xmlns:a="http://schemas.openxmlformats.org/drawingml/2006/main">
+          <a:p>
+            <a:endParaRPr/>
+          </a:p>
+          <a:p>
             <a:r>
               <a:t>[Sources]</a:t>
             </a:r>
           </a:p>
-          <a:p xmlns:a="http://schemas.openxmlformats.org/drawingml/2006/main">
+          <a:p>
             <a:r>
               <a:t>- YIJIAN local project architecture, benchmark scripts and acceptance evidence, accessed 2026-08-03.</a:t>
             </a:r>
           </a:p>
-          <a:p xmlns:a="http://schemas.openxmlformats.org/drawingml/2006/main">
+          <a:p>
             <a:r>
               <a:t>[/Sources]</a:t>
             </a:r>
@@ -476,7 +358,7 @@
         <p:nvSpPr>
           <p:cNvPr id="4" name="Slide Number Placeholder 3"/>
           <p:cNvSpPr>
-            <a:spLocks xmlns:a="http://schemas.openxmlformats.org/drawingml/2006/main" noGrp="1"/>
+            <a:spLocks noGrp="1"/>
           </p:cNvSpPr>
           <p:nvPr>
             <p:ph type="sldNum" idx="5"/>
@@ -484,21 +366,23 @@
         </p:nvSpPr>
         <p:spPr/>
         <p:txBody>
-          <a:bodyPr xmlns:a="http://schemas.openxmlformats.org/drawingml/2006/main"/>
-          <a:lstStyle xmlns:a="http://schemas.openxmlformats.org/drawingml/2006/main"/>
-          <a:p xmlns:a="http://schemas.openxmlformats.org/drawingml/2006/main"/>
+          <a:bodyPr/>
+          <a:lstStyle/>
+          <a:p>
+            <a:endParaRPr/>
+          </a:p>
         </p:txBody>
       </p:sp>
     </p:spTree>
   </p:cSld>
   <p:clrMapOvr>
-    <a:masterClrMapping xmlns:a="http://schemas.openxmlformats.org/drawingml/2006/main"/>
+    <a:masterClrMapping/>
   </p:clrMapOvr>
 </p:notes>
 </file>
 
 <file path=ppt/notesSlides/notesSlide2.xml><?xml version="1.0" encoding="utf-8"?>
-<p:notes xmlns:p="http://schemas.openxmlformats.org/presentationml/2006/main">
+<p:notes xmlns:a="http://schemas.openxmlformats.org/drawingml/2006/main" xmlns:r="http://schemas.openxmlformats.org/officeDocument/2006/relationships" xmlns:p="http://schemas.openxmlformats.org/presentationml/2006/main">
   <p:cSld>
     <p:spTree>
       <p:nvGrpSpPr>
@@ -507,16 +391,21 @@
         <p:nvPr/>
       </p:nvGrpSpPr>
       <p:grpSpPr>
-        <a:xfrm xmlns:a="http://schemas.openxmlformats.org/drawingml/2006/main"/>
+        <a:xfrm>
+          <a:off x="0" y="0"/>
+          <a:ext cx="0" cy="0"/>
+          <a:chOff x="0" y="0"/>
+          <a:chExt cx="0" cy="0"/>
+        </a:xfrm>
       </p:grpSpPr>
       <p:sp>
         <p:nvSpPr>
           <p:cNvPr id="2" name="Slide Image Placeholder 1"/>
           <p:cNvSpPr>
-            <a:spLocks xmlns:a="http://schemas.openxmlformats.org/drawingml/2006/main" noGrp="1"/>
+            <a:spLocks noGrp="1" noRot="1" noChangeAspect="1"/>
           </p:cNvSpPr>
           <p:nvPr>
-            <p:ph type="sldImg" idx="0"/>
+            <p:ph type="sldImg"/>
           </p:nvPr>
         </p:nvSpPr>
         <p:spPr/>
@@ -525,7 +414,7 @@
         <p:nvSpPr>
           <p:cNvPr id="3" name="Notes Placeholder 2"/>
           <p:cNvSpPr>
-            <a:spLocks xmlns:a="http://schemas.openxmlformats.org/drawingml/2006/main" noGrp="1"/>
+            <a:spLocks noGrp="1"/>
           </p:cNvSpPr>
           <p:nvPr>
             <p:ph type="body" idx="1"/>
@@ -533,34 +422,32 @@
         </p:nvSpPr>
         <p:spPr/>
         <p:txBody>
-          <a:bodyPr xmlns:a="http://schemas.openxmlformats.org/drawingml/2006/main"/>
-          <a:lstStyle xmlns:a="http://schemas.openxmlformats.org/drawingml/2006/main"/>
-          <a:p xmlns:a="http://schemas.openxmlformats.org/drawingml/2006/main">
+          <a:bodyPr/>
+          <a:lstStyle/>
+          <a:p>
             <a:r>
               <a:t>The board, evidence, teaching card, variation controls and dialogue share one position context.</a:t>
             </a:r>
           </a:p>
-          <a:p xmlns:a="http://schemas.openxmlformats.org/drawingml/2006/main">
-            <a:r>
-              <a:t/>
-            </a:r>
-          </a:p>
-          <a:p xmlns:a="http://schemas.openxmlformats.org/drawingml/2006/main">
+          <a:p>
+            <a:endParaRPr/>
+          </a:p>
+          <a:p>
             <a:r>
               <a:t>[Sources]</a:t>
             </a:r>
           </a:p>
-          <a:p xmlns:a="http://schemas.openxmlformats.org/drawingml/2006/main">
+          <a:p>
             <a:r>
               <a:t>- User-provided YIJIAN product screenshot, accessed 2026-08-03.</a:t>
             </a:r>
           </a:p>
-          <a:p xmlns:a="http://schemas.openxmlformats.org/drawingml/2006/main">
+          <a:p>
             <a:r>
               <a:t>- YIJIAN local project architecture, accessed 2026-08-03.</a:t>
             </a:r>
           </a:p>
-          <a:p xmlns:a="http://schemas.openxmlformats.org/drawingml/2006/main">
+          <a:p>
             <a:r>
               <a:t>[/Sources]</a:t>
             </a:r>
@@ -571,7 +458,7 @@
         <p:nvSpPr>
           <p:cNvPr id="4" name="Slide Number Placeholder 3"/>
           <p:cNvSpPr>
-            <a:spLocks xmlns:a="http://schemas.openxmlformats.org/drawingml/2006/main" noGrp="1"/>
+            <a:spLocks noGrp="1"/>
           </p:cNvSpPr>
           <p:nvPr>
             <p:ph type="sldNum" idx="5"/>
@@ -579,21 +466,23 @@
         </p:nvSpPr>
         <p:spPr/>
         <p:txBody>
-          <a:bodyPr xmlns:a="http://schemas.openxmlformats.org/drawingml/2006/main"/>
-          <a:lstStyle xmlns:a="http://schemas.openxmlformats.org/drawingml/2006/main"/>
-          <a:p xmlns:a="http://schemas.openxmlformats.org/drawingml/2006/main"/>
+          <a:bodyPr/>
+          <a:lstStyle/>
+          <a:p>
+            <a:endParaRPr/>
+          </a:p>
         </p:txBody>
       </p:sp>
     </p:spTree>
   </p:cSld>
   <p:clrMapOvr>
-    <a:masterClrMapping xmlns:a="http://schemas.openxmlformats.org/drawingml/2006/main"/>
+    <a:masterClrMapping/>
   </p:clrMapOvr>
 </p:notes>
 </file>
 
 <file path=ppt/notesSlides/notesSlide3.xml><?xml version="1.0" encoding="utf-8"?>
-<p:notes xmlns:p="http://schemas.openxmlformats.org/presentationml/2006/main">
+<p:notes xmlns:a="http://schemas.openxmlformats.org/drawingml/2006/main" xmlns:r="http://schemas.openxmlformats.org/officeDocument/2006/relationships" xmlns:p="http://schemas.openxmlformats.org/presentationml/2006/main">
   <p:cSld>
     <p:spTree>
       <p:nvGrpSpPr>
@@ -602,16 +491,21 @@
         <p:nvPr/>
       </p:nvGrpSpPr>
       <p:grpSpPr>
-        <a:xfrm xmlns:a="http://schemas.openxmlformats.org/drawingml/2006/main"/>
+        <a:xfrm>
+          <a:off x="0" y="0"/>
+          <a:ext cx="0" cy="0"/>
+          <a:chOff x="0" y="0"/>
+          <a:chExt cx="0" cy="0"/>
+        </a:xfrm>
       </p:grpSpPr>
       <p:sp>
         <p:nvSpPr>
           <p:cNvPr id="2" name="Slide Image Placeholder 1"/>
           <p:cNvSpPr>
-            <a:spLocks xmlns:a="http://schemas.openxmlformats.org/drawingml/2006/main" noGrp="1"/>
+            <a:spLocks noGrp="1" noRot="1" noChangeAspect="1"/>
           </p:cNvSpPr>
           <p:nvPr>
-            <p:ph type="sldImg" idx="0"/>
+            <p:ph type="sldImg"/>
           </p:nvPr>
         </p:nvSpPr>
         <p:spPr/>
@@ -620,7 +514,7 @@
         <p:nvSpPr>
           <p:cNvPr id="3" name="Notes Placeholder 2"/>
           <p:cNvSpPr>
-            <a:spLocks xmlns:a="http://schemas.openxmlformats.org/drawingml/2006/main" noGrp="1"/>
+            <a:spLocks noGrp="1"/>
           </p:cNvSpPr>
           <p:nvPr>
             <p:ph type="body" idx="1"/>
@@ -628,29 +522,27 @@
         </p:nvSpPr>
         <p:spPr/>
         <p:txBody>
-          <a:bodyPr xmlns:a="http://schemas.openxmlformats.org/drawingml/2006/main"/>
-          <a:lstStyle xmlns:a="http://schemas.openxmlformats.org/drawingml/2006/main"/>
-          <a:p xmlns:a="http://schemas.openxmlformats.org/drawingml/2006/main">
+          <a:bodyPr/>
+          <a:lstStyle/>
+          <a:p>
             <a:r>
               <a:t>Stress the boundary: facts, heuristics and prose are deliberately separate.</a:t>
             </a:r>
           </a:p>
-          <a:p xmlns:a="http://schemas.openxmlformats.org/drawingml/2006/main">
-            <a:r>
-              <a:t/>
-            </a:r>
-          </a:p>
-          <a:p xmlns:a="http://schemas.openxmlformats.org/drawingml/2006/main">
+          <a:p>
+            <a:endParaRPr/>
+          </a:p>
+          <a:p>
             <a:r>
               <a:t>[Sources]</a:t>
             </a:r>
           </a:p>
-          <a:p xmlns:a="http://schemas.openxmlformats.org/drawingml/2006/main">
+          <a:p>
             <a:r>
               <a:t>- YIJIAN local project architecture, benchmark scripts and acceptance evidence, accessed 2026-08-03.</a:t>
             </a:r>
           </a:p>
-          <a:p xmlns:a="http://schemas.openxmlformats.org/drawingml/2006/main">
+          <a:p>
             <a:r>
               <a:t>[/Sources]</a:t>
             </a:r>
@@ -661,7 +553,7 @@
         <p:nvSpPr>
           <p:cNvPr id="4" name="Slide Number Placeholder 3"/>
           <p:cNvSpPr>
-            <a:spLocks xmlns:a="http://schemas.openxmlformats.org/drawingml/2006/main" noGrp="1"/>
+            <a:spLocks noGrp="1"/>
           </p:cNvSpPr>
           <p:nvPr>
             <p:ph type="sldNum" idx="5"/>
@@ -669,21 +561,23 @@
         </p:nvSpPr>
         <p:spPr/>
         <p:txBody>
-          <a:bodyPr xmlns:a="http://schemas.openxmlformats.org/drawingml/2006/main"/>
-          <a:lstStyle xmlns:a="http://schemas.openxmlformats.org/drawingml/2006/main"/>
-          <a:p xmlns:a="http://schemas.openxmlformats.org/drawingml/2006/main"/>
+          <a:bodyPr/>
+          <a:lstStyle/>
+          <a:p>
+            <a:endParaRPr/>
+          </a:p>
         </p:txBody>
       </p:sp>
     </p:spTree>
   </p:cSld>
   <p:clrMapOvr>
-    <a:masterClrMapping xmlns:a="http://schemas.openxmlformats.org/drawingml/2006/main"/>
+    <a:masterClrMapping/>
   </p:clrMapOvr>
 </p:notes>
 </file>
 
 <file path=ppt/notesSlides/notesSlide4.xml><?xml version="1.0" encoding="utf-8"?>
-<p:notes xmlns:p="http://schemas.openxmlformats.org/presentationml/2006/main">
+<p:notes xmlns:a="http://schemas.openxmlformats.org/drawingml/2006/main" xmlns:r="http://schemas.openxmlformats.org/officeDocument/2006/relationships" xmlns:p="http://schemas.openxmlformats.org/presentationml/2006/main">
   <p:cSld>
     <p:spTree>
       <p:nvGrpSpPr>
@@ -692,16 +586,21 @@
         <p:nvPr/>
       </p:nvGrpSpPr>
       <p:grpSpPr>
-        <a:xfrm xmlns:a="http://schemas.openxmlformats.org/drawingml/2006/main"/>
+        <a:xfrm>
+          <a:off x="0" y="0"/>
+          <a:ext cx="0" cy="0"/>
+          <a:chOff x="0" y="0"/>
+          <a:chExt cx="0" cy="0"/>
+        </a:xfrm>
       </p:grpSpPr>
       <p:sp>
         <p:nvSpPr>
           <p:cNvPr id="2" name="Slide Image Placeholder 1"/>
           <p:cNvSpPr>
-            <a:spLocks xmlns:a="http://schemas.openxmlformats.org/drawingml/2006/main" noGrp="1"/>
+            <a:spLocks noGrp="1" noRot="1" noChangeAspect="1"/>
           </p:cNvSpPr>
           <p:nvPr>
-            <p:ph type="sldImg" idx="0"/>
+            <p:ph type="sldImg"/>
           </p:nvPr>
         </p:nvSpPr>
         <p:spPr/>
@@ -710,7 +609,7 @@
         <p:nvSpPr>
           <p:cNvPr id="3" name="Notes Placeholder 2"/>
           <p:cNvSpPr>
-            <a:spLocks xmlns:a="http://schemas.openxmlformats.org/drawingml/2006/main" noGrp="1"/>
+            <a:spLocks noGrp="1"/>
           </p:cNvSpPr>
           <p:nvPr>
             <p:ph type="body" idx="1"/>
@@ -718,29 +617,27 @@
         </p:nvSpPr>
         <p:spPr/>
         <p:txBody>
-          <a:bodyPr xmlns:a="http://schemas.openxmlformats.org/drawingml/2006/main"/>
-          <a:lstStyle xmlns:a="http://schemas.openxmlformats.org/drawingml/2006/main"/>
-          <a:p xmlns:a="http://schemas.openxmlformats.org/drawingml/2006/main">
+          <a:bodyPr/>
+          <a:lstStyle/>
+          <a:p>
             <a:r>
               <a:t>This is the Track 2 agent loop: tool use, state, reasoning support, validation and fallback.</a:t>
             </a:r>
           </a:p>
-          <a:p xmlns:a="http://schemas.openxmlformats.org/drawingml/2006/main">
-            <a:r>
-              <a:t/>
-            </a:r>
-          </a:p>
-          <a:p xmlns:a="http://schemas.openxmlformats.org/drawingml/2006/main">
+          <a:p>
+            <a:endParaRPr/>
+          </a:p>
+          <a:p>
             <a:r>
               <a:t>[Sources]</a:t>
             </a:r>
           </a:p>
-          <a:p xmlns:a="http://schemas.openxmlformats.org/drawingml/2006/main">
+          <a:p>
             <a:r>
               <a:t>- YIJIAN local project architecture, benchmark scripts and acceptance evidence, accessed 2026-08-03.</a:t>
             </a:r>
           </a:p>
-          <a:p xmlns:a="http://schemas.openxmlformats.org/drawingml/2006/main">
+          <a:p>
             <a:r>
               <a:t>[/Sources]</a:t>
             </a:r>
@@ -751,7 +648,7 @@
         <p:nvSpPr>
           <p:cNvPr id="4" name="Slide Number Placeholder 3"/>
           <p:cNvSpPr>
-            <a:spLocks xmlns:a="http://schemas.openxmlformats.org/drawingml/2006/main" noGrp="1"/>
+            <a:spLocks noGrp="1"/>
           </p:cNvSpPr>
           <p:nvPr>
             <p:ph type="sldNum" idx="5"/>
@@ -759,21 +656,23 @@
         </p:nvSpPr>
         <p:spPr/>
         <p:txBody>
-          <a:bodyPr xmlns:a="http://schemas.openxmlformats.org/drawingml/2006/main"/>
-          <a:lstStyle xmlns:a="http://schemas.openxmlformats.org/drawingml/2006/main"/>
-          <a:p xmlns:a="http://schemas.openxmlformats.org/drawingml/2006/main"/>
+          <a:bodyPr/>
+          <a:lstStyle/>
+          <a:p>
+            <a:endParaRPr/>
+          </a:p>
         </p:txBody>
       </p:sp>
     </p:spTree>
   </p:cSld>
   <p:clrMapOvr>
-    <a:masterClrMapping xmlns:a="http://schemas.openxmlformats.org/drawingml/2006/main"/>
+    <a:masterClrMapping/>
   </p:clrMapOvr>
 </p:notes>
 </file>
 
 <file path=ppt/notesSlides/notesSlide5.xml><?xml version="1.0" encoding="utf-8"?>
-<p:notes xmlns:p="http://schemas.openxmlformats.org/presentationml/2006/main">
+<p:notes xmlns:a="http://schemas.openxmlformats.org/drawingml/2006/main" xmlns:r="http://schemas.openxmlformats.org/officeDocument/2006/relationships" xmlns:p="http://schemas.openxmlformats.org/presentationml/2006/main">
   <p:cSld>
     <p:spTree>
       <p:nvGrpSpPr>
@@ -782,16 +681,21 @@
         <p:nvPr/>
       </p:nvGrpSpPr>
       <p:grpSpPr>
-        <a:xfrm xmlns:a="http://schemas.openxmlformats.org/drawingml/2006/main"/>
+        <a:xfrm>
+          <a:off x="0" y="0"/>
+          <a:ext cx="0" cy="0"/>
+          <a:chOff x="0" y="0"/>
+          <a:chExt cx="0" cy="0"/>
+        </a:xfrm>
       </p:grpSpPr>
       <p:sp>
         <p:nvSpPr>
           <p:cNvPr id="2" name="Slide Image Placeholder 1"/>
           <p:cNvSpPr>
-            <a:spLocks xmlns:a="http://schemas.openxmlformats.org/drawingml/2006/main" noGrp="1"/>
+            <a:spLocks noGrp="1" noRot="1" noChangeAspect="1"/>
           </p:cNvSpPr>
           <p:nvPr>
-            <p:ph type="sldImg" idx="0"/>
+            <p:ph type="sldImg"/>
           </p:nvPr>
         </p:nvSpPr>
         <p:spPr/>
@@ -800,7 +704,7 @@
         <p:nvSpPr>
           <p:cNvPr id="3" name="Notes Placeholder 2"/>
           <p:cNvSpPr>
-            <a:spLocks xmlns:a="http://schemas.openxmlformats.org/drawingml/2006/main" noGrp="1"/>
+            <a:spLocks noGrp="1"/>
           </p:cNvSpPr>
           <p:nvPr>
             <p:ph type="body" idx="1"/>
@@ -808,34 +712,32 @@
         </p:nvSpPr>
         <p:spPr/>
         <p:txBody>
-          <a:bodyPr xmlns:a="http://schemas.openxmlformats.org/drawingml/2006/main"/>
-          <a:lstStyle xmlns:a="http://schemas.openxmlformats.org/drawingml/2006/main"/>
-          <a:p xmlns:a="http://schemas.openxmlformats.org/drawingml/2006/main">
+          <a:bodyPr/>
+          <a:lstStyle/>
+          <a:p>
             <a:r>
               <a:t>Do not overclaim: the six-case coach benchmark is a constructed acceptance set.</a:t>
             </a:r>
           </a:p>
-          <a:p xmlns:a="http://schemas.openxmlformats.org/drawingml/2006/main">
+          <a:p>
             <a:r>
               <a:t>Also mention 373 automated regression tests and 6/6 acceptance cases.</a:t>
             </a:r>
           </a:p>
-          <a:p xmlns:a="http://schemas.openxmlformats.org/drawingml/2006/main">
-            <a:r>
-              <a:t/>
-            </a:r>
-          </a:p>
-          <a:p xmlns:a="http://schemas.openxmlformats.org/drawingml/2006/main">
+          <a:p>
+            <a:endParaRPr/>
+          </a:p>
+          <a:p>
             <a:r>
               <a:t>[Sources]</a:t>
             </a:r>
           </a:p>
-          <a:p xmlns:a="http://schemas.openxmlformats.org/drawingml/2006/main">
+          <a:p>
             <a:r>
               <a:t>- YIJIAN local project architecture, benchmark scripts and acceptance evidence, accessed 2026-08-03.</a:t>
             </a:r>
           </a:p>
-          <a:p xmlns:a="http://schemas.openxmlformats.org/drawingml/2006/main">
+          <a:p>
             <a:r>
               <a:t>[/Sources]</a:t>
             </a:r>
@@ -846,7 +748,7 @@
         <p:nvSpPr>
           <p:cNvPr id="4" name="Slide Number Placeholder 3"/>
           <p:cNvSpPr>
-            <a:spLocks xmlns:a="http://schemas.openxmlformats.org/drawingml/2006/main" noGrp="1"/>
+            <a:spLocks noGrp="1"/>
           </p:cNvSpPr>
           <p:nvPr>
             <p:ph type="sldNum" idx="5"/>
@@ -854,21 +756,23 @@
         </p:nvSpPr>
         <p:spPr/>
         <p:txBody>
-          <a:bodyPr xmlns:a="http://schemas.openxmlformats.org/drawingml/2006/main"/>
-          <a:lstStyle xmlns:a="http://schemas.openxmlformats.org/drawingml/2006/main"/>
-          <a:p xmlns:a="http://schemas.openxmlformats.org/drawingml/2006/main"/>
+          <a:bodyPr/>
+          <a:lstStyle/>
+          <a:p>
+            <a:endParaRPr/>
+          </a:p>
         </p:txBody>
       </p:sp>
     </p:spTree>
   </p:cSld>
   <p:clrMapOvr>
-    <a:masterClrMapping xmlns:a="http://schemas.openxmlformats.org/drawingml/2006/main"/>
+    <a:masterClrMapping/>
   </p:clrMapOvr>
 </p:notes>
 </file>
 
 <file path=ppt/notesSlides/notesSlide6.xml><?xml version="1.0" encoding="utf-8"?>
-<p:notes xmlns:p="http://schemas.openxmlformats.org/presentationml/2006/main">
+<p:notes xmlns:a="http://schemas.openxmlformats.org/drawingml/2006/main" xmlns:r="http://schemas.openxmlformats.org/officeDocument/2006/relationships" xmlns:p="http://schemas.openxmlformats.org/presentationml/2006/main">
   <p:cSld>
     <p:spTree>
       <p:nvGrpSpPr>
@@ -877,16 +781,21 @@
         <p:nvPr/>
       </p:nvGrpSpPr>
       <p:grpSpPr>
-        <a:xfrm xmlns:a="http://schemas.openxmlformats.org/drawingml/2006/main"/>
+        <a:xfrm>
+          <a:off x="0" y="0"/>
+          <a:ext cx="0" cy="0"/>
+          <a:chOff x="0" y="0"/>
+          <a:chExt cx="0" cy="0"/>
+        </a:xfrm>
       </p:grpSpPr>
       <p:sp>
         <p:nvSpPr>
           <p:cNvPr id="2" name="Slide Image Placeholder 1"/>
           <p:cNvSpPr>
-            <a:spLocks xmlns:a="http://schemas.openxmlformats.org/drawingml/2006/main" noGrp="1"/>
+            <a:spLocks noGrp="1" noRot="1" noChangeAspect="1"/>
           </p:cNvSpPr>
           <p:nvPr>
-            <p:ph type="sldImg" idx="0"/>
+            <p:ph type="sldImg"/>
           </p:nvPr>
         </p:nvSpPr>
         <p:spPr/>
@@ -895,7 +804,7 @@
         <p:nvSpPr>
           <p:cNvPr id="3" name="Notes Placeholder 2"/>
           <p:cNvSpPr>
-            <a:spLocks xmlns:a="http://schemas.openxmlformats.org/drawingml/2006/main" noGrp="1"/>
+            <a:spLocks noGrp="1"/>
           </p:cNvSpPr>
           <p:nvPr>
             <p:ph type="body" idx="1"/>
@@ -903,29 +812,27 @@
         </p:nvSpPr>
         <p:spPr/>
         <p:txBody>
-          <a:bodyPr xmlns:a="http://schemas.openxmlformats.org/drawingml/2006/main"/>
-          <a:lstStyle xmlns:a="http://schemas.openxmlformats.org/drawingml/2006/main"/>
-          <a:p xmlns:a="http://schemas.openxmlformats.org/drawingml/2006/main">
+          <a:bodyPr/>
+          <a:lstStyle/>
+          <a:p>
             <a:r>
               <a:t>Close by returning to the human outcome, not the benchmark.</a:t>
             </a:r>
           </a:p>
-          <a:p xmlns:a="http://schemas.openxmlformats.org/drawingml/2006/main">
-            <a:r>
-              <a:t/>
-            </a:r>
-          </a:p>
-          <a:p xmlns:a="http://schemas.openxmlformats.org/drawingml/2006/main">
+          <a:p>
+            <a:endParaRPr/>
+          </a:p>
+          <a:p>
             <a:r>
               <a:t>[Sources]</a:t>
             </a:r>
           </a:p>
-          <a:p xmlns:a="http://schemas.openxmlformats.org/drawingml/2006/main">
+          <a:p>
             <a:r>
               <a:t>- YIJIAN local project architecture, benchmark scripts and acceptance evidence, accessed 2026-08-03.</a:t>
             </a:r>
           </a:p>
-          <a:p xmlns:a="http://schemas.openxmlformats.org/drawingml/2006/main">
+          <a:p>
             <a:r>
               <a:t>[/Sources]</a:t>
             </a:r>
@@ -936,7 +843,7 @@
         <p:nvSpPr>
           <p:cNvPr id="4" name="Slide Number Placeholder 3"/>
           <p:cNvSpPr>
-            <a:spLocks xmlns:a="http://schemas.openxmlformats.org/drawingml/2006/main" noGrp="1"/>
+            <a:spLocks noGrp="1"/>
           </p:cNvSpPr>
           <p:nvPr>
             <p:ph type="sldNum" idx="5"/>
@@ -944,21 +851,23 @@
         </p:nvSpPr>
         <p:spPr/>
         <p:txBody>
-          <a:bodyPr xmlns:a="http://schemas.openxmlformats.org/drawingml/2006/main"/>
-          <a:lstStyle xmlns:a="http://schemas.openxmlformats.org/drawingml/2006/main"/>
-          <a:p xmlns:a="http://schemas.openxmlformats.org/drawingml/2006/main"/>
+          <a:bodyPr/>
+          <a:lstStyle/>
+          <a:p>
+            <a:endParaRPr/>
+          </a:p>
         </p:txBody>
       </p:sp>
     </p:spTree>
   </p:cSld>
   <p:clrMapOvr>
-    <a:masterClrMapping xmlns:a="http://schemas.openxmlformats.org/drawingml/2006/main"/>
+    <a:masterClrMapping/>
   </p:clrMapOvr>
 </p:notes>
 </file>
 
 <file path=ppt/slideLayouts/slideLayout1.xml><?xml version="1.0" encoding="utf-8"?>
-<p:sldLayout xmlns:p="http://schemas.openxmlformats.org/presentationml/2006/main" type="title">
+<p:sldLayout xmlns:a="http://schemas.openxmlformats.org/drawingml/2006/main" xmlns:r="http://schemas.openxmlformats.org/officeDocument/2006/relationships" xmlns:p="http://schemas.openxmlformats.org/presentationml/2006/main" type="title">
   <p:cSld name="Title Slide">
     <p:spTree>
       <p:nvGrpSpPr>
@@ -967,19 +876,27 @@
         <p:nvPr/>
       </p:nvGrpSpPr>
       <p:grpSpPr>
-        <a:xfrm xmlns:a="http://schemas.openxmlformats.org/drawingml/2006/main"/>
+        <a:xfrm>
+          <a:off x="0" y="0"/>
+          <a:ext cx="0" cy="0"/>
+          <a:chOff x="0" y="0"/>
+          <a:chExt cx="0" cy="0"/>
+        </a:xfrm>
       </p:grpSpPr>
     </p:spTree>
   </p:cSld>
+  <p:clrMapOvr>
+    <a:masterClrMapping/>
+  </p:clrMapOvr>
 </p:sldLayout>
 </file>
 
 <file path=ppt/slideMasters/slideMaster1.xml><?xml version="1.0" encoding="utf-8"?>
-<p:sldMaster xmlns:p="http://schemas.openxmlformats.org/presentationml/2006/main">
+<p:sldMaster xmlns:a="http://schemas.openxmlformats.org/drawingml/2006/main" xmlns:r="http://schemas.openxmlformats.org/officeDocument/2006/relationships" xmlns:p="http://schemas.openxmlformats.org/presentationml/2006/main">
   <p:cSld name="Master">
     <p:bg>
       <p:bgRef idx="1001">
-        <a:schemeClr xmlns:a="http://schemas.openxmlformats.org/drawingml/2006/main" val="bg1"/>
+        <a:schemeClr val="bg1"/>
       </p:bgRef>
     </p:bg>
     <p:spTree>
@@ -989,17 +906,22 @@
         <p:nvPr/>
       </p:nvGrpSpPr>
       <p:grpSpPr>
-        <a:xfrm xmlns:a="http://schemas.openxmlformats.org/drawingml/2006/main"/>
+        <a:xfrm>
+          <a:off x="0" y="0"/>
+          <a:ext cx="0" cy="0"/>
+          <a:chOff x="0" y="0"/>
+          <a:chExt cx="0" cy="0"/>
+        </a:xfrm>
       </p:grpSpPr>
     </p:spTree>
   </p:cSld>
   <p:clrMap bg1="lt1" tx1="dk1" bg2="lt2" tx2="dk2" accent1="accent1" accent2="accent2" accent3="accent3" accent4="accent4" accent5="accent5" accent6="accent6" hlink="hlink" folHlink="folHlink"/>
   <p:sldLayoutIdLst>
-    <p:sldLayoutId xmlns:r="http://schemas.openxmlformats.org/officeDocument/2006/relationships" id="2147483649" r:id="R61b48eb8464e4256"/>
+    <p:sldLayoutId id="2147483649" r:id="rId1"/>
   </p:sldLayoutIdLst>
   <p:txStyles>
     <p:titleStyle>
-      <a:lvl1pPr xmlns:a="http://schemas.openxmlformats.org/drawingml/2006/main" algn="l">
+      <a:lvl1pPr algn="l">
         <a:lnSpc>
           <a:spcPct val="90000"/>
         </a:lnSpc>
@@ -1018,7 +940,7 @@
       </a:lvl1pPr>
     </p:titleStyle>
     <p:bodyStyle>
-      <a:lvl1pPr xmlns:a="http://schemas.openxmlformats.org/drawingml/2006/main" marL="228600" indent="-228600" algn="l">
+      <a:lvl1pPr marL="228600" indent="-228600" algn="l">
         <a:lnSpc>
           <a:spcPct val="90000"/>
         </a:lnSpc>
@@ -1035,7 +957,7 @@
           <a:cs typeface="+mn-lt"/>
         </a:defRPr>
       </a:lvl1pPr>
-      <a:lvl2pPr xmlns:a="http://schemas.openxmlformats.org/drawingml/2006/main" marL="685800" indent="-228600" algn="l">
+      <a:lvl2pPr marL="685800" indent="-228600" algn="l">
         <a:lnSpc>
           <a:spcPct val="90000"/>
         </a:lnSpc>
@@ -1052,7 +974,7 @@
           <a:cs typeface="+mn-lt"/>
         </a:defRPr>
       </a:lvl2pPr>
-      <a:lvl3pPr xmlns:a="http://schemas.openxmlformats.org/drawingml/2006/main" marL="1143000" indent="-228600" algn="l">
+      <a:lvl3pPr marL="1143000" indent="-228600" algn="l">
         <a:lnSpc>
           <a:spcPct val="90000"/>
         </a:lnSpc>
@@ -1069,7 +991,7 @@
           <a:cs typeface="+mn-lt"/>
         </a:defRPr>
       </a:lvl3pPr>
-      <a:lvl4pPr xmlns:a="http://schemas.openxmlformats.org/drawingml/2006/main" marL="1600200" indent="-228600" algn="l">
+      <a:lvl4pPr marL="1600200" indent="-228600" algn="l">
         <a:lnSpc>
           <a:spcPct val="90000"/>
         </a:lnSpc>
@@ -1086,7 +1008,7 @@
           <a:cs typeface="+mn-lt"/>
         </a:defRPr>
       </a:lvl4pPr>
-      <a:lvl5pPr xmlns:a="http://schemas.openxmlformats.org/drawingml/2006/main" marL="2057400" indent="-228600" algn="l">
+      <a:lvl5pPr marL="2057400" indent="-228600" algn="l">
         <a:lnSpc>
           <a:spcPct val="90000"/>
         </a:lnSpc>
@@ -1103,7 +1025,7 @@
           <a:cs typeface="+mn-lt"/>
         </a:defRPr>
       </a:lvl5pPr>
-      <a:lvl6pPr xmlns:a="http://schemas.openxmlformats.org/drawingml/2006/main" marL="2514600" indent="-228600" algn="l">
+      <a:lvl6pPr marL="2514600" indent="-228600" algn="l">
         <a:lnSpc>
           <a:spcPct val="90000"/>
         </a:lnSpc>
@@ -1120,7 +1042,7 @@
           <a:cs typeface="+mn-lt"/>
         </a:defRPr>
       </a:lvl6pPr>
-      <a:lvl7pPr xmlns:a="http://schemas.openxmlformats.org/drawingml/2006/main" marL="2971800" indent="-228600" algn="l">
+      <a:lvl7pPr marL="2971800" indent="-228600" algn="l">
         <a:lnSpc>
           <a:spcPct val="90000"/>
         </a:lnSpc>
@@ -1137,7 +1059,7 @@
           <a:cs typeface="+mn-lt"/>
         </a:defRPr>
       </a:lvl7pPr>
-      <a:lvl8pPr xmlns:a="http://schemas.openxmlformats.org/drawingml/2006/main" marL="3429000" indent="-228600" algn="l">
+      <a:lvl8pPr marL="3429000" indent="-228600" algn="l">
         <a:lnSpc>
           <a:spcPct val="90000"/>
         </a:lnSpc>
@@ -1154,7 +1076,7 @@
           <a:cs typeface="+mn-lt"/>
         </a:defRPr>
       </a:lvl8pPr>
-      <a:lvl9pPr xmlns:a="http://schemas.openxmlformats.org/drawingml/2006/main" marL="3886200" indent="-228600" algn="l">
+      <a:lvl9pPr marL="3886200" indent="-228600" algn="l">
         <a:lnSpc>
           <a:spcPct val="90000"/>
         </a:lnSpc>
@@ -1173,7 +1095,7 @@
       </a:lvl9pPr>
     </p:bodyStyle>
     <p:otherStyle>
-      <a:lvl1pPr xmlns:a="http://schemas.openxmlformats.org/drawingml/2006/main" marL="0" algn="l">
+      <a:lvl1pPr marL="0" algn="l">
         <a:buNone/>
         <a:defRPr sz="1800">
           <a:solidFill>
@@ -1184,7 +1106,7 @@
           <a:cs typeface="+mn-lt"/>
         </a:defRPr>
       </a:lvl1pPr>
-      <a:lvl2pPr xmlns:a="http://schemas.openxmlformats.org/drawingml/2006/main" marL="457200" algn="l">
+      <a:lvl2pPr marL="457200" algn="l">
         <a:buNone/>
         <a:defRPr sz="1800">
           <a:solidFill>
@@ -1195,7 +1117,7 @@
           <a:cs typeface="+mn-lt"/>
         </a:defRPr>
       </a:lvl2pPr>
-      <a:lvl3pPr xmlns:a="http://schemas.openxmlformats.org/drawingml/2006/main" marL="914400" algn="l">
+      <a:lvl3pPr marL="914400" algn="l">
         <a:buNone/>
         <a:defRPr sz="1800">
           <a:solidFill>
@@ -1206,7 +1128,7 @@
           <a:cs typeface="+mn-lt"/>
         </a:defRPr>
       </a:lvl3pPr>
-      <a:lvl4pPr xmlns:a="http://schemas.openxmlformats.org/drawingml/2006/main" marL="1371600" algn="l">
+      <a:lvl4pPr marL="1371600" algn="l">
         <a:buNone/>
         <a:defRPr sz="1800">
           <a:solidFill>
@@ -1217,7 +1139,7 @@
           <a:cs typeface="+mn-lt"/>
         </a:defRPr>
       </a:lvl4pPr>
-      <a:lvl5pPr xmlns:a="http://schemas.openxmlformats.org/drawingml/2006/main" marL="1828800" algn="l">
+      <a:lvl5pPr marL="1828800" algn="l">
         <a:buNone/>
         <a:defRPr sz="1800">
           <a:solidFill>
@@ -1228,7 +1150,7 @@
           <a:cs typeface="+mn-lt"/>
         </a:defRPr>
       </a:lvl5pPr>
-      <a:lvl6pPr xmlns:a="http://schemas.openxmlformats.org/drawingml/2006/main" marL="2286000" algn="l">
+      <a:lvl6pPr marL="2286000" algn="l">
         <a:buNone/>
         <a:defRPr sz="1800">
           <a:solidFill>
@@ -1239,7 +1161,7 @@
           <a:cs typeface="+mn-lt"/>
         </a:defRPr>
       </a:lvl6pPr>
-      <a:lvl7pPr xmlns:a="http://schemas.openxmlformats.org/drawingml/2006/main" marL="2743200" algn="l">
+      <a:lvl7pPr marL="2743200" algn="l">
         <a:buNone/>
         <a:defRPr sz="1800">
           <a:solidFill>
@@ -1250,7 +1172,7 @@
           <a:cs typeface="+mn-lt"/>
         </a:defRPr>
       </a:lvl7pPr>
-      <a:lvl8pPr xmlns:a="http://schemas.openxmlformats.org/drawingml/2006/main" marL="3200400" algn="l">
+      <a:lvl8pPr marL="3200400" algn="l">
         <a:buNone/>
         <a:defRPr sz="1800">
           <a:solidFill>
@@ -1261,7 +1183,7 @@
           <a:cs typeface="+mn-lt"/>
         </a:defRPr>
       </a:lvl8pPr>
-      <a:lvl9pPr xmlns:a="http://schemas.openxmlformats.org/drawingml/2006/main" marL="3657600" algn="l">
+      <a:lvl9pPr marL="3657600" algn="l">
         <a:buNone/>
         <a:defRPr sz="1800">
           <a:solidFill>
@@ -1277,253 +1199,8 @@
 </p:sldMaster>
 </file>
 
-<file path=ppt/slideMasters/theme/theme2.xml><?xml version="1.0" encoding="utf-8"?>
-<a:theme xmlns:a="http://schemas.openxmlformats.org/drawingml/2006/main" name="ChatGPT">
-  <a:themeElements>
-    <a:clrScheme name="ChatGPT">
-      <a:dk1>
-        <a:srgbClr val="000000"/>
-      </a:dk1>
-      <a:lt1>
-        <a:srgbClr val="FFFFFF"/>
-      </a:lt1>
-      <a:dk2>
-        <a:srgbClr val="0E2841"/>
-      </a:dk2>
-      <a:lt2>
-        <a:srgbClr val="E8E8E8"/>
-      </a:lt2>
-      <a:accent1>
-        <a:srgbClr val="156082"/>
-      </a:accent1>
-      <a:accent2>
-        <a:srgbClr val="E97132"/>
-      </a:accent2>
-      <a:accent3>
-        <a:srgbClr val="196B24"/>
-      </a:accent3>
-      <a:accent4>
-        <a:srgbClr val="0F9ED5"/>
-      </a:accent4>
-      <a:accent5>
-        <a:srgbClr val="A02B93"/>
-      </a:accent5>
-      <a:accent6>
-        <a:srgbClr val="4EA72E"/>
-      </a:accent6>
-      <a:hlink>
-        <a:srgbClr val="467886"/>
-      </a:hlink>
-      <a:folHlink>
-        <a:srgbClr val="96607D"/>
-      </a:folHlink>
-    </a:clrScheme>
-    <a:fontScheme name="Office">
-      <a:majorFont>
-        <a:latin typeface="Calibri Light"/>
-        <a:ea typeface="Calibri Light"/>
-        <a:cs typeface="Calibri Light"/>
-      </a:majorFont>
-      <a:minorFont>
-        <a:latin typeface="Calibri"/>
-        <a:ea typeface="Calibri"/>
-        <a:cs typeface="Calibri"/>
-      </a:minorFont>
-    </a:fontScheme>
-    <a:fmtScheme name="ChatGPT">
-      <a:fillStyleLst>
-        <a:solidFill>
-          <a:schemeClr val="phClr"/>
-        </a:solidFill>
-        <a:gradFill>
-          <a:gsLst>
-            <a:gs pos="0">
-              <a:schemeClr val="phClr">
-                <a:tint val="67000"/>
-                <a:lumMod val="110000"/>
-                <a:satMod val="105000"/>
-              </a:schemeClr>
-            </a:gs>
-            <a:gs pos="50000">
-              <a:schemeClr val="phClr">
-                <a:tint val="73000"/>
-                <a:lumMod val="105000"/>
-                <a:satMod val="103000"/>
-              </a:schemeClr>
-            </a:gs>
-            <a:gs pos="100000">
-              <a:schemeClr val="phClr">
-                <a:tint val="81000"/>
-                <a:lumMod val="105000"/>
-                <a:satMod val="109000"/>
-              </a:schemeClr>
-            </a:gs>
-          </a:gsLst>
-          <a:lin ang="5400000" scaled="0"/>
-        </a:gradFill>
-        <a:gradFill>
-          <a:gsLst>
-            <a:gs pos="0">
-              <a:schemeClr val="phClr">
-                <a:tint val="94000"/>
-                <a:lumMod val="102000"/>
-                <a:satMod val="103000"/>
-              </a:schemeClr>
-            </a:gs>
-            <a:gs pos="50000">
-              <a:schemeClr val="phClr">
-                <a:shade val="100000"/>
-                <a:lumMod val="100000"/>
-                <a:satMod val="110000"/>
-              </a:schemeClr>
-            </a:gs>
-            <a:gs pos="100000">
-              <a:schemeClr val="phClr">
-                <a:shade val="78000"/>
-                <a:lumMod val="99000"/>
-                <a:satMod val="120000"/>
-              </a:schemeClr>
-            </a:gs>
-          </a:gsLst>
-          <a:lin ang="5400000" scaled="0"/>
-        </a:gradFill>
-      </a:fillStyleLst>
-      <a:lnStyleLst>
-        <a:ln w="12700">
-          <a:solidFill>
-            <a:schemeClr val="phClr"/>
-          </a:solidFill>
-          <a:prstDash val="solid"/>
-        </a:ln>
-        <a:ln w="19050">
-          <a:solidFill>
-            <a:schemeClr val="phClr"/>
-          </a:solidFill>
-          <a:prstDash val="solid"/>
-        </a:ln>
-        <a:ln w="25400">
-          <a:solidFill>
-            <a:schemeClr val="phClr"/>
-          </a:solidFill>
-          <a:prstDash val="solid"/>
-        </a:ln>
-      </a:lnStyleLst>
-      <a:effectStyleLst>
-        <a:effectStyle>
-          <a:effectLst/>
-        </a:effectStyle>
-        <a:effectStyle>
-          <a:effectLst/>
-        </a:effectStyle>
-        <a:effectStyle>
-          <a:effectLst>
-            <a:outerShdw blurRad="57150" dist="19050" dir="5400000">
-              <a:srgbClr val="000000">
-                <a:alpha val="16000"/>
-              </a:srgbClr>
-            </a:outerShdw>
-          </a:effectLst>
-        </a:effectStyle>
-        <a:effectStyle>
-          <a:effectLst>
-            <a:outerShdw blurRad="19050" dist="9525" dir="5400000">
-              <a:srgbClr val="000000">
-                <a:alpha val="6000"/>
-              </a:srgbClr>
-            </a:outerShdw>
-          </a:effectLst>
-        </a:effectStyle>
-        <a:effectStyle>
-          <a:effectLst>
-            <a:outerShdw blurRad="28575" dist="9525" dir="5400000">
-              <a:srgbClr val="000000">
-                <a:alpha val="8000"/>
-              </a:srgbClr>
-            </a:outerShdw>
-          </a:effectLst>
-        </a:effectStyle>
-        <a:effectStyle>
-          <a:effectLst>
-            <a:outerShdw blurRad="57150" dist="19050" dir="5400000">
-              <a:srgbClr val="000000">
-                <a:alpha val="10000"/>
-              </a:srgbClr>
-            </a:outerShdw>
-          </a:effectLst>
-        </a:effectStyle>
-        <a:effectStyle>
-          <a:effectLst>
-            <a:outerShdw blurRad="114300" dist="38100" dir="5400000">
-              <a:srgbClr val="000000">
-                <a:alpha val="12000"/>
-              </a:srgbClr>
-            </a:outerShdw>
-          </a:effectLst>
-        </a:effectStyle>
-        <a:effectStyle>
-          <a:effectLst>
-            <a:outerShdw blurRad="171450" dist="57150" dir="5400000">
-              <a:srgbClr val="000000">
-                <a:alpha val="16000"/>
-              </a:srgbClr>
-            </a:outerShdw>
-          </a:effectLst>
-        </a:effectStyle>
-        <a:effectStyle>
-          <a:effectLst>
-            <a:outerShdw blurRad="266700" dist="95250" dir="5400000">
-              <a:srgbClr val="000000">
-                <a:alpha val="24000"/>
-              </a:srgbClr>
-            </a:outerShdw>
-          </a:effectLst>
-        </a:effectStyle>
-      </a:effectStyleLst>
-      <a:bgFillStyleLst>
-        <a:solidFill>
-          <a:schemeClr val="phClr"/>
-        </a:solidFill>
-        <a:solidFill>
-          <a:schemeClr val="phClr">
-            <a:tint val="95000"/>
-            <a:satMod val="170000"/>
-          </a:schemeClr>
-        </a:solidFill>
-        <a:gradFill>
-          <a:gsLst>
-            <a:gs pos="0">
-              <a:schemeClr val="phClr">
-                <a:tint val="93000"/>
-                <a:shade val="98000"/>
-                <a:lumMod val="102000"/>
-                <a:satMod val="150000"/>
-              </a:schemeClr>
-            </a:gs>
-            <a:gs pos="50000">
-              <a:schemeClr val="phClr">
-                <a:tint val="98000"/>
-                <a:shade val="90000"/>
-                <a:lumMod val="103000"/>
-                <a:satMod val="130000"/>
-              </a:schemeClr>
-            </a:gs>
-            <a:gs pos="100000">
-              <a:schemeClr val="phClr">
-                <a:shade val="63000"/>
-                <a:satMod val="120000"/>
-              </a:schemeClr>
-            </a:gs>
-          </a:gsLst>
-          <a:lin ang="5400000" scaled="0"/>
-        </a:gradFill>
-      </a:bgFillStyleLst>
-    </a:fmtScheme>
-  </a:themeElements>
-</a:theme>
-</file>
-
 <file path=ppt/slides/slide1.xml><?xml version="1.0" encoding="utf-8"?>
-<p:sld xmlns:p="http://schemas.openxmlformats.org/presentationml/2006/main">
+<p:sld xmlns:a="http://schemas.openxmlformats.org/drawingml/2006/main" xmlns:r="http://schemas.openxmlformats.org/officeDocument/2006/relationships" xmlns:p="http://schemas.openxmlformats.org/presentationml/2006/main">
   <p:cSld>
     <p:spTree>
       <p:nvGrpSpPr>
@@ -1532,37 +1209,42 @@
         <p:nvPr/>
       </p:nvGrpSpPr>
       <p:grpSpPr>
-        <a:xfrm xmlns:a="http://schemas.openxmlformats.org/drawingml/2006/main"/>
+        <a:xfrm>
+          <a:off x="0" y="0"/>
+          <a:ext cx="0" cy="0"/>
+          <a:chOff x="0" y="0"/>
+          <a:chExt cx="0" cy="0"/>
+        </a:xfrm>
       </p:grpSpPr>
       <p:sp>
         <p:nvSpPr>
           <p:cNvPr id="4" name="Title-3-1">
-            <a:extLst xmlns:a="http://schemas.openxmlformats.org/drawingml/2006/main">
+            <a:extLst>
               <a:ext uri="{FF2B5EF4-FFF2-40B4-BE49-F238E27FC236}">
                 <a16:creationId xmlns:a16="http://schemas.microsoft.com/office/drawing/2014/main" id="{2A4868DE-0426-4724-BA28-8C7B0CD9AD1F}"/>
               </a:ext>
             </a:extLst>
           </p:cNvPr>
           <p:cNvSpPr>
-            <a:spLocks xmlns:a="http://schemas.openxmlformats.org/drawingml/2006/main" noGrp="1"/>
-          </p:cNvSpPr>
-          <p:nvPr/>
-        </p:nvSpPr>
-        <p:spPr>
-          <a:xfrm xmlns:a="http://schemas.openxmlformats.org/drawingml/2006/main">
+            <a:spLocks noGrp="1"/>
+          </p:cNvSpPr>
+          <p:nvPr/>
+        </p:nvSpPr>
+        <p:spPr>
+          <a:xfrm>
             <a:off x="393668" y="1738789"/>
             <a:ext cx="9448800" cy="2491454"/>
           </a:xfrm>
-          <a:prstGeom xmlns:a="http://schemas.openxmlformats.org/drawingml/2006/main" prst="rect">
-            <a:avLst/>
-          </a:prstGeom>
-        </p:spPr>
-        <p:txBody>
-          <a:bodyPr xmlns:a="http://schemas.openxmlformats.org/drawingml/2006/main" lIns="0" tIns="0" rIns="0" bIns="0" anchor="b">
+          <a:prstGeom prst="rect">
+            <a:avLst/>
+          </a:prstGeom>
+        </p:spPr>
+        <p:txBody>
+          <a:bodyPr lIns="0" tIns="0" rIns="0" bIns="0" anchor="b">
             <a:noAutofit/>
           </a:bodyPr>
-          <a:lstStyle xmlns:a="http://schemas.openxmlformats.org/drawingml/2006/main"/>
-          <a:p xmlns:a="http://schemas.openxmlformats.org/drawingml/2006/main">
+          <a:lstStyle/>
+          <a:p>
             <a:pPr algn="l">
               <a:defRPr sz="6000">
                 <a:solidFill>
@@ -1584,32 +1266,32 @@
       <p:sp>
         <p:nvSpPr>
           <p:cNvPr id="2" name="Subtitle-4-2">
-            <a:extLst xmlns:a="http://schemas.openxmlformats.org/drawingml/2006/main">
+            <a:extLst>
               <a:ext uri="{FF2B5EF4-FFF2-40B4-BE49-F238E27FC236}">
                 <a16:creationId xmlns:a16="http://schemas.microsoft.com/office/drawing/2014/main" id="{735E0641-5AC2-4743-B146-2E0F9BCF32B9}"/>
               </a:ext>
             </a:extLst>
           </p:cNvPr>
           <p:cNvSpPr>
-            <a:spLocks xmlns:a="http://schemas.openxmlformats.org/drawingml/2006/main" noGrp="1"/>
-          </p:cNvSpPr>
-          <p:nvPr/>
-        </p:nvSpPr>
-        <p:spPr>
-          <a:xfrm xmlns:a="http://schemas.openxmlformats.org/drawingml/2006/main">
+            <a:spLocks noGrp="1"/>
+          </p:cNvSpPr>
+          <p:nvPr/>
+        </p:nvSpPr>
+        <p:spPr>
+          <a:xfrm>
             <a:off x="393668" y="4742212"/>
             <a:ext cx="5702332" cy="1080230"/>
           </a:xfrm>
-          <a:prstGeom xmlns:a="http://schemas.openxmlformats.org/drawingml/2006/main" prst="rect">
-            <a:avLst/>
-          </a:prstGeom>
-        </p:spPr>
-        <p:txBody>
-          <a:bodyPr xmlns:a="http://schemas.openxmlformats.org/drawingml/2006/main" lIns="0" tIns="0" rIns="0" bIns="0">
+          <a:prstGeom prst="rect">
+            <a:avLst/>
+          </a:prstGeom>
+        </p:spPr>
+        <p:txBody>
+          <a:bodyPr lIns="0" tIns="0" rIns="0" bIns="0">
             <a:noAutofit/>
           </a:bodyPr>
-          <a:lstStyle xmlns:a="http://schemas.openxmlformats.org/drawingml/2006/main"/>
-          <a:p xmlns:a="http://schemas.openxmlformats.org/drawingml/2006/main">
+          <a:lstStyle/>
+          <a:p>
             <a:pPr algn="l">
               <a:defRPr sz="2400">
                 <a:solidFill>
@@ -1629,32 +1311,32 @@
       <p:sp>
         <p:nvSpPr>
           <p:cNvPr id="3" name="Subtitle-4-3">
-            <a:extLst xmlns:a="http://schemas.openxmlformats.org/drawingml/2006/main">
+            <a:extLst>
               <a:ext uri="{FF2B5EF4-FFF2-40B4-BE49-F238E27FC236}">
                 <a16:creationId xmlns:a16="http://schemas.microsoft.com/office/drawing/2014/main" id="{17809345-7972-4C01-A957-CB5236490583}"/>
               </a:ext>
             </a:extLst>
           </p:cNvPr>
           <p:cNvSpPr>
-            <a:spLocks xmlns:a="http://schemas.openxmlformats.org/drawingml/2006/main" noGrp="1"/>
-          </p:cNvSpPr>
-          <p:nvPr/>
-        </p:nvSpPr>
-        <p:spPr>
-          <a:xfrm xmlns:a="http://schemas.openxmlformats.org/drawingml/2006/main">
+            <a:spLocks noGrp="1"/>
+          </p:cNvSpPr>
+          <p:nvPr/>
+        </p:nvSpPr>
+        <p:spPr>
+          <a:xfrm>
             <a:off x="393668" y="392240"/>
             <a:ext cx="5702332" cy="649129"/>
           </a:xfrm>
-          <a:prstGeom xmlns:a="http://schemas.openxmlformats.org/drawingml/2006/main" prst="rect">
-            <a:avLst/>
-          </a:prstGeom>
-        </p:spPr>
-        <p:txBody>
-          <a:bodyPr xmlns:a="http://schemas.openxmlformats.org/drawingml/2006/main" lIns="0" tIns="0" rIns="0" bIns="0">
+          <a:prstGeom prst="rect">
+            <a:avLst/>
+          </a:prstGeom>
+        </p:spPr>
+        <p:txBody>
+          <a:bodyPr lIns="0" tIns="0" rIns="0" bIns="0">
             <a:noAutofit/>
           </a:bodyPr>
-          <a:lstStyle xmlns:a="http://schemas.openxmlformats.org/drawingml/2006/main"/>
-          <a:p xmlns:a="http://schemas.openxmlformats.org/drawingml/2006/main">
+          <a:lstStyle/>
+          <a:p>
             <a:pPr algn="l">
               <a:defRPr sz="2400">
                 <a:solidFill>
@@ -1678,11 +1360,14 @@
       </p:ext>
     </p:extLst>
   </p:cSld>
+  <p:clrMapOvr>
+    <a:masterClrMapping/>
+  </p:clrMapOvr>
 </p:sld>
 </file>
 
 <file path=ppt/slides/slide2.xml><?xml version="1.0" encoding="utf-8"?>
-<p:sld xmlns:p="http://schemas.openxmlformats.org/presentationml/2006/main">
+<p:sld xmlns:a="http://schemas.openxmlformats.org/drawingml/2006/main" xmlns:r="http://schemas.openxmlformats.org/officeDocument/2006/relationships" xmlns:p="http://schemas.openxmlformats.org/presentationml/2006/main">
   <p:cSld>
     <p:spTree>
       <p:nvGrpSpPr>
@@ -1691,37 +1376,42 @@
         <p:nvPr/>
       </p:nvGrpSpPr>
       <p:grpSpPr>
-        <a:xfrm xmlns:a="http://schemas.openxmlformats.org/drawingml/2006/main"/>
+        <a:xfrm>
+          <a:off x="0" y="0"/>
+          <a:ext cx="0" cy="0"/>
+          <a:chOff x="0" y="0"/>
+          <a:chExt cx="0" cy="0"/>
+        </a:xfrm>
       </p:grpSpPr>
       <p:sp>
         <p:nvSpPr>
           <p:cNvPr id="7" name="Google-Shape-532-p58-2">
-            <a:extLst xmlns:a="http://schemas.openxmlformats.org/drawingml/2006/main">
+            <a:extLst>
               <a:ext uri="{FF2B5EF4-FFF2-40B4-BE49-F238E27FC236}">
                 <a16:creationId xmlns:a16="http://schemas.microsoft.com/office/drawing/2014/main" id="{2A426F52-43BE-4C77-8C6D-94900C83A6E6}"/>
               </a:ext>
             </a:extLst>
           </p:cNvPr>
           <p:cNvSpPr>
-            <a:spLocks xmlns:a="http://schemas.openxmlformats.org/drawingml/2006/main" noGrp="1"/>
-          </p:cNvSpPr>
-          <p:nvPr/>
-        </p:nvSpPr>
-        <p:spPr>
-          <a:xfrm xmlns:a="http://schemas.openxmlformats.org/drawingml/2006/main">
+            <a:spLocks noGrp="1"/>
+          </p:cNvSpPr>
+          <p:nvPr/>
+        </p:nvSpPr>
+        <p:spPr>
+          <a:xfrm>
             <a:off x="11279315" y="6279261"/>
             <a:ext cx="518922" cy="241268"/>
           </a:xfrm>
-          <a:prstGeom xmlns:a="http://schemas.openxmlformats.org/drawingml/2006/main" prst="rect">
-            <a:avLst/>
-          </a:prstGeom>
-        </p:spPr>
-        <p:txBody>
-          <a:bodyPr xmlns:a="http://schemas.openxmlformats.org/drawingml/2006/main" wrap="square" lIns="0" tIns="0" rIns="0" bIns="0" anchor="b">
+          <a:prstGeom prst="rect">
+            <a:avLst/>
+          </a:prstGeom>
+        </p:spPr>
+        <p:txBody>
+          <a:bodyPr wrap="square" lIns="0" tIns="0" rIns="0" bIns="0" anchor="b">
             <a:noAutofit/>
           </a:bodyPr>
-          <a:lstStyle xmlns:a="http://schemas.openxmlformats.org/drawingml/2006/main"/>
-          <a:p xmlns:a="http://schemas.openxmlformats.org/drawingml/2006/main">
+          <a:lstStyle/>
+          <a:p>
             <a:pPr algn="r">
               <a:defRPr sz="1000">
                 <a:solidFill>
@@ -1741,32 +1431,32 @@
       <p:sp>
         <p:nvSpPr>
           <p:cNvPr id="2" name="Google-Shape-533-p58-3">
-            <a:extLst xmlns:a="http://schemas.openxmlformats.org/drawingml/2006/main">
+            <a:extLst>
               <a:ext uri="{FF2B5EF4-FFF2-40B4-BE49-F238E27FC236}">
                 <a16:creationId xmlns:a16="http://schemas.microsoft.com/office/drawing/2014/main" id="{E68C0421-704E-4542-8898-E03B6F5FCA3A}"/>
               </a:ext>
             </a:extLst>
           </p:cNvPr>
           <p:cNvSpPr>
-            <a:spLocks xmlns:a="http://schemas.openxmlformats.org/drawingml/2006/main" noGrp="1"/>
-          </p:cNvSpPr>
-          <p:nvPr/>
-        </p:nvSpPr>
-        <p:spPr>
-          <a:xfrm xmlns:a="http://schemas.openxmlformats.org/drawingml/2006/main">
+            <a:spLocks noGrp="1"/>
+          </p:cNvSpPr>
+          <p:nvPr/>
+        </p:nvSpPr>
+        <p:spPr>
+          <a:xfrm>
             <a:off x="393668" y="344043"/>
             <a:ext cx="11404568" cy="1047464"/>
           </a:xfrm>
-          <a:prstGeom xmlns:a="http://schemas.openxmlformats.org/drawingml/2006/main" prst="rect">
-            <a:avLst/>
-          </a:prstGeom>
-        </p:spPr>
-        <p:txBody>
-          <a:bodyPr xmlns:a="http://schemas.openxmlformats.org/drawingml/2006/main" wrap="square" lIns="0" tIns="0" rIns="0" bIns="0" anchor="t">
+          <a:prstGeom prst="rect">
+            <a:avLst/>
+          </a:prstGeom>
+        </p:spPr>
+        <p:txBody>
+          <a:bodyPr wrap="square" lIns="0" tIns="0" rIns="0" bIns="0" anchor="t">
             <a:noAutofit/>
           </a:bodyPr>
-          <a:lstStyle xmlns:a="http://schemas.openxmlformats.org/drawingml/2006/main"/>
-          <a:p xmlns:a="http://schemas.openxmlformats.org/drawingml/2006/main">
+          <a:lstStyle/>
+          <a:p>
             <a:pPr algn="l">
               <a:defRPr sz="2900">
                 <a:solidFill>
@@ -1786,31 +1476,31 @@
       <p:sp>
         <p:nvSpPr>
           <p:cNvPr id="3" name="Picture-3-4-backing">
-            <a:extLst xmlns:a="http://schemas.openxmlformats.org/drawingml/2006/main">
+            <a:extLst>
               <a:ext uri="{FF2B5EF4-FFF2-40B4-BE49-F238E27FC236}">
                 <a16:creationId xmlns:a16="http://schemas.microsoft.com/office/drawing/2014/main" id="{4F0840BA-FC4E-404C-8C0C-6B488DC3DFFC}"/>
               </a:ext>
             </a:extLst>
           </p:cNvPr>
           <p:cNvSpPr>
-            <a:spLocks xmlns:a="http://schemas.openxmlformats.org/drawingml/2006/main" noGrp="1"/>
-          </p:cNvSpPr>
-          <p:nvPr/>
-        </p:nvSpPr>
-        <p:spPr>
-          <a:xfrm xmlns:a="http://schemas.openxmlformats.org/drawingml/2006/main">
+            <a:spLocks noGrp="1"/>
+          </p:cNvSpPr>
+          <p:nvPr/>
+        </p:nvSpPr>
+        <p:spPr>
+          <a:xfrm>
             <a:off x="6269069" y="396431"/>
             <a:ext cx="5539740" cy="5602034"/>
           </a:xfrm>
-          <a:prstGeom xmlns:a="http://schemas.openxmlformats.org/drawingml/2006/main" prst="roundRect">
+          <a:prstGeom prst="roundRect">
             <a:avLst>
               <a:gd name="adj" fmla="val 1376"/>
             </a:avLst>
           </a:prstGeom>
-          <a:solidFill xmlns:a="http://schemas.openxmlformats.org/drawingml/2006/main">
+          <a:solidFill>
             <a:srgbClr val="EAF5FB"/>
           </a:solidFill>
-          <a:ln xmlns:a="http://schemas.openxmlformats.org/drawingml/2006/main" w="9525">
+          <a:ln w="9525">
             <a:solidFill>
               <a:srgbClr val="B8BCC4"/>
             </a:solidFill>
@@ -1821,32 +1511,32 @@
       <p:sp>
         <p:nvSpPr>
           <p:cNvPr id="5" name="Google-Shape-534-p58-5">
-            <a:extLst xmlns:a="http://schemas.openxmlformats.org/drawingml/2006/main">
+            <a:extLst>
               <a:ext uri="{FF2B5EF4-FFF2-40B4-BE49-F238E27FC236}">
                 <a16:creationId xmlns:a16="http://schemas.microsoft.com/office/drawing/2014/main" id="{9D4DB213-EE70-4BE1-89F1-96DBC41849CE}"/>
               </a:ext>
             </a:extLst>
           </p:cNvPr>
           <p:cNvSpPr>
-            <a:spLocks xmlns:a="http://schemas.openxmlformats.org/drawingml/2006/main" noGrp="1"/>
-          </p:cNvSpPr>
-          <p:nvPr/>
-        </p:nvSpPr>
-        <p:spPr>
-          <a:xfrm xmlns:a="http://schemas.openxmlformats.org/drawingml/2006/main">
+            <a:spLocks noGrp="1"/>
+          </p:cNvSpPr>
+          <p:nvPr/>
+        </p:nvSpPr>
+        <p:spPr>
+          <a:xfrm>
             <a:off x="393668" y="2031968"/>
             <a:ext cx="5537168" cy="3962400"/>
           </a:xfrm>
-          <a:prstGeom xmlns:a="http://schemas.openxmlformats.org/drawingml/2006/main" prst="rect">
-            <a:avLst/>
-          </a:prstGeom>
-        </p:spPr>
-        <p:txBody>
-          <a:bodyPr xmlns:a="http://schemas.openxmlformats.org/drawingml/2006/main" wrap="square" lIns="0" tIns="0" rIns="0" bIns="0" anchor="t">
+          <a:prstGeom prst="rect">
+            <a:avLst/>
+          </a:prstGeom>
+        </p:spPr>
+        <p:txBody>
+          <a:bodyPr wrap="square" lIns="0" tIns="0" rIns="0" bIns="0" anchor="t">
             <a:noAutofit/>
           </a:bodyPr>
-          <a:lstStyle xmlns:a="http://schemas.openxmlformats.org/drawingml/2006/main"/>
-          <a:p xmlns:a="http://schemas.openxmlformats.org/drawingml/2006/main">
+          <a:lstStyle/>
+          <a:p>
             <a:pPr algn="l">
               <a:defRPr sz="2400">
                 <a:solidFill>
@@ -1861,7 +1551,7 @@
               <a:t>Engines rank moves. Learners need reasons.</a:t>
             </a:r>
           </a:p>
-          <a:p xmlns:a="http://schemas.openxmlformats.org/drawingml/2006/main">
+          <a:p>
             <a:pPr algn="l">
               <a:defRPr sz="2400">
                 <a:solidFill>
@@ -1880,22 +1570,22 @@
       </p:sp>
       <p:pic>
         <p:nvPicPr>
-          <p:cNvPr id="11" name=""/>
+          <p:cNvPr id="11" name="图片 10"/>
           <p:cNvPicPr>
-            <a:picLocks xmlns:a="http://schemas.openxmlformats.org/drawingml/2006/main" noChangeAspect="1"/>
+            <a:picLocks noChangeAspect="1"/>
           </p:cNvPicPr>
           <p:nvPr/>
         </p:nvPicPr>
         <p:blipFill>
-          <a:blip xmlns:r="http://schemas.openxmlformats.org/officeDocument/2006/relationships" xmlns:a="http://schemas.openxmlformats.org/drawingml/2006/main" r:embed="Ra8456505a54440bc"/>
-          <a:stretch xmlns:a="http://schemas.openxmlformats.org/drawingml/2006/main"/>
+          <a:blip r:embed="rId3"/>
+          <a:stretch/>
         </p:blipFill>
         <p:spPr>
-          <a:xfrm xmlns:a="http://schemas.openxmlformats.org/drawingml/2006/main">
+          <a:xfrm>
             <a:off x="6269069" y="1477213"/>
             <a:ext cx="5539740" cy="3465424"/>
           </a:xfrm>
-          <a:prstGeom xmlns:a="http://schemas.openxmlformats.org/drawingml/2006/main" prst="roundRect">
+          <a:prstGeom prst="roundRect">
             <a:avLst>
               <a:gd name="adj" fmla="val 3279"/>
             </a:avLst>
@@ -1909,11 +1599,14 @@
       </p:ext>
     </p:extLst>
   </p:cSld>
+  <p:clrMapOvr>
+    <a:masterClrMapping/>
+  </p:clrMapOvr>
 </p:sld>
 </file>
 
 <file path=ppt/slides/slide3.xml><?xml version="1.0" encoding="utf-8"?>
-<p:sld xmlns:p="http://schemas.openxmlformats.org/presentationml/2006/main">
+<p:sld xmlns:a="http://schemas.openxmlformats.org/drawingml/2006/main" xmlns:r="http://schemas.openxmlformats.org/officeDocument/2006/relationships" xmlns:p="http://schemas.openxmlformats.org/presentationml/2006/main">
   <p:cSld>
     <p:spTree>
       <p:nvGrpSpPr>
@@ -1922,37 +1615,42 @@
         <p:nvPr/>
       </p:nvGrpSpPr>
       <p:grpSpPr>
-        <a:xfrm xmlns:a="http://schemas.openxmlformats.org/drawingml/2006/main"/>
+        <a:xfrm>
+          <a:off x="0" y="0"/>
+          <a:ext cx="0" cy="0"/>
+          <a:chOff x="0" y="0"/>
+          <a:chExt cx="0" cy="0"/>
+        </a:xfrm>
       </p:grpSpPr>
       <p:sp>
         <p:nvSpPr>
           <p:cNvPr id="9" name="Google-Shape-532-p58-2">
-            <a:extLst xmlns:a="http://schemas.openxmlformats.org/drawingml/2006/main">
+            <a:extLst>
               <a:ext uri="{FF2B5EF4-FFF2-40B4-BE49-F238E27FC236}">
                 <a16:creationId xmlns:a16="http://schemas.microsoft.com/office/drawing/2014/main" id="{A4BACE3B-A937-4381-ACE5-8807E0048061}"/>
               </a:ext>
             </a:extLst>
           </p:cNvPr>
           <p:cNvSpPr>
-            <a:spLocks xmlns:a="http://schemas.openxmlformats.org/drawingml/2006/main" noGrp="1"/>
-          </p:cNvSpPr>
-          <p:nvPr/>
-        </p:nvSpPr>
-        <p:spPr>
-          <a:xfrm xmlns:a="http://schemas.openxmlformats.org/drawingml/2006/main">
+            <a:spLocks noGrp="1"/>
+          </p:cNvSpPr>
+          <p:nvPr/>
+        </p:nvSpPr>
+        <p:spPr>
+          <a:xfrm>
             <a:off x="11279315" y="6279261"/>
             <a:ext cx="518922" cy="241268"/>
           </a:xfrm>
-          <a:prstGeom xmlns:a="http://schemas.openxmlformats.org/drawingml/2006/main" prst="rect">
-            <a:avLst/>
-          </a:prstGeom>
-        </p:spPr>
-        <p:txBody>
-          <a:bodyPr xmlns:a="http://schemas.openxmlformats.org/drawingml/2006/main" wrap="square" lIns="0" tIns="0" rIns="0" bIns="0" anchor="b">
+          <a:prstGeom prst="rect">
+            <a:avLst/>
+          </a:prstGeom>
+        </p:spPr>
+        <p:txBody>
+          <a:bodyPr wrap="square" lIns="0" tIns="0" rIns="0" bIns="0" anchor="b">
             <a:noAutofit/>
           </a:bodyPr>
-          <a:lstStyle xmlns:a="http://schemas.openxmlformats.org/drawingml/2006/main"/>
-          <a:p xmlns:a="http://schemas.openxmlformats.org/drawingml/2006/main">
+          <a:lstStyle/>
+          <a:p>
             <a:pPr algn="r">
               <a:defRPr sz="1000">
                 <a:solidFill>
@@ -1972,32 +1670,32 @@
       <p:sp>
         <p:nvSpPr>
           <p:cNvPr id="2" name="Google-Shape-533-p58-3">
-            <a:extLst xmlns:a="http://schemas.openxmlformats.org/drawingml/2006/main">
+            <a:extLst>
               <a:ext uri="{FF2B5EF4-FFF2-40B4-BE49-F238E27FC236}">
                 <a16:creationId xmlns:a16="http://schemas.microsoft.com/office/drawing/2014/main" id="{1D315DA9-3227-40D5-A181-CAF055086151}"/>
               </a:ext>
             </a:extLst>
           </p:cNvPr>
           <p:cNvSpPr>
-            <a:spLocks xmlns:a="http://schemas.openxmlformats.org/drawingml/2006/main" noGrp="1"/>
-          </p:cNvSpPr>
-          <p:nvPr/>
-        </p:nvSpPr>
-        <p:spPr>
-          <a:xfrm xmlns:a="http://schemas.openxmlformats.org/drawingml/2006/main">
+            <a:spLocks noGrp="1"/>
+          </p:cNvSpPr>
+          <p:nvPr/>
+        </p:nvSpPr>
+        <p:spPr>
+          <a:xfrm>
             <a:off x="393668" y="344043"/>
             <a:ext cx="11404568" cy="1047464"/>
           </a:xfrm>
-          <a:prstGeom xmlns:a="http://schemas.openxmlformats.org/drawingml/2006/main" prst="rect">
-            <a:avLst/>
-          </a:prstGeom>
-        </p:spPr>
-        <p:txBody>
-          <a:bodyPr xmlns:a="http://schemas.openxmlformats.org/drawingml/2006/main" wrap="square" lIns="0" tIns="0" rIns="0" bIns="0" anchor="t">
+          <a:prstGeom prst="rect">
+            <a:avLst/>
+          </a:prstGeom>
+        </p:spPr>
+        <p:txBody>
+          <a:bodyPr wrap="square" lIns="0" tIns="0" rIns="0" bIns="0" anchor="t">
             <a:noAutofit/>
           </a:bodyPr>
-          <a:lstStyle xmlns:a="http://schemas.openxmlformats.org/drawingml/2006/main"/>
-          <a:p xmlns:a="http://schemas.openxmlformats.org/drawingml/2006/main">
+          <a:lstStyle/>
+          <a:p>
             <a:pPr algn="l">
               <a:defRPr sz="2900">
                 <a:solidFill>
@@ -2017,32 +1715,32 @@
       <p:sp>
         <p:nvSpPr>
           <p:cNvPr id="3" name="Google-Shape-558-p61-4">
-            <a:extLst xmlns:a="http://schemas.openxmlformats.org/drawingml/2006/main">
+            <a:extLst>
               <a:ext uri="{FF2B5EF4-FFF2-40B4-BE49-F238E27FC236}">
                 <a16:creationId xmlns:a16="http://schemas.microsoft.com/office/drawing/2014/main" id="{FABED099-8B60-4C92-978C-E5F750DFA083}"/>
               </a:ext>
             </a:extLst>
           </p:cNvPr>
           <p:cNvSpPr>
-            <a:spLocks xmlns:a="http://schemas.openxmlformats.org/drawingml/2006/main" noGrp="1"/>
-          </p:cNvSpPr>
-          <p:nvPr/>
-        </p:nvSpPr>
-        <p:spPr>
-          <a:xfrm xmlns:a="http://schemas.openxmlformats.org/drawingml/2006/main">
+            <a:spLocks noGrp="1"/>
+          </p:cNvSpPr>
+          <p:nvPr/>
+        </p:nvSpPr>
+        <p:spPr>
+          <a:xfrm>
             <a:off x="393668" y="4013168"/>
             <a:ext cx="3568732" cy="1981200"/>
           </a:xfrm>
-          <a:prstGeom xmlns:a="http://schemas.openxmlformats.org/drawingml/2006/main" prst="rect">
-            <a:avLst/>
-          </a:prstGeom>
-        </p:spPr>
-        <p:txBody>
-          <a:bodyPr xmlns:a="http://schemas.openxmlformats.org/drawingml/2006/main" wrap="square" lIns="0" tIns="0" rIns="0" bIns="0" anchor="t">
+          <a:prstGeom prst="rect">
+            <a:avLst/>
+          </a:prstGeom>
+        </p:spPr>
+        <p:txBody>
+          <a:bodyPr wrap="square" lIns="0" tIns="0" rIns="0" bIns="0" anchor="t">
             <a:noAutofit/>
           </a:bodyPr>
-          <a:lstStyle xmlns:a="http://schemas.openxmlformats.org/drawingml/2006/main"/>
-          <a:p xmlns:a="http://schemas.openxmlformats.org/drawingml/2006/main">
+          <a:lstStyle/>
+          <a:p>
             <a:pPr algn="l">
               <a:defRPr sz="2400">
                 <a:solidFill>
@@ -2063,32 +1761,32 @@
       <p:sp>
         <p:nvSpPr>
           <p:cNvPr id="4" name="Google-Shape-559-p61-5">
-            <a:extLst xmlns:a="http://schemas.openxmlformats.org/drawingml/2006/main">
+            <a:extLst>
               <a:ext uri="{FF2B5EF4-FFF2-40B4-BE49-F238E27FC236}">
                 <a16:creationId xmlns:a16="http://schemas.microsoft.com/office/drawing/2014/main" id="{E6C6F50F-BB09-4F46-BD06-10F04CAC7810}"/>
               </a:ext>
             </a:extLst>
           </p:cNvPr>
           <p:cNvSpPr>
-            <a:spLocks xmlns:a="http://schemas.openxmlformats.org/drawingml/2006/main" noGrp="1"/>
-          </p:cNvSpPr>
-          <p:nvPr/>
-        </p:nvSpPr>
-        <p:spPr>
-          <a:xfrm xmlns:a="http://schemas.openxmlformats.org/drawingml/2006/main">
+            <a:spLocks noGrp="1"/>
+          </p:cNvSpPr>
+          <p:nvPr/>
+        </p:nvSpPr>
+        <p:spPr>
+          <a:xfrm>
             <a:off x="4317968" y="4013168"/>
             <a:ext cx="3568732" cy="1981200"/>
           </a:xfrm>
-          <a:prstGeom xmlns:a="http://schemas.openxmlformats.org/drawingml/2006/main" prst="rect">
-            <a:avLst/>
-          </a:prstGeom>
-        </p:spPr>
-        <p:txBody>
-          <a:bodyPr xmlns:a="http://schemas.openxmlformats.org/drawingml/2006/main" wrap="square" lIns="0" tIns="0" rIns="0" bIns="0" anchor="t">
+          <a:prstGeom prst="rect">
+            <a:avLst/>
+          </a:prstGeom>
+        </p:spPr>
+        <p:txBody>
+          <a:bodyPr wrap="square" lIns="0" tIns="0" rIns="0" bIns="0" anchor="t">
             <a:noAutofit/>
           </a:bodyPr>
-          <a:lstStyle xmlns:a="http://schemas.openxmlformats.org/drawingml/2006/main"/>
-          <a:p xmlns:a="http://schemas.openxmlformats.org/drawingml/2006/main">
+          <a:lstStyle/>
+          <a:p>
             <a:pPr algn="l">
               <a:defRPr sz="2400">
                 <a:solidFill>
@@ -2109,32 +1807,32 @@
       <p:sp>
         <p:nvSpPr>
           <p:cNvPr id="5" name="Google-Shape-560-p61-6">
-            <a:extLst xmlns:a="http://schemas.openxmlformats.org/drawingml/2006/main">
+            <a:extLst>
               <a:ext uri="{FF2B5EF4-FFF2-40B4-BE49-F238E27FC236}">
                 <a16:creationId xmlns:a16="http://schemas.microsoft.com/office/drawing/2014/main" id="{592D609F-4F0F-4297-A672-BA5E1B6EB798}"/>
               </a:ext>
             </a:extLst>
           </p:cNvPr>
           <p:cNvSpPr>
-            <a:spLocks xmlns:a="http://schemas.openxmlformats.org/drawingml/2006/main" noGrp="1"/>
-          </p:cNvSpPr>
-          <p:nvPr/>
-        </p:nvSpPr>
-        <p:spPr>
-          <a:xfrm xmlns:a="http://schemas.openxmlformats.org/drawingml/2006/main">
+            <a:spLocks noGrp="1"/>
+          </p:cNvSpPr>
+          <p:nvPr/>
+        </p:nvSpPr>
+        <p:spPr>
+          <a:xfrm>
             <a:off x="8232267" y="4013168"/>
             <a:ext cx="3568732" cy="1981200"/>
           </a:xfrm>
-          <a:prstGeom xmlns:a="http://schemas.openxmlformats.org/drawingml/2006/main" prst="rect">
-            <a:avLst/>
-          </a:prstGeom>
-        </p:spPr>
-        <p:txBody>
-          <a:bodyPr xmlns:a="http://schemas.openxmlformats.org/drawingml/2006/main" wrap="square" lIns="0" tIns="0" rIns="0" bIns="0" anchor="t">
+          <a:prstGeom prst="rect">
+            <a:avLst/>
+          </a:prstGeom>
+        </p:spPr>
+        <p:txBody>
+          <a:bodyPr wrap="square" lIns="0" tIns="0" rIns="0" bIns="0" anchor="t">
             <a:noAutofit/>
           </a:bodyPr>
-          <a:lstStyle xmlns:a="http://schemas.openxmlformats.org/drawingml/2006/main"/>
-          <a:p xmlns:a="http://schemas.openxmlformats.org/drawingml/2006/main">
+          <a:lstStyle/>
+          <a:p>
             <a:pPr algn="l">
               <a:defRPr sz="2400">
                 <a:solidFill>
@@ -2155,23 +1853,28 @@
       <p:sp>
         <p:nvSpPr>
           <p:cNvPr id="6" name="Google-Shape-561-p61-7">
-            <a:extLst xmlns:a="http://schemas.openxmlformats.org/drawingml/2006/main">
+            <a:extLst>
               <a:ext uri="{FF2B5EF4-FFF2-40B4-BE49-F238E27FC236}">
                 <a16:creationId xmlns:a16="http://schemas.microsoft.com/office/drawing/2014/main" id="{E65B30B5-5A17-47CB-AE10-EB2970865098}"/>
               </a:ext>
             </a:extLst>
           </p:cNvPr>
           <p:cNvSpPr>
-            <a:spLocks xmlns:a="http://schemas.openxmlformats.org/drawingml/2006/main" noGrp="1"/>
-          </p:cNvSpPr>
-          <p:nvPr/>
-        </p:nvSpPr>
-        <p:spPr>
-          <a:xfrm xmlns:a="http://schemas.openxmlformats.org/drawingml/2006/main">
+            <a:spLocks noGrp="1"/>
+          </p:cNvSpPr>
+          <p:nvPr/>
+        </p:nvSpPr>
+        <p:spPr>
+          <a:xfrm>
             <a:off x="4279868" y="3382328"/>
             <a:ext cx="315563" cy="353854"/>
           </a:xfrm>
-          <a:custGeom xmlns:a="http://schemas.openxmlformats.org/drawingml/2006/main">
+          <a:custGeom>
+            <a:avLst/>
+            <a:gdLst/>
+            <a:ahLst/>
+            <a:cxnLst/>
+            <a:rect l="0" t="0" r="0" b="0"/>
             <a:pathLst>
               <a:path w="192747900" h="191595375">
                 <a:moveTo>
@@ -2261,7 +1964,7 @@
               </a:path>
             </a:pathLst>
           </a:custGeom>
-          <a:solidFill xmlns:a="http://schemas.openxmlformats.org/drawingml/2006/main">
+          <a:solidFill>
             <a:srgbClr val="000000"/>
           </a:solidFill>
         </p:spPr>
@@ -2269,23 +1972,28 @@
       <p:sp>
         <p:nvSpPr>
           <p:cNvPr id="7" name="Google-Shape-562-p61-8">
-            <a:extLst xmlns:a="http://schemas.openxmlformats.org/drawingml/2006/main">
+            <a:extLst>
               <a:ext uri="{FF2B5EF4-FFF2-40B4-BE49-F238E27FC236}">
                 <a16:creationId xmlns:a16="http://schemas.microsoft.com/office/drawing/2014/main" id="{56FB6B70-4989-4117-8E3D-5FB6BD12E135}"/>
               </a:ext>
             </a:extLst>
           </p:cNvPr>
           <p:cNvSpPr>
-            <a:spLocks xmlns:a="http://schemas.openxmlformats.org/drawingml/2006/main" noGrp="1"/>
-          </p:cNvSpPr>
-          <p:nvPr/>
-        </p:nvSpPr>
-        <p:spPr>
-          <a:xfrm xmlns:a="http://schemas.openxmlformats.org/drawingml/2006/main">
+            <a:spLocks noGrp="1"/>
+          </p:cNvSpPr>
+          <p:nvPr/>
+        </p:nvSpPr>
+        <p:spPr>
+          <a:xfrm>
             <a:off x="401384" y="3378232"/>
             <a:ext cx="327089" cy="362045"/>
           </a:xfrm>
-          <a:custGeom xmlns:a="http://schemas.openxmlformats.org/drawingml/2006/main">
+          <a:custGeom>
+            <a:avLst/>
+            <a:gdLst/>
+            <a:ahLst/>
+            <a:cxnLst/>
+            <a:rect l="0" t="0" r="0" b="0"/>
             <a:pathLst>
               <a:path w="205740000" h="203196825">
                 <a:moveTo>
@@ -2406,7 +2114,7 @@
               </a:path>
             </a:pathLst>
           </a:custGeom>
-          <a:solidFill xmlns:a="http://schemas.openxmlformats.org/drawingml/2006/main">
+          <a:solidFill>
             <a:srgbClr val="000000"/>
           </a:solidFill>
         </p:spPr>
@@ -2414,23 +2122,28 @@
       <p:sp>
         <p:nvSpPr>
           <p:cNvPr id="8" name="Google-Shape-563-p61-9">
-            <a:extLst xmlns:a="http://schemas.openxmlformats.org/drawingml/2006/main">
+            <a:extLst>
               <a:ext uri="{FF2B5EF4-FFF2-40B4-BE49-F238E27FC236}">
                 <a16:creationId xmlns:a16="http://schemas.microsoft.com/office/drawing/2014/main" id="{ACA24A76-5D3F-4EBD-B070-ED213A9AA55B}"/>
               </a:ext>
             </a:extLst>
           </p:cNvPr>
           <p:cNvSpPr>
-            <a:spLocks xmlns:a="http://schemas.openxmlformats.org/drawingml/2006/main" noGrp="1"/>
-          </p:cNvSpPr>
-          <p:nvPr/>
-        </p:nvSpPr>
-        <p:spPr>
-          <a:xfrm xmlns:a="http://schemas.openxmlformats.org/drawingml/2006/main">
+            <a:spLocks noGrp="1"/>
+          </p:cNvSpPr>
+          <p:nvPr/>
+        </p:nvSpPr>
+        <p:spPr>
+          <a:xfrm>
             <a:off x="8231600" y="3406807"/>
             <a:ext cx="338614" cy="270891"/>
           </a:xfrm>
-          <a:custGeom xmlns:a="http://schemas.openxmlformats.org/drawingml/2006/main">
+          <a:custGeom>
+            <a:avLst/>
+            <a:gdLst/>
+            <a:ahLst/>
+            <a:cxnLst/>
+            <a:rect l="0" t="0" r="0" b="0"/>
             <a:pathLst>
               <a:path w="205740000" h="205740000">
                 <a:moveTo>
@@ -2708,7 +2421,7 @@
               </a:path>
             </a:pathLst>
           </a:custGeom>
-          <a:solidFill xmlns:a="http://schemas.openxmlformats.org/drawingml/2006/main">
+          <a:solidFill>
             <a:srgbClr val="000000"/>
           </a:solidFill>
         </p:spPr>
@@ -2720,11 +2433,14 @@
       </p:ext>
     </p:extLst>
   </p:cSld>
+  <p:clrMapOvr>
+    <a:masterClrMapping/>
+  </p:clrMapOvr>
 </p:sld>
 </file>
 
 <file path=ppt/slides/slide4.xml><?xml version="1.0" encoding="utf-8"?>
-<p:sld xmlns:p="http://schemas.openxmlformats.org/presentationml/2006/main">
+<p:sld xmlns:a="http://schemas.openxmlformats.org/drawingml/2006/main" xmlns:r="http://schemas.openxmlformats.org/officeDocument/2006/relationships" xmlns:p="http://schemas.openxmlformats.org/presentationml/2006/main">
   <p:cSld>
     <p:spTree>
       <p:nvGrpSpPr>
@@ -2733,35 +2449,40 @@
         <p:nvPr/>
       </p:nvGrpSpPr>
       <p:grpSpPr>
-        <a:xfrm xmlns:a="http://schemas.openxmlformats.org/drawingml/2006/main"/>
+        <a:xfrm>
+          <a:off x="0" y="0"/>
+          <a:ext cx="0" cy="0"/>
+          <a:chOff x="0" y="0"/>
+          <a:chExt cx="0" cy="0"/>
+        </a:xfrm>
       </p:grpSpPr>
       <p:sp>
         <p:nvSpPr>
           <p:cNvPr id="16" name="Slide-Number-Placeholder-3-2">
-            <a:extLst xmlns:a="http://schemas.openxmlformats.org/drawingml/2006/main">
+            <a:extLst>
               <a:ext uri="{FF2B5EF4-FFF2-40B4-BE49-F238E27FC236}">
                 <a16:creationId xmlns:a16="http://schemas.microsoft.com/office/drawing/2014/main" id="{8AE1D345-9738-4719-8ABD-0372FE2579E0}"/>
               </a:ext>
             </a:extLst>
           </p:cNvPr>
           <p:cNvSpPr>
-            <a:spLocks xmlns:a="http://schemas.openxmlformats.org/drawingml/2006/main" noGrp="1"/>
-          </p:cNvSpPr>
-          <p:nvPr/>
-        </p:nvSpPr>
-        <p:spPr>
-          <a:xfrm xmlns:a="http://schemas.openxmlformats.org/drawingml/2006/main">
+            <a:spLocks noGrp="1"/>
+          </p:cNvSpPr>
+          <p:nvPr/>
+        </p:nvSpPr>
+        <p:spPr>
+          <a:xfrm>
             <a:off x="11279315" y="6279261"/>
             <a:ext cx="518922" cy="241268"/>
           </a:xfrm>
-          <a:prstGeom xmlns:a="http://schemas.openxmlformats.org/drawingml/2006/main" prst="rect">
-            <a:avLst/>
-          </a:prstGeom>
-        </p:spPr>
-        <p:txBody>
-          <a:bodyPr xmlns:a="http://schemas.openxmlformats.org/drawingml/2006/main" lIns="0" tIns="0" rIns="0" bIns="0" anchor="b"/>
-          <a:lstStyle xmlns:a="http://schemas.openxmlformats.org/drawingml/2006/main"/>
-          <a:p xmlns:a="http://schemas.openxmlformats.org/drawingml/2006/main">
+          <a:prstGeom prst="rect">
+            <a:avLst/>
+          </a:prstGeom>
+        </p:spPr>
+        <p:txBody>
+          <a:bodyPr lIns="0" tIns="0" rIns="0" bIns="0" anchor="b"/>
+          <a:lstStyle/>
+          <a:p>
             <a:pPr algn="r">
               <a:defRPr sz="1000">
                 <a:solidFill>
@@ -2781,32 +2502,32 @@
       <p:sp>
         <p:nvSpPr>
           <p:cNvPr id="2" name="Title-10-3">
-            <a:extLst xmlns:a="http://schemas.openxmlformats.org/drawingml/2006/main">
+            <a:extLst>
               <a:ext uri="{FF2B5EF4-FFF2-40B4-BE49-F238E27FC236}">
                 <a16:creationId xmlns:a16="http://schemas.microsoft.com/office/drawing/2014/main" id="{7AEACC5F-DEE1-4519-A25F-8327FB26EBBE}"/>
               </a:ext>
             </a:extLst>
           </p:cNvPr>
           <p:cNvSpPr>
-            <a:spLocks xmlns:a="http://schemas.openxmlformats.org/drawingml/2006/main" noGrp="1"/>
-          </p:cNvSpPr>
-          <p:nvPr/>
-        </p:nvSpPr>
-        <p:spPr>
-          <a:xfrm xmlns:a="http://schemas.openxmlformats.org/drawingml/2006/main">
+            <a:spLocks noGrp="1"/>
+          </p:cNvSpPr>
+          <p:nvPr/>
+        </p:nvSpPr>
+        <p:spPr>
+          <a:xfrm>
             <a:off x="393668" y="344043"/>
             <a:ext cx="11404568" cy="1047464"/>
           </a:xfrm>
-          <a:prstGeom xmlns:a="http://schemas.openxmlformats.org/drawingml/2006/main" prst="rect">
-            <a:avLst/>
-          </a:prstGeom>
-        </p:spPr>
-        <p:txBody>
-          <a:bodyPr xmlns:a="http://schemas.openxmlformats.org/drawingml/2006/main" lIns="0" tIns="0" rIns="0" bIns="0" anchor="t">
-            <a:normAutofit fontScale="100000"/>
+          <a:prstGeom prst="rect">
+            <a:avLst/>
+          </a:prstGeom>
+        </p:spPr>
+        <p:txBody>
+          <a:bodyPr lIns="0" tIns="0" rIns="0" bIns="0" anchor="t">
+            <a:normAutofit/>
           </a:bodyPr>
-          <a:lstStyle xmlns:a="http://schemas.openxmlformats.org/drawingml/2006/main"/>
-          <a:p xmlns:a="http://schemas.openxmlformats.org/drawingml/2006/main">
+          <a:lstStyle/>
+          <a:p>
             <a:pPr algn="l">
               <a:defRPr sz="2900">
                 <a:solidFill>
@@ -2830,14 +2551,14 @@
           <p:nvPr/>
         </p:nvCxnSpPr>
         <p:spPr>
-          <a:xfrm xmlns:a="http://schemas.openxmlformats.org/drawingml/2006/main">
+          <a:xfrm>
             <a:off x="337757" y="5341620"/>
             <a:ext cx="12245435" cy="286"/>
           </a:xfrm>
-          <a:prstGeom xmlns:a="http://schemas.openxmlformats.org/drawingml/2006/main" prst="straightConnector1">
-            <a:avLst/>
-          </a:prstGeom>
-          <a:ln xmlns:a="http://schemas.openxmlformats.org/drawingml/2006/main" w="9525">
+          <a:prstGeom prst="straightConnector1">
+            <a:avLst/>
+          </a:prstGeom>
+          <a:ln w="9525">
             <a:solidFill>
               <a:srgbClr val="000000"/>
             </a:solidFill>
@@ -2848,26 +2569,26 @@
       <p:sp>
         <p:nvSpPr>
           <p:cNvPr id="4" name="Google-Shape-2260-p159-5">
-            <a:extLst xmlns:a="http://schemas.openxmlformats.org/drawingml/2006/main">
+            <a:extLst>
               <a:ext uri="{FF2B5EF4-FFF2-40B4-BE49-F238E27FC236}">
                 <a16:creationId xmlns:a16="http://schemas.microsoft.com/office/drawing/2014/main" id="{02715554-786A-4159-9237-22058C6D3F2C}"/>
               </a:ext>
             </a:extLst>
           </p:cNvPr>
           <p:cNvSpPr>
-            <a:spLocks xmlns:a="http://schemas.openxmlformats.org/drawingml/2006/main" noGrp="1"/>
-          </p:cNvSpPr>
-          <p:nvPr/>
-        </p:nvSpPr>
-        <p:spPr>
-          <a:xfrm xmlns:a="http://schemas.openxmlformats.org/drawingml/2006/main">
+            <a:spLocks noGrp="1"/>
+          </p:cNvSpPr>
+          <p:nvPr/>
+        </p:nvSpPr>
+        <p:spPr>
+          <a:xfrm>
             <a:off x="337757" y="5288089"/>
             <a:ext cx="107061" cy="107061"/>
           </a:xfrm>
-          <a:prstGeom xmlns:a="http://schemas.openxmlformats.org/drawingml/2006/main" prst="ellipse">
-            <a:avLst/>
-          </a:prstGeom>
-          <a:solidFill xmlns:a="http://schemas.openxmlformats.org/drawingml/2006/main">
+          <a:prstGeom prst="ellipse">
+            <a:avLst/>
+          </a:prstGeom>
+          <a:solidFill>
             <a:srgbClr val="000000"/>
           </a:solidFill>
         </p:spPr>
@@ -2875,26 +2596,26 @@
       <p:sp>
         <p:nvSpPr>
           <p:cNvPr id="5" name="Google-Shape-2261-p159-6">
-            <a:extLst xmlns:a="http://schemas.openxmlformats.org/drawingml/2006/main">
+            <a:extLst>
               <a:ext uri="{FF2B5EF4-FFF2-40B4-BE49-F238E27FC236}">
                 <a16:creationId xmlns:a16="http://schemas.microsoft.com/office/drawing/2014/main" id="{D1EE2949-2100-4F9F-9E86-7FFC38237411}"/>
               </a:ext>
             </a:extLst>
           </p:cNvPr>
           <p:cNvSpPr>
-            <a:spLocks xmlns:a="http://schemas.openxmlformats.org/drawingml/2006/main" noGrp="1"/>
-          </p:cNvSpPr>
-          <p:nvPr/>
-        </p:nvSpPr>
-        <p:spPr>
-          <a:xfrm xmlns:a="http://schemas.openxmlformats.org/drawingml/2006/main">
+            <a:spLocks noGrp="1"/>
+          </p:cNvSpPr>
+          <p:nvPr/>
+        </p:nvSpPr>
+        <p:spPr>
+          <a:xfrm>
             <a:off x="4251770" y="5288089"/>
             <a:ext cx="107061" cy="107061"/>
           </a:xfrm>
-          <a:prstGeom xmlns:a="http://schemas.openxmlformats.org/drawingml/2006/main" prst="ellipse">
-            <a:avLst/>
-          </a:prstGeom>
-          <a:solidFill xmlns:a="http://schemas.openxmlformats.org/drawingml/2006/main">
+          <a:prstGeom prst="ellipse">
+            <a:avLst/>
+          </a:prstGeom>
+          <a:solidFill>
             <a:srgbClr val="000000"/>
           </a:solidFill>
         </p:spPr>
@@ -2902,26 +2623,26 @@
       <p:sp>
         <p:nvSpPr>
           <p:cNvPr id="6" name="Google-Shape-2262-p159-7">
-            <a:extLst xmlns:a="http://schemas.openxmlformats.org/drawingml/2006/main">
+            <a:extLst>
               <a:ext uri="{FF2B5EF4-FFF2-40B4-BE49-F238E27FC236}">
                 <a16:creationId xmlns:a16="http://schemas.microsoft.com/office/drawing/2014/main" id="{8ED44D40-AC44-4D4C-B95E-749135477A8B}"/>
               </a:ext>
             </a:extLst>
           </p:cNvPr>
           <p:cNvSpPr>
-            <a:spLocks xmlns:a="http://schemas.openxmlformats.org/drawingml/2006/main" noGrp="1"/>
-          </p:cNvSpPr>
-          <p:nvPr/>
-        </p:nvSpPr>
-        <p:spPr>
-          <a:xfrm xmlns:a="http://schemas.openxmlformats.org/drawingml/2006/main">
+            <a:spLocks noGrp="1"/>
+          </p:cNvSpPr>
+          <p:nvPr/>
+        </p:nvSpPr>
+        <p:spPr>
+          <a:xfrm>
             <a:off x="8176070" y="5288089"/>
             <a:ext cx="107061" cy="107061"/>
           </a:xfrm>
-          <a:prstGeom xmlns:a="http://schemas.openxmlformats.org/drawingml/2006/main" prst="ellipse">
-            <a:avLst/>
-          </a:prstGeom>
-          <a:solidFill xmlns:a="http://schemas.openxmlformats.org/drawingml/2006/main">
+          <a:prstGeom prst="ellipse">
+            <a:avLst/>
+          </a:prstGeom>
+          <a:solidFill>
             <a:srgbClr val="000000"/>
           </a:solidFill>
         </p:spPr>
@@ -2929,28 +2650,28 @@
       <p:sp>
         <p:nvSpPr>
           <p:cNvPr id="7" name="Rounded-Rectangle-19-8">
-            <a:extLst xmlns:a="http://schemas.openxmlformats.org/drawingml/2006/main">
+            <a:extLst>
               <a:ext uri="{FF2B5EF4-FFF2-40B4-BE49-F238E27FC236}">
                 <a16:creationId xmlns:a16="http://schemas.microsoft.com/office/drawing/2014/main" id="{BB168131-60A6-41A7-A10A-70ADEE0E0B37}"/>
               </a:ext>
             </a:extLst>
           </p:cNvPr>
           <p:cNvSpPr>
-            <a:spLocks xmlns:a="http://schemas.openxmlformats.org/drawingml/2006/main" noGrp="1"/>
-          </p:cNvSpPr>
-          <p:nvPr/>
-        </p:nvSpPr>
-        <p:spPr>
-          <a:xfrm xmlns:a="http://schemas.openxmlformats.org/drawingml/2006/main">
+            <a:spLocks noGrp="1"/>
+          </p:cNvSpPr>
+          <p:nvPr/>
+        </p:nvSpPr>
+        <p:spPr>
+          <a:xfrm>
             <a:off x="393668" y="1401794"/>
             <a:ext cx="3568732" cy="3619500"/>
           </a:xfrm>
-          <a:prstGeom xmlns:a="http://schemas.openxmlformats.org/drawingml/2006/main" prst="roundRect">
+          <a:prstGeom prst="roundRect">
             <a:avLst>
               <a:gd name="adj" fmla="val 2135"/>
             </a:avLst>
           </a:prstGeom>
-          <a:solidFill xmlns:a="http://schemas.openxmlformats.org/drawingml/2006/main">
+          <a:solidFill>
             <a:srgbClr val="F2F2F2"/>
           </a:solidFill>
         </p:spPr>
@@ -2958,32 +2679,32 @@
       <p:sp>
         <p:nvSpPr>
           <p:cNvPr id="8" name="Content-Placeholder-8-9">
-            <a:extLst xmlns:a="http://schemas.openxmlformats.org/drawingml/2006/main">
+            <a:extLst>
               <a:ext uri="{FF2B5EF4-FFF2-40B4-BE49-F238E27FC236}">
                 <a16:creationId xmlns:a16="http://schemas.microsoft.com/office/drawing/2014/main" id="{E1F2E074-5C04-42AC-8020-BF721D5A0B64}"/>
               </a:ext>
             </a:extLst>
           </p:cNvPr>
           <p:cNvSpPr>
-            <a:spLocks xmlns:a="http://schemas.openxmlformats.org/drawingml/2006/main" noGrp="1"/>
-          </p:cNvSpPr>
-          <p:nvPr/>
-        </p:nvSpPr>
-        <p:spPr>
-          <a:xfrm xmlns:a="http://schemas.openxmlformats.org/drawingml/2006/main">
+            <a:spLocks noGrp="1"/>
+          </p:cNvSpPr>
+          <p:nvPr/>
+        </p:nvSpPr>
+        <p:spPr>
+          <a:xfrm>
             <a:off x="703421" y="1806797"/>
             <a:ext cx="2949321" cy="2566797"/>
           </a:xfrm>
-          <a:prstGeom xmlns:a="http://schemas.openxmlformats.org/drawingml/2006/main" prst="rect">
-            <a:avLst/>
-          </a:prstGeom>
-        </p:spPr>
-        <p:txBody>
-          <a:bodyPr xmlns:a="http://schemas.openxmlformats.org/drawingml/2006/main" lIns="0" tIns="0" rIns="0" bIns="0">
+          <a:prstGeom prst="rect">
+            <a:avLst/>
+          </a:prstGeom>
+        </p:spPr>
+        <p:txBody>
+          <a:bodyPr lIns="0" tIns="0" rIns="0" bIns="0">
             <a:noAutofit/>
           </a:bodyPr>
-          <a:lstStyle xmlns:a="http://schemas.openxmlformats.org/drawingml/2006/main"/>
-          <a:p xmlns:a="http://schemas.openxmlformats.org/drawingml/2006/main">
+          <a:lstStyle/>
+          <a:p>
             <a:pPr algn="l">
               <a:defRPr sz="1600">
                 <a:solidFill>
@@ -2998,7 +2719,7 @@
               <a:t>ANALYZE</a:t>
             </a:r>
           </a:p>
-          <a:p xmlns:a="http://schemas.openxmlformats.org/drawingml/2006/main">
+          <a:p>
             <a:pPr algn="l">
               <a:defRPr sz="1600">
                 <a:solidFill>
@@ -3018,28 +2739,28 @@
       <p:sp>
         <p:nvSpPr>
           <p:cNvPr id="9" name="Rounded-Rectangle-21-10">
-            <a:extLst xmlns:a="http://schemas.openxmlformats.org/drawingml/2006/main">
+            <a:extLst>
               <a:ext uri="{FF2B5EF4-FFF2-40B4-BE49-F238E27FC236}">
                 <a16:creationId xmlns:a16="http://schemas.microsoft.com/office/drawing/2014/main" id="{DA288ADA-E29B-4424-A2A7-90229D12B2BD}"/>
               </a:ext>
             </a:extLst>
           </p:cNvPr>
           <p:cNvSpPr>
-            <a:spLocks xmlns:a="http://schemas.openxmlformats.org/drawingml/2006/main" noGrp="1"/>
-          </p:cNvSpPr>
-          <p:nvPr/>
-        </p:nvSpPr>
-        <p:spPr>
-          <a:xfrm xmlns:a="http://schemas.openxmlformats.org/drawingml/2006/main">
+            <a:spLocks noGrp="1"/>
+          </p:cNvSpPr>
+          <p:nvPr/>
+        </p:nvSpPr>
+        <p:spPr>
+          <a:xfrm>
             <a:off x="4308443" y="1401794"/>
             <a:ext cx="3568732" cy="3619500"/>
           </a:xfrm>
-          <a:prstGeom xmlns:a="http://schemas.openxmlformats.org/drawingml/2006/main" prst="roundRect">
+          <a:prstGeom prst="roundRect">
             <a:avLst>
               <a:gd name="adj" fmla="val 2135"/>
             </a:avLst>
           </a:prstGeom>
-          <a:solidFill xmlns:a="http://schemas.openxmlformats.org/drawingml/2006/main">
+          <a:solidFill>
             <a:srgbClr val="F2F2F2"/>
           </a:solidFill>
         </p:spPr>
@@ -3047,32 +2768,32 @@
       <p:sp>
         <p:nvSpPr>
           <p:cNvPr id="10" name="Content-Placeholder-8-11">
-            <a:extLst xmlns:a="http://schemas.openxmlformats.org/drawingml/2006/main">
+            <a:extLst>
               <a:ext uri="{FF2B5EF4-FFF2-40B4-BE49-F238E27FC236}">
                 <a16:creationId xmlns:a16="http://schemas.microsoft.com/office/drawing/2014/main" id="{56F3CCB4-0037-4570-BD8B-19DAAAF016AD}"/>
               </a:ext>
             </a:extLst>
           </p:cNvPr>
           <p:cNvSpPr>
-            <a:spLocks xmlns:a="http://schemas.openxmlformats.org/drawingml/2006/main" noGrp="1"/>
-          </p:cNvSpPr>
-          <p:nvPr/>
-        </p:nvSpPr>
-        <p:spPr>
-          <a:xfrm xmlns:a="http://schemas.openxmlformats.org/drawingml/2006/main">
+            <a:spLocks noGrp="1"/>
+          </p:cNvSpPr>
+          <p:nvPr/>
+        </p:nvSpPr>
+        <p:spPr>
+          <a:xfrm>
             <a:off x="4618196" y="1806797"/>
             <a:ext cx="2949321" cy="2566797"/>
           </a:xfrm>
-          <a:prstGeom xmlns:a="http://schemas.openxmlformats.org/drawingml/2006/main" prst="rect">
-            <a:avLst/>
-          </a:prstGeom>
-        </p:spPr>
-        <p:txBody>
-          <a:bodyPr xmlns:a="http://schemas.openxmlformats.org/drawingml/2006/main" lIns="0" tIns="0" rIns="0" bIns="0">
+          <a:prstGeom prst="rect">
+            <a:avLst/>
+          </a:prstGeom>
+        </p:spPr>
+        <p:txBody>
+          <a:bodyPr lIns="0" tIns="0" rIns="0" bIns="0">
             <a:noAutofit/>
           </a:bodyPr>
-          <a:lstStyle xmlns:a="http://schemas.openxmlformats.org/drawingml/2006/main"/>
-          <a:p xmlns:a="http://schemas.openxmlformats.org/drawingml/2006/main">
+          <a:lstStyle/>
+          <a:p>
             <a:pPr algn="l">
               <a:defRPr sz="1600">
                 <a:solidFill>
@@ -3087,7 +2808,7 @@
               <a:t>GROUND</a:t>
             </a:r>
           </a:p>
-          <a:p xmlns:a="http://schemas.openxmlformats.org/drawingml/2006/main">
+          <a:p>
             <a:pPr algn="l">
               <a:defRPr sz="1600">
                 <a:solidFill>
@@ -3107,28 +2828,28 @@
       <p:sp>
         <p:nvSpPr>
           <p:cNvPr id="11" name="Rounded-Rectangle-23-12">
-            <a:extLst xmlns:a="http://schemas.openxmlformats.org/drawingml/2006/main">
+            <a:extLst>
               <a:ext uri="{FF2B5EF4-FFF2-40B4-BE49-F238E27FC236}">
                 <a16:creationId xmlns:a16="http://schemas.microsoft.com/office/drawing/2014/main" id="{2C91775F-7A2C-40C7-8EBD-61B069FAA649}"/>
               </a:ext>
             </a:extLst>
           </p:cNvPr>
           <p:cNvSpPr>
-            <a:spLocks xmlns:a="http://schemas.openxmlformats.org/drawingml/2006/main" noGrp="1"/>
-          </p:cNvSpPr>
-          <p:nvPr/>
-        </p:nvSpPr>
-        <p:spPr>
-          <a:xfrm xmlns:a="http://schemas.openxmlformats.org/drawingml/2006/main">
+            <a:spLocks noGrp="1"/>
+          </p:cNvSpPr>
+          <p:nvPr/>
+        </p:nvSpPr>
+        <p:spPr>
+          <a:xfrm>
             <a:off x="8237506" y="1401794"/>
             <a:ext cx="3568732" cy="3619500"/>
           </a:xfrm>
-          <a:prstGeom xmlns:a="http://schemas.openxmlformats.org/drawingml/2006/main" prst="roundRect">
+          <a:prstGeom prst="roundRect">
             <a:avLst>
               <a:gd name="adj" fmla="val 2135"/>
             </a:avLst>
           </a:prstGeom>
-          <a:solidFill xmlns:a="http://schemas.openxmlformats.org/drawingml/2006/main">
+          <a:solidFill>
             <a:srgbClr val="F2F2F2"/>
           </a:solidFill>
         </p:spPr>
@@ -3136,32 +2857,32 @@
       <p:sp>
         <p:nvSpPr>
           <p:cNvPr id="12" name="Content-Placeholder-8-13">
-            <a:extLst xmlns:a="http://schemas.openxmlformats.org/drawingml/2006/main">
+            <a:extLst>
               <a:ext uri="{FF2B5EF4-FFF2-40B4-BE49-F238E27FC236}">
                 <a16:creationId xmlns:a16="http://schemas.microsoft.com/office/drawing/2014/main" id="{C36440E4-4AE1-42B8-9701-D339F79E3F47}"/>
               </a:ext>
             </a:extLst>
           </p:cNvPr>
           <p:cNvSpPr>
-            <a:spLocks xmlns:a="http://schemas.openxmlformats.org/drawingml/2006/main" noGrp="1"/>
-          </p:cNvSpPr>
-          <p:nvPr/>
-        </p:nvSpPr>
-        <p:spPr>
-          <a:xfrm xmlns:a="http://schemas.openxmlformats.org/drawingml/2006/main">
+            <a:spLocks noGrp="1"/>
+          </p:cNvSpPr>
+          <p:nvPr/>
+        </p:nvSpPr>
+        <p:spPr>
+          <a:xfrm>
             <a:off x="8547259" y="1806797"/>
             <a:ext cx="2949321" cy="2566797"/>
           </a:xfrm>
-          <a:prstGeom xmlns:a="http://schemas.openxmlformats.org/drawingml/2006/main" prst="rect">
-            <a:avLst/>
-          </a:prstGeom>
-        </p:spPr>
-        <p:txBody>
-          <a:bodyPr xmlns:a="http://schemas.openxmlformats.org/drawingml/2006/main" lIns="0" tIns="0" rIns="0" bIns="0">
+          <a:prstGeom prst="rect">
+            <a:avLst/>
+          </a:prstGeom>
+        </p:spPr>
+        <p:txBody>
+          <a:bodyPr lIns="0" tIns="0" rIns="0" bIns="0">
             <a:noAutofit/>
           </a:bodyPr>
-          <a:lstStyle xmlns:a="http://schemas.openxmlformats.org/drawingml/2006/main"/>
-          <a:p xmlns:a="http://schemas.openxmlformats.org/drawingml/2006/main">
+          <a:lstStyle/>
+          <a:p>
             <a:pPr algn="l">
               <a:defRPr sz="1600">
                 <a:solidFill>
@@ -3176,7 +2897,7 @@
               <a:t>EXPLAIN + VERIFY</a:t>
             </a:r>
           </a:p>
-          <a:p xmlns:a="http://schemas.openxmlformats.org/drawingml/2006/main">
+          <a:p>
             <a:pPr algn="l">
               <a:defRPr sz="1600">
                 <a:solidFill>
@@ -3196,32 +2917,32 @@
       <p:sp>
         <p:nvSpPr>
           <p:cNvPr id="13" name="Text-Placeholder-16-14">
-            <a:extLst xmlns:a="http://schemas.openxmlformats.org/drawingml/2006/main">
+            <a:extLst>
               <a:ext uri="{FF2B5EF4-FFF2-40B4-BE49-F238E27FC236}">
                 <a16:creationId xmlns:a16="http://schemas.microsoft.com/office/drawing/2014/main" id="{93F6E8F8-F689-449E-AB09-E051AAFC5600}"/>
               </a:ext>
             </a:extLst>
           </p:cNvPr>
           <p:cNvSpPr>
-            <a:spLocks xmlns:a="http://schemas.openxmlformats.org/drawingml/2006/main" noGrp="1"/>
-          </p:cNvSpPr>
-          <p:nvPr/>
-        </p:nvSpPr>
-        <p:spPr>
-          <a:xfrm xmlns:a="http://schemas.openxmlformats.org/drawingml/2006/main">
+            <a:spLocks noGrp="1"/>
+          </p:cNvSpPr>
+          <p:nvPr/>
+        </p:nvSpPr>
+        <p:spPr>
+          <a:xfrm>
             <a:off x="4251770" y="5602414"/>
             <a:ext cx="2595944" cy="391954"/>
           </a:xfrm>
-          <a:prstGeom xmlns:a="http://schemas.openxmlformats.org/drawingml/2006/main" prst="rect">
-            <a:avLst/>
-          </a:prstGeom>
-        </p:spPr>
-        <p:txBody>
-          <a:bodyPr xmlns:a="http://schemas.openxmlformats.org/drawingml/2006/main" lIns="91440" tIns="45720" rIns="91440" bIns="45720">
+          <a:prstGeom prst="rect">
+            <a:avLst/>
+          </a:prstGeom>
+        </p:spPr>
+        <p:txBody>
+          <a:bodyPr lIns="91440" tIns="45720" rIns="91440" bIns="45720">
             <a:noAutofit/>
           </a:bodyPr>
-          <a:lstStyle xmlns:a="http://schemas.openxmlformats.org/drawingml/2006/main"/>
-          <a:p xmlns:a="http://schemas.openxmlformats.org/drawingml/2006/main">
+          <a:lstStyle/>
+          <a:p>
             <a:pPr algn="l">
               <a:defRPr sz="2400">
                 <a:solidFill>
@@ -3241,32 +2962,32 @@
       <p:sp>
         <p:nvSpPr>
           <p:cNvPr id="14" name="Text-Placeholder-16-15">
-            <a:extLst xmlns:a="http://schemas.openxmlformats.org/drawingml/2006/main">
+            <a:extLst>
               <a:ext uri="{FF2B5EF4-FFF2-40B4-BE49-F238E27FC236}">
                 <a16:creationId xmlns:a16="http://schemas.microsoft.com/office/drawing/2014/main" id="{32D672DB-EB9B-442C-AB57-53FCBDB79C43}"/>
               </a:ext>
             </a:extLst>
           </p:cNvPr>
           <p:cNvSpPr>
-            <a:spLocks xmlns:a="http://schemas.openxmlformats.org/drawingml/2006/main" noGrp="1"/>
-          </p:cNvSpPr>
-          <p:nvPr/>
-        </p:nvSpPr>
-        <p:spPr>
-          <a:xfrm xmlns:a="http://schemas.openxmlformats.org/drawingml/2006/main">
+            <a:spLocks noGrp="1"/>
+          </p:cNvSpPr>
+          <p:nvPr/>
+        </p:nvSpPr>
+        <p:spPr>
+          <a:xfrm>
             <a:off x="390906" y="5602414"/>
             <a:ext cx="2595944" cy="391954"/>
           </a:xfrm>
-          <a:prstGeom xmlns:a="http://schemas.openxmlformats.org/drawingml/2006/main" prst="rect">
-            <a:avLst/>
-          </a:prstGeom>
-        </p:spPr>
-        <p:txBody>
-          <a:bodyPr xmlns:a="http://schemas.openxmlformats.org/drawingml/2006/main" lIns="91440" tIns="45720" rIns="91440" bIns="45720">
+          <a:prstGeom prst="rect">
+            <a:avLst/>
+          </a:prstGeom>
+        </p:spPr>
+        <p:txBody>
+          <a:bodyPr lIns="91440" tIns="45720" rIns="91440" bIns="45720">
             <a:noAutofit/>
           </a:bodyPr>
-          <a:lstStyle xmlns:a="http://schemas.openxmlformats.org/drawingml/2006/main"/>
-          <a:p xmlns:a="http://schemas.openxmlformats.org/drawingml/2006/main">
+          <a:lstStyle/>
+          <a:p>
             <a:pPr algn="l">
               <a:defRPr sz="2400">
                 <a:solidFill>
@@ -3286,32 +3007,32 @@
       <p:sp>
         <p:nvSpPr>
           <p:cNvPr id="15" name="Text-Placeholder-16-16">
-            <a:extLst xmlns:a="http://schemas.openxmlformats.org/drawingml/2006/main">
+            <a:extLst>
               <a:ext uri="{FF2B5EF4-FFF2-40B4-BE49-F238E27FC236}">
                 <a16:creationId xmlns:a16="http://schemas.microsoft.com/office/drawing/2014/main" id="{9C01EF8A-37B6-4D32-9E13-34C7EB8644ED}"/>
               </a:ext>
             </a:extLst>
           </p:cNvPr>
           <p:cNvSpPr>
-            <a:spLocks xmlns:a="http://schemas.openxmlformats.org/drawingml/2006/main" noGrp="1"/>
-          </p:cNvSpPr>
-          <p:nvPr/>
-        </p:nvSpPr>
-        <p:spPr>
-          <a:xfrm xmlns:a="http://schemas.openxmlformats.org/drawingml/2006/main">
+            <a:spLocks noGrp="1"/>
+          </p:cNvSpPr>
+          <p:nvPr/>
+        </p:nvSpPr>
+        <p:spPr>
+          <a:xfrm>
             <a:off x="8225409" y="5602414"/>
             <a:ext cx="2595944" cy="391954"/>
           </a:xfrm>
-          <a:prstGeom xmlns:a="http://schemas.openxmlformats.org/drawingml/2006/main" prst="rect">
-            <a:avLst/>
-          </a:prstGeom>
-        </p:spPr>
-        <p:txBody>
-          <a:bodyPr xmlns:a="http://schemas.openxmlformats.org/drawingml/2006/main" lIns="91440" tIns="45720" rIns="91440" bIns="45720">
+          <a:prstGeom prst="rect">
+            <a:avLst/>
+          </a:prstGeom>
+        </p:spPr>
+        <p:txBody>
+          <a:bodyPr lIns="91440" tIns="45720" rIns="91440" bIns="45720">
             <a:noAutofit/>
           </a:bodyPr>
-          <a:lstStyle xmlns:a="http://schemas.openxmlformats.org/drawingml/2006/main"/>
-          <a:p xmlns:a="http://schemas.openxmlformats.org/drawingml/2006/main">
+          <a:lstStyle/>
+          <a:p>
             <a:pPr algn="l">
               <a:defRPr sz="2400">
                 <a:solidFill>
@@ -3335,11 +3056,710 @@
       </p:ext>
     </p:extLst>
   </p:cSld>
+  <p:clrMapOvr>
+    <a:masterClrMapping/>
+  </p:clrMapOvr>
 </p:sld>
 </file>
 
 <file path=ppt/slides/slide5.xml><?xml version="1.0" encoding="utf-8"?>
-<p:sld xmlns:p="http://schemas.openxmlformats.org/presentationml/2006/main">
+<p:sld xmlns:a="http://schemas.openxmlformats.org/drawingml/2006/main" xmlns:r="http://schemas.openxmlformats.org/officeDocument/2006/relationships" xmlns:p="http://schemas.openxmlformats.org/presentationml/2006/main">
+  <p:cSld>
+    <p:bg>
+      <p:bgPr>
+        <a:solidFill>
+          <a:srgbClr val="FFFFFF"/>
+        </a:solidFill>
+        <a:effectLst/>
+      </p:bgPr>
+    </p:bg>
+    <p:spTree>
+      <p:nvGrpSpPr>
+        <p:cNvPr id="1" name=""/>
+        <p:cNvGrpSpPr/>
+        <p:nvPr/>
+      </p:nvGrpSpPr>
+      <p:grpSpPr>
+        <a:xfrm>
+          <a:off x="0" y="0"/>
+          <a:ext cx="0" cy="0"/>
+          <a:chOff x="0" y="0"/>
+          <a:chExt cx="0" cy="0"/>
+        </a:xfrm>
+      </p:grpSpPr>
+      <p:sp>
+        <p:nvSpPr>
+          <p:cNvPr id="14" name="文本框 13">
+            <a:extLst>
+              <a:ext uri="{FF2B5EF4-FFF2-40B4-BE49-F238E27FC236}">
+                <a16:creationId xmlns:a16="http://schemas.microsoft.com/office/drawing/2014/main" id="{4D2FA202-EEBF-2564-0868-A496D9020EB6}"/>
+              </a:ext>
+            </a:extLst>
+          </p:cNvPr>
+          <p:cNvSpPr txBox="1"/>
+          <p:nvPr/>
+        </p:nvSpPr>
+        <p:spPr>
+          <a:xfrm>
+            <a:off x="393700" y="304800"/>
+            <a:ext cx="11404600" cy="384721"/>
+          </a:xfrm>
+          <a:prstGeom prst="rect">
+            <a:avLst/>
+          </a:prstGeom>
+          <a:noFill/>
+        </p:spPr>
+        <p:txBody>
+          <a:bodyPr vert="horz" lIns="0" tIns="0" rIns="0" bIns="0" rtlCol="0">
+            <a:spAutoFit/>
+          </a:bodyPr>
+          <a:lstStyle/>
+          <a:p>
+            <a:r>
+              <a:rPr lang="en-US" altLang="zh-CN" sz="2500" b="1">
+                <a:solidFill>
+                  <a:srgbClr val="000000"/>
+                </a:solidFill>
+                <a:latin typeface="Arial" panose="020B0604020202020204" pitchFamily="34" charset="0"/>
+              </a:rPr>
+              <a:t>One W7900 runs the evidence engine and the competition coach.</a:t>
+            </a:r>
+            <a:endParaRPr lang="zh-CN" altLang="en-US" sz="2500" b="1">
+              <a:solidFill>
+                <a:srgbClr val="000000"/>
+              </a:solidFill>
+              <a:latin typeface="Arial" panose="020B0604020202020204" pitchFamily="34" charset="0"/>
+            </a:endParaRPr>
+          </a:p>
+        </p:txBody>
+      </p:sp>
+      <p:sp>
+        <p:nvSpPr>
+          <p:cNvPr id="15" name="文本框 14">
+            <a:extLst>
+              <a:ext uri="{FF2B5EF4-FFF2-40B4-BE49-F238E27FC236}">
+                <a16:creationId xmlns:a16="http://schemas.microsoft.com/office/drawing/2014/main" id="{D1D61B16-B110-0AE7-7A1A-935E646AEEFD}"/>
+              </a:ext>
+            </a:extLst>
+          </p:cNvPr>
+          <p:cNvSpPr txBox="1"/>
+          <p:nvPr/>
+        </p:nvSpPr>
+        <p:spPr>
+          <a:xfrm>
+            <a:off x="393700" y="1041400"/>
+            <a:ext cx="11404600" cy="369332"/>
+          </a:xfrm>
+          <a:prstGeom prst="rect">
+            <a:avLst/>
+          </a:prstGeom>
+          <a:noFill/>
+        </p:spPr>
+        <p:txBody>
+          <a:bodyPr vert="horz" lIns="0" tIns="0" rIns="0" bIns="0" rtlCol="0">
+            <a:spAutoFit/>
+          </a:bodyPr>
+          <a:lstStyle/>
+          <a:p>
+            <a:r>
+              <a:rPr lang="en-US" altLang="zh-CN" sz="1200">
+                <a:solidFill>
+                  <a:srgbClr val="000000"/>
+                </a:solidFill>
+                <a:latin typeface="Arial" panose="020B0604020202020204" pitchFamily="34" charset="0"/>
+              </a:rPr>
+              <a:t>KataGo and the validated 27B fallback share the Radeon pipeline. The 14B LoRA training evidence is preserved, while the competition alias remains on the model that passed the release policy.</a:t>
+            </a:r>
+            <a:endParaRPr lang="zh-CN" altLang="en-US" sz="1200">
+              <a:solidFill>
+                <a:srgbClr val="000000"/>
+              </a:solidFill>
+              <a:latin typeface="Arial" panose="020B0604020202020204" pitchFamily="34" charset="0"/>
+            </a:endParaRPr>
+          </a:p>
+        </p:txBody>
+      </p:sp>
+      <p:sp>
+        <p:nvSpPr>
+          <p:cNvPr id="16" name="矩形: 圆角 15">
+            <a:extLst>
+              <a:ext uri="{FF2B5EF4-FFF2-40B4-BE49-F238E27FC236}">
+                <a16:creationId xmlns:a16="http://schemas.microsoft.com/office/drawing/2014/main" id="{19E14E24-52E0-8E48-3505-8535FA50A1F1}"/>
+              </a:ext>
+            </a:extLst>
+          </p:cNvPr>
+          <p:cNvSpPr/>
+          <p:nvPr/>
+        </p:nvSpPr>
+        <p:spPr>
+          <a:xfrm>
+            <a:off x="393700" y="2768600"/>
+            <a:ext cx="3564467" cy="2095500"/>
+          </a:xfrm>
+          <a:prstGeom prst="roundRect">
+            <a:avLst/>
+          </a:prstGeom>
+          <a:solidFill>
+            <a:srgbClr val="F5F5F5"/>
+          </a:solidFill>
+          <a:ln w="19050">
+            <a:noFill/>
+            <a:prstDash val="solid"/>
+          </a:ln>
+          <a:effectLst/>
+          <a:extLst>
+            <a:ext uri="{91240B29-F687-4F45-9708-019B960494DF}">
+              <a14:hiddenLine xmlns:a14="http://schemas.microsoft.com/office/drawing/2010/main" w="19050">
+                <a:solidFill>
+                  <a:schemeClr val="accent1">
+                    <a:shade val="15000"/>
+                  </a:schemeClr>
+                </a:solidFill>
+                <a:prstDash val="solid"/>
+              </a14:hiddenLine>
+            </a:ext>
+          </a:extLst>
+        </p:spPr>
+        <p:style>
+          <a:lnRef idx="2">
+            <a:schemeClr val="accent1">
+              <a:shade val="15000"/>
+            </a:schemeClr>
+          </a:lnRef>
+          <a:fillRef idx="1">
+            <a:schemeClr val="accent1"/>
+          </a:fillRef>
+          <a:effectRef idx="0">
+            <a:schemeClr val="accent1"/>
+          </a:effectRef>
+          <a:fontRef idx="minor">
+            <a:schemeClr val="lt1"/>
+          </a:fontRef>
+        </p:style>
+        <p:txBody>
+          <a:bodyPr rtlCol="0" anchor="ctr"/>
+          <a:lstStyle/>
+          <a:p>
+            <a:pPr algn="ctr"/>
+            <a:endParaRPr lang="zh-CN" altLang="en-US"/>
+          </a:p>
+        </p:txBody>
+      </p:sp>
+      <p:sp>
+        <p:nvSpPr>
+          <p:cNvPr id="17" name="文本框 16">
+            <a:extLst>
+              <a:ext uri="{FF2B5EF4-FFF2-40B4-BE49-F238E27FC236}">
+                <a16:creationId xmlns:a16="http://schemas.microsoft.com/office/drawing/2014/main" id="{D8179149-CE95-62CF-2C4D-1CFA9087EB8D}"/>
+              </a:ext>
+            </a:extLst>
+          </p:cNvPr>
+          <p:cNvSpPr txBox="1"/>
+          <p:nvPr/>
+        </p:nvSpPr>
+        <p:spPr>
+          <a:xfrm>
+            <a:off x="647700" y="3200400"/>
+            <a:ext cx="3056467" cy="384721"/>
+          </a:xfrm>
+          <a:prstGeom prst="rect">
+            <a:avLst/>
+          </a:prstGeom>
+          <a:noFill/>
+        </p:spPr>
+        <p:txBody>
+          <a:bodyPr vert="horz" lIns="0" tIns="0" rIns="0" bIns="0" rtlCol="0">
+            <a:spAutoFit/>
+          </a:bodyPr>
+          <a:lstStyle/>
+          <a:p>
+            <a:r>
+              <a:rPr lang="en-US" altLang="zh-CN" sz="2500" b="1">
+                <a:solidFill>
+                  <a:srgbClr val="000000"/>
+                </a:solidFill>
+                <a:latin typeface="Arial" panose="020B0604020202020204" pitchFamily="34" charset="0"/>
+              </a:rPr>
+              <a:t>220 / 220</a:t>
+            </a:r>
+            <a:endParaRPr lang="zh-CN" altLang="en-US" sz="2500" b="1">
+              <a:solidFill>
+                <a:srgbClr val="000000"/>
+              </a:solidFill>
+              <a:latin typeface="Arial" panose="020B0604020202020204" pitchFamily="34" charset="0"/>
+            </a:endParaRPr>
+          </a:p>
+        </p:txBody>
+      </p:sp>
+      <p:sp>
+        <p:nvSpPr>
+          <p:cNvPr id="18" name="文本框 17">
+            <a:extLst>
+              <a:ext uri="{FF2B5EF4-FFF2-40B4-BE49-F238E27FC236}">
+                <a16:creationId xmlns:a16="http://schemas.microsoft.com/office/drawing/2014/main" id="{90C29923-B71C-046A-9FEF-25A9DE3A2872}"/>
+              </a:ext>
+            </a:extLst>
+          </p:cNvPr>
+          <p:cNvSpPr txBox="1"/>
+          <p:nvPr/>
+        </p:nvSpPr>
+        <p:spPr>
+          <a:xfrm>
+            <a:off x="647700" y="3924300"/>
+            <a:ext cx="3056467" cy="230832"/>
+          </a:xfrm>
+          <a:prstGeom prst="rect">
+            <a:avLst/>
+          </a:prstGeom>
+          <a:noFill/>
+        </p:spPr>
+        <p:txBody>
+          <a:bodyPr vert="horz" lIns="0" tIns="0" rIns="0" bIns="0" rtlCol="0">
+            <a:spAutoFit/>
+          </a:bodyPr>
+          <a:lstStyle/>
+          <a:p>
+            <a:r>
+              <a:rPr lang="en-US" altLang="zh-CN" sz="1500">
+                <a:solidFill>
+                  <a:srgbClr val="000000"/>
+                </a:solidFill>
+                <a:latin typeface="Arial" panose="020B0604020202020204" pitchFamily="34" charset="0"/>
+              </a:rPr>
+              <a:t>Agent function cases</a:t>
+            </a:r>
+            <a:endParaRPr lang="zh-CN" altLang="en-US" sz="1500">
+              <a:solidFill>
+                <a:srgbClr val="000000"/>
+              </a:solidFill>
+              <a:latin typeface="Arial" panose="020B0604020202020204" pitchFamily="34" charset="0"/>
+            </a:endParaRPr>
+          </a:p>
+        </p:txBody>
+      </p:sp>
+      <p:sp>
+        <p:nvSpPr>
+          <p:cNvPr id="19" name="矩形: 圆角 18">
+            <a:extLst>
+              <a:ext uri="{FF2B5EF4-FFF2-40B4-BE49-F238E27FC236}">
+                <a16:creationId xmlns:a16="http://schemas.microsoft.com/office/drawing/2014/main" id="{4CC6995C-6BD5-6490-83EC-666AF637BEEB}"/>
+              </a:ext>
+            </a:extLst>
+          </p:cNvPr>
+          <p:cNvSpPr/>
+          <p:nvPr/>
+        </p:nvSpPr>
+        <p:spPr>
+          <a:xfrm>
+            <a:off x="4313767" y="2768600"/>
+            <a:ext cx="3564466" cy="2095500"/>
+          </a:xfrm>
+          <a:prstGeom prst="roundRect">
+            <a:avLst/>
+          </a:prstGeom>
+          <a:solidFill>
+            <a:srgbClr val="F5F5F5"/>
+          </a:solidFill>
+          <a:ln w="19050">
+            <a:noFill/>
+            <a:prstDash val="solid"/>
+          </a:ln>
+          <a:effectLst/>
+          <a:extLst>
+            <a:ext uri="{91240B29-F687-4F45-9708-019B960494DF}">
+              <a14:hiddenLine xmlns:a14="http://schemas.microsoft.com/office/drawing/2010/main" w="19050">
+                <a:solidFill>
+                  <a:schemeClr val="accent1">
+                    <a:shade val="15000"/>
+                  </a:schemeClr>
+                </a:solidFill>
+                <a:prstDash val="solid"/>
+              </a14:hiddenLine>
+            </a:ext>
+          </a:extLst>
+        </p:spPr>
+        <p:style>
+          <a:lnRef idx="2">
+            <a:schemeClr val="accent1">
+              <a:shade val="15000"/>
+            </a:schemeClr>
+          </a:lnRef>
+          <a:fillRef idx="1">
+            <a:schemeClr val="accent1"/>
+          </a:fillRef>
+          <a:effectRef idx="0">
+            <a:schemeClr val="accent1"/>
+          </a:effectRef>
+          <a:fontRef idx="minor">
+            <a:schemeClr val="lt1"/>
+          </a:fontRef>
+        </p:style>
+        <p:txBody>
+          <a:bodyPr rtlCol="0" anchor="ctr"/>
+          <a:lstStyle/>
+          <a:p>
+            <a:pPr algn="ctr"/>
+            <a:endParaRPr lang="zh-CN" altLang="en-US"/>
+          </a:p>
+        </p:txBody>
+      </p:sp>
+      <p:sp>
+        <p:nvSpPr>
+          <p:cNvPr id="20" name="文本框 19">
+            <a:extLst>
+              <a:ext uri="{FF2B5EF4-FFF2-40B4-BE49-F238E27FC236}">
+                <a16:creationId xmlns:a16="http://schemas.microsoft.com/office/drawing/2014/main" id="{29D01DF9-D135-D23F-C310-8857B841EB33}"/>
+              </a:ext>
+            </a:extLst>
+          </p:cNvPr>
+          <p:cNvSpPr txBox="1"/>
+          <p:nvPr/>
+        </p:nvSpPr>
+        <p:spPr>
+          <a:xfrm>
+            <a:off x="4567767" y="3200400"/>
+            <a:ext cx="3056467" cy="384721"/>
+          </a:xfrm>
+          <a:prstGeom prst="rect">
+            <a:avLst/>
+          </a:prstGeom>
+          <a:noFill/>
+        </p:spPr>
+        <p:txBody>
+          <a:bodyPr vert="horz" lIns="0" tIns="0" rIns="0" bIns="0" rtlCol="0">
+            <a:spAutoFit/>
+          </a:bodyPr>
+          <a:lstStyle/>
+          <a:p>
+            <a:r>
+              <a:rPr lang="en-US" altLang="zh-CN" sz="2500" b="1">
+                <a:solidFill>
+                  <a:srgbClr val="000000"/>
+                </a:solidFill>
+                <a:latin typeface="Arial" panose="020B0604020202020204" pitchFamily="34" charset="0"/>
+              </a:rPr>
+              <a:t>189 / 189</a:t>
+            </a:r>
+            <a:endParaRPr lang="zh-CN" altLang="en-US" sz="2500" b="1">
+              <a:solidFill>
+                <a:srgbClr val="000000"/>
+              </a:solidFill>
+              <a:latin typeface="Arial" panose="020B0604020202020204" pitchFamily="34" charset="0"/>
+            </a:endParaRPr>
+          </a:p>
+        </p:txBody>
+      </p:sp>
+      <p:sp>
+        <p:nvSpPr>
+          <p:cNvPr id="21" name="文本框 20">
+            <a:extLst>
+              <a:ext uri="{FF2B5EF4-FFF2-40B4-BE49-F238E27FC236}">
+                <a16:creationId xmlns:a16="http://schemas.microsoft.com/office/drawing/2014/main" id="{78760078-A759-3BC6-CB34-BF46775225C9}"/>
+              </a:ext>
+            </a:extLst>
+          </p:cNvPr>
+          <p:cNvSpPr txBox="1"/>
+          <p:nvPr/>
+        </p:nvSpPr>
+        <p:spPr>
+          <a:xfrm>
+            <a:off x="4567767" y="3924300"/>
+            <a:ext cx="3056467" cy="230832"/>
+          </a:xfrm>
+          <a:prstGeom prst="rect">
+            <a:avLst/>
+          </a:prstGeom>
+          <a:noFill/>
+        </p:spPr>
+        <p:txBody>
+          <a:bodyPr vert="horz" lIns="0" tIns="0" rIns="0" bIns="0" rtlCol="0">
+            <a:spAutoFit/>
+          </a:bodyPr>
+          <a:lstStyle/>
+          <a:p>
+            <a:r>
+              <a:rPr lang="en-US" altLang="zh-CN" sz="1500">
+                <a:solidFill>
+                  <a:srgbClr val="000000"/>
+                </a:solidFill>
+                <a:latin typeface="Arial" panose="020B0604020202020204" pitchFamily="34" charset="0"/>
+              </a:rPr>
+              <a:t>Clean-room public tests</a:t>
+            </a:r>
+            <a:endParaRPr lang="zh-CN" altLang="en-US" sz="1500">
+              <a:solidFill>
+                <a:srgbClr val="000000"/>
+              </a:solidFill>
+              <a:latin typeface="Arial" panose="020B0604020202020204" pitchFamily="34" charset="0"/>
+            </a:endParaRPr>
+          </a:p>
+        </p:txBody>
+      </p:sp>
+      <p:sp>
+        <p:nvSpPr>
+          <p:cNvPr id="22" name="矩形: 圆角 21">
+            <a:extLst>
+              <a:ext uri="{FF2B5EF4-FFF2-40B4-BE49-F238E27FC236}">
+                <a16:creationId xmlns:a16="http://schemas.microsoft.com/office/drawing/2014/main" id="{6575DA6F-67EB-13F9-D595-78785C4A4E05}"/>
+              </a:ext>
+            </a:extLst>
+          </p:cNvPr>
+          <p:cNvSpPr/>
+          <p:nvPr/>
+        </p:nvSpPr>
+        <p:spPr>
+          <a:xfrm>
+            <a:off x="8233833" y="2768600"/>
+            <a:ext cx="3564467" cy="2095500"/>
+          </a:xfrm>
+          <a:prstGeom prst="roundRect">
+            <a:avLst/>
+          </a:prstGeom>
+          <a:solidFill>
+            <a:srgbClr val="F5F5F5"/>
+          </a:solidFill>
+          <a:ln w="19050">
+            <a:noFill/>
+            <a:prstDash val="solid"/>
+          </a:ln>
+          <a:effectLst/>
+          <a:extLst>
+            <a:ext uri="{91240B29-F687-4F45-9708-019B960494DF}">
+              <a14:hiddenLine xmlns:a14="http://schemas.microsoft.com/office/drawing/2010/main" w="19050">
+                <a:solidFill>
+                  <a:schemeClr val="accent1">
+                    <a:shade val="15000"/>
+                  </a:schemeClr>
+                </a:solidFill>
+                <a:prstDash val="solid"/>
+              </a14:hiddenLine>
+            </a:ext>
+          </a:extLst>
+        </p:spPr>
+        <p:style>
+          <a:lnRef idx="2">
+            <a:schemeClr val="accent1">
+              <a:shade val="15000"/>
+            </a:schemeClr>
+          </a:lnRef>
+          <a:fillRef idx="1">
+            <a:schemeClr val="accent1"/>
+          </a:fillRef>
+          <a:effectRef idx="0">
+            <a:schemeClr val="accent1"/>
+          </a:effectRef>
+          <a:fontRef idx="minor">
+            <a:schemeClr val="lt1"/>
+          </a:fontRef>
+        </p:style>
+        <p:txBody>
+          <a:bodyPr rtlCol="0" anchor="ctr"/>
+          <a:lstStyle/>
+          <a:p>
+            <a:pPr algn="ctr"/>
+            <a:endParaRPr lang="zh-CN" altLang="en-US"/>
+          </a:p>
+        </p:txBody>
+      </p:sp>
+      <p:sp>
+        <p:nvSpPr>
+          <p:cNvPr id="23" name="文本框 22">
+            <a:extLst>
+              <a:ext uri="{FF2B5EF4-FFF2-40B4-BE49-F238E27FC236}">
+                <a16:creationId xmlns:a16="http://schemas.microsoft.com/office/drawing/2014/main" id="{62551B44-137B-6831-89D5-EDA3455EC494}"/>
+              </a:ext>
+            </a:extLst>
+          </p:cNvPr>
+          <p:cNvSpPr txBox="1"/>
+          <p:nvPr/>
+        </p:nvSpPr>
+        <p:spPr>
+          <a:xfrm>
+            <a:off x="8487833" y="3200400"/>
+            <a:ext cx="3056467" cy="384721"/>
+          </a:xfrm>
+          <a:prstGeom prst="rect">
+            <a:avLst/>
+          </a:prstGeom>
+          <a:noFill/>
+        </p:spPr>
+        <p:txBody>
+          <a:bodyPr vert="horz" lIns="0" tIns="0" rIns="0" bIns="0" rtlCol="0">
+            <a:spAutoFit/>
+          </a:bodyPr>
+          <a:lstStyle/>
+          <a:p>
+            <a:r>
+              <a:rPr lang="en-US" altLang="zh-CN" sz="2500" b="1">
+                <a:solidFill>
+                  <a:srgbClr val="000000"/>
+                </a:solidFill>
+                <a:latin typeface="Arial" panose="020B0604020202020204" pitchFamily="34" charset="0"/>
+              </a:rPr>
+              <a:t>10.336 s</a:t>
+            </a:r>
+            <a:endParaRPr lang="zh-CN" altLang="en-US" sz="2500" b="1">
+              <a:solidFill>
+                <a:srgbClr val="000000"/>
+              </a:solidFill>
+              <a:latin typeface="Arial" panose="020B0604020202020204" pitchFamily="34" charset="0"/>
+            </a:endParaRPr>
+          </a:p>
+        </p:txBody>
+      </p:sp>
+      <p:sp>
+        <p:nvSpPr>
+          <p:cNvPr id="24" name="文本框 23">
+            <a:extLst>
+              <a:ext uri="{FF2B5EF4-FFF2-40B4-BE49-F238E27FC236}">
+                <a16:creationId xmlns:a16="http://schemas.microsoft.com/office/drawing/2014/main" id="{C8AE942D-1C23-C84C-2074-80D0437F02DA}"/>
+              </a:ext>
+            </a:extLst>
+          </p:cNvPr>
+          <p:cNvSpPr txBox="1"/>
+          <p:nvPr/>
+        </p:nvSpPr>
+        <p:spPr>
+          <a:xfrm>
+            <a:off x="8487833" y="3924300"/>
+            <a:ext cx="3056467" cy="230832"/>
+          </a:xfrm>
+          <a:prstGeom prst="rect">
+            <a:avLst/>
+          </a:prstGeom>
+          <a:noFill/>
+        </p:spPr>
+        <p:txBody>
+          <a:bodyPr vert="horz" lIns="0" tIns="0" rIns="0" bIns="0" rtlCol="0">
+            <a:spAutoFit/>
+          </a:bodyPr>
+          <a:lstStyle/>
+          <a:p>
+            <a:r>
+              <a:rPr lang="en-US" altLang="zh-CN" sz="1500">
+                <a:solidFill>
+                  <a:srgbClr val="000000"/>
+                </a:solidFill>
+                <a:latin typeface="Arial" panose="020B0604020202020204" pitchFamily="34" charset="0"/>
+              </a:rPr>
+              <a:t>Combined P95; 30/30 cycles</a:t>
+            </a:r>
+            <a:endParaRPr lang="zh-CN" altLang="en-US" sz="1500">
+              <a:solidFill>
+                <a:srgbClr val="000000"/>
+              </a:solidFill>
+              <a:latin typeface="Arial" panose="020B0604020202020204" pitchFamily="34" charset="0"/>
+            </a:endParaRPr>
+          </a:p>
+        </p:txBody>
+      </p:sp>
+      <p:sp>
+        <p:nvSpPr>
+          <p:cNvPr id="25" name="文本框 24">
+            <a:extLst>
+              <a:ext uri="{FF2B5EF4-FFF2-40B4-BE49-F238E27FC236}">
+                <a16:creationId xmlns:a16="http://schemas.microsoft.com/office/drawing/2014/main" id="{8564CD67-BBBD-C401-2EAD-5145FAD68750}"/>
+              </a:ext>
+            </a:extLst>
+          </p:cNvPr>
+          <p:cNvSpPr txBox="1"/>
+          <p:nvPr/>
+        </p:nvSpPr>
+        <p:spPr>
+          <a:xfrm>
+            <a:off x="393700" y="5943600"/>
+            <a:ext cx="11404600" cy="169277"/>
+          </a:xfrm>
+          <a:prstGeom prst="rect">
+            <a:avLst/>
+          </a:prstGeom>
+          <a:noFill/>
+        </p:spPr>
+        <p:txBody>
+          <a:bodyPr vert="horz" lIns="0" tIns="0" rIns="0" bIns="0" rtlCol="0">
+            <a:spAutoFit/>
+          </a:bodyPr>
+          <a:lstStyle/>
+          <a:p>
+            <a:r>
+              <a:rPr lang="en-US" altLang="zh-CN" sz="1100">
+                <a:solidFill>
+                  <a:srgbClr val="000000"/>
+                </a:solidFill>
+                <a:latin typeface="Arial" panose="020B0604020202020204" pitchFamily="34" charset="0"/>
+              </a:rPr>
+              <a:t>AMD Radeon Pro W7900 48 GB • ROCm 7.2.1 • 24/24 fault and privacy cases • no OOM in the selected coexistence profile</a:t>
+            </a:r>
+            <a:endParaRPr lang="zh-CN" altLang="en-US" sz="1100">
+              <a:solidFill>
+                <a:srgbClr val="000000"/>
+              </a:solidFill>
+              <a:latin typeface="Arial" panose="020B0604020202020204" pitchFamily="34" charset="0"/>
+            </a:endParaRPr>
+          </a:p>
+        </p:txBody>
+      </p:sp>
+      <p:sp>
+        <p:nvSpPr>
+          <p:cNvPr id="26" name="文本框 25">
+            <a:extLst>
+              <a:ext uri="{FF2B5EF4-FFF2-40B4-BE49-F238E27FC236}">
+                <a16:creationId xmlns:a16="http://schemas.microsoft.com/office/drawing/2014/main" id="{709E6480-1110-24E6-5091-EFDFCB310666}"/>
+              </a:ext>
+            </a:extLst>
+          </p:cNvPr>
+          <p:cNvSpPr txBox="1"/>
+          <p:nvPr/>
+        </p:nvSpPr>
+        <p:spPr>
+          <a:xfrm>
+            <a:off x="11836400" y="6578600"/>
+            <a:ext cx="177800" cy="123111"/>
+          </a:xfrm>
+          <a:prstGeom prst="rect">
+            <a:avLst/>
+          </a:prstGeom>
+          <a:noFill/>
+        </p:spPr>
+        <p:txBody>
+          <a:bodyPr vert="horz" lIns="0" tIns="0" rIns="0" bIns="0" rtlCol="0">
+            <a:spAutoFit/>
+          </a:bodyPr>
+          <a:lstStyle/>
+          <a:p>
+            <a:r>
+              <a:rPr lang="en-US" altLang="zh-CN" sz="800">
+                <a:solidFill>
+                  <a:srgbClr val="000000"/>
+                </a:solidFill>
+                <a:latin typeface="Arial" panose="020B0604020202020204" pitchFamily="34" charset="0"/>
+              </a:rPr>
+              <a:t>5</a:t>
+            </a:r>
+            <a:endParaRPr lang="zh-CN" altLang="en-US" sz="800">
+              <a:solidFill>
+                <a:srgbClr val="000000"/>
+              </a:solidFill>
+              <a:latin typeface="Arial" panose="020B0604020202020204" pitchFamily="34" charset="0"/>
+            </a:endParaRPr>
+          </a:p>
+        </p:txBody>
+      </p:sp>
+    </p:spTree>
+    <p:extLst>
+      <p:ext uri="{BB962C8B-B14F-4D97-AF65-F5344CB8AC3E}">
+        <p14:creationId xmlns:p14="http://schemas.microsoft.com/office/powerpoint/2010/main" val="869096151"/>
+      </p:ext>
+    </p:extLst>
+  </p:cSld>
+  <p:clrMapOvr>
+    <a:masterClrMapping/>
+  </p:clrMapOvr>
+</p:sld>
+</file>
+
+<file path=ppt/slides/slide6.xml><?xml version="1.0" encoding="utf-8"?>
+<p:sld xmlns:a="http://schemas.openxmlformats.org/drawingml/2006/main" xmlns:r="http://schemas.openxmlformats.org/officeDocument/2006/relationships" xmlns:p="http://schemas.openxmlformats.org/presentationml/2006/main">
   <p:cSld>
     <p:spTree>
       <p:nvGrpSpPr>
@@ -3348,124 +3768,44 @@
         <p:nvPr/>
       </p:nvGrpSpPr>
       <p:grpSpPr>
-        <a:xfrm xmlns:a="http://schemas.openxmlformats.org/drawingml/2006/main"/>
+        <a:xfrm>
+          <a:off x="0" y="0"/>
+          <a:ext cx="0" cy="0"/>
+          <a:chOff x="0" y="0"/>
+          <a:chExt cx="0" cy="0"/>
+        </a:xfrm>
       </p:grpSpPr>
       <p:sp>
         <p:nvSpPr>
-          <p:cNvPr id="13" name="Rounded-Rectangle-5-1">
-            <a:extLst xmlns:a="http://schemas.openxmlformats.org/drawingml/2006/main">
+          <p:cNvPr id="4" name="Title-3-1">
+            <a:extLst>
               <a:ext uri="{FF2B5EF4-FFF2-40B4-BE49-F238E27FC236}">
-                <a16:creationId xmlns:a16="http://schemas.microsoft.com/office/drawing/2014/main" id="{048B790E-3BAC-449A-8434-31C389DC7C88}"/>
+                <a16:creationId xmlns:a16="http://schemas.microsoft.com/office/drawing/2014/main" id="{621FF044-E82E-4565-A4D0-7677280A8E72}"/>
               </a:ext>
             </a:extLst>
           </p:cNvPr>
           <p:cNvSpPr>
-            <a:spLocks xmlns:a="http://schemas.openxmlformats.org/drawingml/2006/main" noGrp="1"/>
-          </p:cNvSpPr>
-          <p:nvPr/>
-        </p:nvSpPr>
-        <p:spPr>
-          <a:xfrm xmlns:a="http://schemas.openxmlformats.org/drawingml/2006/main">
-            <a:off x="393668" y="3022568"/>
-            <a:ext cx="3568732" cy="2971800"/>
-          </a:xfrm>
-          <a:prstGeom xmlns:a="http://schemas.openxmlformats.org/drawingml/2006/main" prst="roundRect">
-            <a:avLst>
-              <a:gd name="adj" fmla="val 2564"/>
-            </a:avLst>
-          </a:prstGeom>
-          <a:solidFill xmlns:a="http://schemas.openxmlformats.org/drawingml/2006/main">
-            <a:srgbClr val="F2F2F2"/>
-          </a:solidFill>
-        </p:spPr>
-      </p:sp>
-      <p:sp>
-        <p:nvSpPr>
-          <p:cNvPr id="2" name="Rounded-Rectangle-6-2">
-            <a:extLst xmlns:a="http://schemas.openxmlformats.org/drawingml/2006/main">
-              <a:ext uri="{FF2B5EF4-FFF2-40B4-BE49-F238E27FC236}">
-                <a16:creationId xmlns:a16="http://schemas.microsoft.com/office/drawing/2014/main" id="{9E89F8D5-6524-44B4-A791-9381C5A79B65}"/>
-              </a:ext>
-            </a:extLst>
-          </p:cNvPr>
-          <p:cNvSpPr>
-            <a:spLocks xmlns:a="http://schemas.openxmlformats.org/drawingml/2006/main" noGrp="1"/>
-          </p:cNvSpPr>
-          <p:nvPr/>
-        </p:nvSpPr>
-        <p:spPr>
-          <a:xfrm xmlns:a="http://schemas.openxmlformats.org/drawingml/2006/main">
-            <a:off x="4311682" y="3022568"/>
-            <a:ext cx="3568732" cy="2971800"/>
-          </a:xfrm>
-          <a:prstGeom xmlns:a="http://schemas.openxmlformats.org/drawingml/2006/main" prst="roundRect">
-            <a:avLst>
-              <a:gd name="adj" fmla="val 2564"/>
-            </a:avLst>
-          </a:prstGeom>
-          <a:solidFill xmlns:a="http://schemas.openxmlformats.org/drawingml/2006/main">
-            <a:srgbClr val="F2F2F2"/>
-          </a:solidFill>
-        </p:spPr>
-      </p:sp>
-      <p:sp>
-        <p:nvSpPr>
-          <p:cNvPr id="3" name="Rounded-Rectangle-7-3">
-            <a:extLst xmlns:a="http://schemas.openxmlformats.org/drawingml/2006/main">
-              <a:ext uri="{FF2B5EF4-FFF2-40B4-BE49-F238E27FC236}">
-                <a16:creationId xmlns:a16="http://schemas.microsoft.com/office/drawing/2014/main" id="{6F3CD39C-3410-4DC3-88EF-1E5370D767BA}"/>
-              </a:ext>
-            </a:extLst>
-          </p:cNvPr>
-          <p:cNvSpPr>
-            <a:spLocks xmlns:a="http://schemas.openxmlformats.org/drawingml/2006/main" noGrp="1"/>
-          </p:cNvSpPr>
-          <p:nvPr/>
-        </p:nvSpPr>
-        <p:spPr>
-          <a:xfrm xmlns:a="http://schemas.openxmlformats.org/drawingml/2006/main">
-            <a:off x="8232267" y="3022568"/>
-            <a:ext cx="3568732" cy="2971800"/>
-          </a:xfrm>
-          <a:prstGeom xmlns:a="http://schemas.openxmlformats.org/drawingml/2006/main" prst="roundRect">
-            <a:avLst>
-              <a:gd name="adj" fmla="val 2564"/>
-            </a:avLst>
-          </a:prstGeom>
-          <a:solidFill xmlns:a="http://schemas.openxmlformats.org/drawingml/2006/main">
-            <a:srgbClr val="F2F2F2"/>
-          </a:solidFill>
-        </p:spPr>
-      </p:sp>
-      <p:sp>
-        <p:nvSpPr>
-          <p:cNvPr id="4" name="Slide-Number-Placeholder-1-4">
-            <a:extLst xmlns:a="http://schemas.openxmlformats.org/drawingml/2006/main">
-              <a:ext uri="{FF2B5EF4-FFF2-40B4-BE49-F238E27FC236}">
-                <a16:creationId xmlns:a16="http://schemas.microsoft.com/office/drawing/2014/main" id="{F935EF4A-D6AD-4200-BF1A-6A7559DBF31B}"/>
-              </a:ext>
-            </a:extLst>
-          </p:cNvPr>
-          <p:cNvSpPr>
-            <a:spLocks xmlns:a="http://schemas.openxmlformats.org/drawingml/2006/main" noGrp="1"/>
-          </p:cNvSpPr>
-          <p:nvPr/>
-        </p:nvSpPr>
-        <p:spPr>
-          <a:xfrm xmlns:a="http://schemas.openxmlformats.org/drawingml/2006/main">
-            <a:off x="11279315" y="6279261"/>
-            <a:ext cx="518922" cy="241268"/>
-          </a:xfrm>
-          <a:prstGeom xmlns:a="http://schemas.openxmlformats.org/drawingml/2006/main" prst="rect">
-            <a:avLst/>
-          </a:prstGeom>
-        </p:spPr>
-        <p:txBody>
-          <a:bodyPr xmlns:a="http://schemas.openxmlformats.org/drawingml/2006/main" lIns="0" tIns="0" rIns="0" bIns="0" anchor="b"/>
-          <a:lstStyle xmlns:a="http://schemas.openxmlformats.org/drawingml/2006/main"/>
-          <a:p xmlns:a="http://schemas.openxmlformats.org/drawingml/2006/main">
-            <a:pPr algn="r">
-              <a:defRPr sz="1000">
+            <a:spLocks noGrp="1"/>
+          </p:cNvSpPr>
+          <p:nvPr/>
+        </p:nvSpPr>
+        <p:spPr>
+          <a:xfrm>
+            <a:off x="393668" y="1738789"/>
+            <a:ext cx="9448800" cy="2491454"/>
+          </a:xfrm>
+          <a:prstGeom prst="rect">
+            <a:avLst/>
+          </a:prstGeom>
+        </p:spPr>
+        <p:txBody>
+          <a:bodyPr lIns="0" tIns="0" rIns="0" bIns="0" anchor="b">
+            <a:noAutofit/>
+          </a:bodyPr>
+          <a:lstStyle/>
+          <a:p>
+            <a:pPr algn="l">
+              <a:defRPr sz="6000">
                 <a:solidFill>
                   <a:srgbClr val="000000"/>
                 </a:solidFill>
@@ -3475,85 +3815,41 @@
               </a:defRPr>
             </a:pPr>
             <a:r>
-              <a:t>5</a:t>
-            </a:r>
-          </a:p>
-        </p:txBody>
-      </p:sp>
-      <p:sp>
-        <p:nvSpPr>
-          <p:cNvPr id="5" name="Title-2-5">
-            <a:extLst xmlns:a="http://schemas.openxmlformats.org/drawingml/2006/main">
+              <a:t>Every superhuman move,
+made understandable.</a:t>
+            </a:r>
+          </a:p>
+        </p:txBody>
+      </p:sp>
+      <p:sp>
+        <p:nvSpPr>
+          <p:cNvPr id="2" name="Subtitle-4-2">
+            <a:extLst>
               <a:ext uri="{FF2B5EF4-FFF2-40B4-BE49-F238E27FC236}">
-                <a16:creationId xmlns:a16="http://schemas.microsoft.com/office/drawing/2014/main" id="{90659321-DB53-4F9D-AF9F-0DB45874873C}"/>
+                <a16:creationId xmlns:a16="http://schemas.microsoft.com/office/drawing/2014/main" id="{7B5069B2-0D66-44CD-8BED-E30E464A183B}"/>
               </a:ext>
             </a:extLst>
           </p:cNvPr>
           <p:cNvSpPr>
-            <a:spLocks xmlns:a="http://schemas.openxmlformats.org/drawingml/2006/main" noGrp="1"/>
-          </p:cNvSpPr>
-          <p:nvPr/>
-        </p:nvSpPr>
-        <p:spPr>
-          <a:xfrm xmlns:a="http://schemas.openxmlformats.org/drawingml/2006/main">
-            <a:off x="393668" y="344043"/>
-            <a:ext cx="11404568" cy="1047464"/>
-          </a:xfrm>
-          <a:prstGeom xmlns:a="http://schemas.openxmlformats.org/drawingml/2006/main" prst="rect">
-            <a:avLst/>
-          </a:prstGeom>
-        </p:spPr>
-        <p:txBody>
-          <a:bodyPr xmlns:a="http://schemas.openxmlformats.org/drawingml/2006/main" lIns="0" tIns="0" rIns="0" bIns="0" anchor="t">
-            <a:normAutofit fontScale="100000"/>
+            <a:spLocks noGrp="1"/>
+          </p:cNvSpPr>
+          <p:nvPr/>
+        </p:nvSpPr>
+        <p:spPr>
+          <a:xfrm>
+            <a:off x="393668" y="4973288"/>
+            <a:ext cx="3568732" cy="1080230"/>
+          </a:xfrm>
+          <a:prstGeom prst="rect">
+            <a:avLst/>
+          </a:prstGeom>
+        </p:spPr>
+        <p:txBody>
+          <a:bodyPr lIns="0" tIns="0" rIns="0" bIns="0">
+            <a:noAutofit/>
           </a:bodyPr>
-          <a:lstStyle xmlns:a="http://schemas.openxmlformats.org/drawingml/2006/main"/>
-          <a:p xmlns:a="http://schemas.openxmlformats.org/drawingml/2006/main">
-            <a:pPr algn="l">
-              <a:defRPr sz="2900">
-                <a:solidFill>
-                  <a:srgbClr val="000000"/>
-                </a:solidFill>
-                <a:latin typeface="Helvetica Neue"/>
-                <a:ea typeface="Helvetica Neue"/>
-                <a:cs typeface="Helvetica Neue"/>
-              </a:defRPr>
-            </a:pPr>
-            <a:r>
-              <a:t>One W7900 runs both the superhuman engine and the local coach.</a:t>
-            </a:r>
-          </a:p>
-        </p:txBody>
-      </p:sp>
-      <p:sp>
-        <p:nvSpPr>
-          <p:cNvPr id="6" name="Content-Placeholder-9-6">
-            <a:extLst xmlns:a="http://schemas.openxmlformats.org/drawingml/2006/main">
-              <a:ext uri="{FF2B5EF4-FFF2-40B4-BE49-F238E27FC236}">
-                <a16:creationId xmlns:a16="http://schemas.microsoft.com/office/drawing/2014/main" id="{85DB064A-9C8F-4D02-99E7-C156019A7C43}"/>
-              </a:ext>
-            </a:extLst>
-          </p:cNvPr>
-          <p:cNvSpPr>
-            <a:spLocks xmlns:a="http://schemas.openxmlformats.org/drawingml/2006/main" noGrp="1"/>
-          </p:cNvSpPr>
-          <p:nvPr/>
-        </p:nvSpPr>
-        <p:spPr>
-          <a:xfrm xmlns:a="http://schemas.openxmlformats.org/drawingml/2006/main">
-            <a:off x="702374" y="4900613"/>
-            <a:ext cx="2949607" cy="819150"/>
-          </a:xfrm>
-          <a:prstGeom xmlns:a="http://schemas.openxmlformats.org/drawingml/2006/main" prst="rect">
-            <a:avLst/>
-          </a:prstGeom>
-        </p:spPr>
-        <p:txBody>
-          <a:bodyPr xmlns:a="http://schemas.openxmlformats.org/drawingml/2006/main" lIns="91440" tIns="45720" rIns="91440" bIns="45720">
-            <a:normAutofit fontScale="99479"/>
-          </a:bodyPr>
-          <a:lstStyle xmlns:a="http://schemas.openxmlformats.org/drawingml/2006/main"/>
-          <a:p xmlns:a="http://schemas.openxmlformats.org/drawingml/2006/main">
+          <a:lstStyle/>
+          <a:p>
             <a:pPr algn="l">
               <a:defRPr sz="2400">
                 <a:solidFill>
@@ -3565,41 +3861,10 @@
               </a:defRPr>
             </a:pPr>
             <a:r>
-              <a:t>33 positions
-32 visits each</a:t>
-            </a:r>
-          </a:p>
-        </p:txBody>
-      </p:sp>
-      <p:sp>
-        <p:nvSpPr>
-          <p:cNvPr id="7" name="Content-Placeholder-10-7">
-            <a:extLst xmlns:a="http://schemas.openxmlformats.org/drawingml/2006/main">
-              <a:ext uri="{FF2B5EF4-FFF2-40B4-BE49-F238E27FC236}">
-                <a16:creationId xmlns:a16="http://schemas.microsoft.com/office/drawing/2014/main" id="{A43A7709-D7F0-4765-BD7C-556FAE15D4E2}"/>
-              </a:ext>
-            </a:extLst>
-          </p:cNvPr>
-          <p:cNvSpPr>
-            <a:spLocks xmlns:a="http://schemas.openxmlformats.org/drawingml/2006/main" noGrp="1"/>
-          </p:cNvSpPr>
-          <p:nvPr/>
-        </p:nvSpPr>
-        <p:spPr>
-          <a:xfrm xmlns:a="http://schemas.openxmlformats.org/drawingml/2006/main">
-            <a:off x="8541830" y="4900613"/>
-            <a:ext cx="2949607" cy="819150"/>
-          </a:xfrm>
-          <a:prstGeom xmlns:a="http://schemas.openxmlformats.org/drawingml/2006/main" prst="rect">
-            <a:avLst/>
-          </a:prstGeom>
-        </p:spPr>
-        <p:txBody>
-          <a:bodyPr xmlns:a="http://schemas.openxmlformats.org/drawingml/2006/main" lIns="91440" tIns="45720" rIns="91440" bIns="45720">
-            <a:normAutofit fontScale="99479"/>
-          </a:bodyPr>
-          <a:lstStyle xmlns:a="http://schemas.openxmlformats.org/drawingml/2006/main"/>
-          <a:p xmlns:a="http://schemas.openxmlformats.org/drawingml/2006/main">
+              <a:t>KataGo authority</a:t>
+            </a:r>
+          </a:p>
+          <a:p>
             <a:pPr algn="l">
               <a:defRPr sz="2400">
                 <a:solidFill>
@@ -3611,41 +3876,10 @@
               </a:defRPr>
             </a:pPr>
             <a:r>
-              <a:t>Coach P95
-constructed set</a:t>
-            </a:r>
-          </a:p>
-        </p:txBody>
-      </p:sp>
-      <p:sp>
-        <p:nvSpPr>
-          <p:cNvPr id="8" name="Content-Placeholder-11-8">
-            <a:extLst xmlns:a="http://schemas.openxmlformats.org/drawingml/2006/main">
-              <a:ext uri="{FF2B5EF4-FFF2-40B4-BE49-F238E27FC236}">
-                <a16:creationId xmlns:a16="http://schemas.microsoft.com/office/drawing/2014/main" id="{A7A3C49B-60AC-4FE5-9953-2D8CD216A2E0}"/>
-              </a:ext>
-            </a:extLst>
-          </p:cNvPr>
-          <p:cNvSpPr>
-            <a:spLocks xmlns:a="http://schemas.openxmlformats.org/drawingml/2006/main" noGrp="1"/>
-          </p:cNvSpPr>
-          <p:nvPr/>
-        </p:nvSpPr>
-        <p:spPr>
-          <a:xfrm xmlns:a="http://schemas.openxmlformats.org/drawingml/2006/main">
-            <a:off x="4621244" y="4900613"/>
-            <a:ext cx="2949607" cy="819150"/>
-          </a:xfrm>
-          <a:prstGeom xmlns:a="http://schemas.openxmlformats.org/drawingml/2006/main" prst="rect">
-            <a:avLst/>
-          </a:prstGeom>
-        </p:spPr>
-        <p:txBody>
-          <a:bodyPr xmlns:a="http://schemas.openxmlformats.org/drawingml/2006/main" lIns="91440" tIns="45720" rIns="91440" bIns="45720">
-            <a:normAutofit fontScale="99479"/>
-          </a:bodyPr>
-          <a:lstStyle xmlns:a="http://schemas.openxmlformats.org/drawingml/2006/main"/>
-          <a:p xmlns:a="http://schemas.openxmlformats.org/drawingml/2006/main">
+              <a:t>Qwen explanation</a:t>
+            </a:r>
+          </a:p>
+          <a:p>
             <a:pPr algn="l">
               <a:defRPr sz="2400">
                 <a:solidFill>
@@ -3657,41 +3891,40 @@
               </a:defRPr>
             </a:pPr>
             <a:r>
-              <a:t>128-visit
-critical check</a:t>
-            </a:r>
-          </a:p>
-        </p:txBody>
-      </p:sp>
-      <p:sp>
-        <p:nvSpPr>
-          <p:cNvPr id="9" name="Content-Placeholder-9-9">
-            <a:extLst xmlns:a="http://schemas.openxmlformats.org/drawingml/2006/main">
+              <a:t>Radeon privacy</a:t>
+            </a:r>
+          </a:p>
+        </p:txBody>
+      </p:sp>
+      <p:sp>
+        <p:nvSpPr>
+          <p:cNvPr id="3" name="Subtitle-4-3">
+            <a:extLst>
               <a:ext uri="{FF2B5EF4-FFF2-40B4-BE49-F238E27FC236}">
-                <a16:creationId xmlns:a16="http://schemas.microsoft.com/office/drawing/2014/main" id="{4021D0A3-0EF5-4BA1-B799-22FDCB727B2C}"/>
+                <a16:creationId xmlns:a16="http://schemas.microsoft.com/office/drawing/2014/main" id="{991DA397-92E7-4615-91EF-C9C4518B4160}"/>
               </a:ext>
             </a:extLst>
           </p:cNvPr>
           <p:cNvSpPr>
-            <a:spLocks xmlns:a="http://schemas.openxmlformats.org/drawingml/2006/main" noGrp="1"/>
-          </p:cNvSpPr>
-          <p:nvPr/>
-        </p:nvSpPr>
-        <p:spPr>
-          <a:xfrm xmlns:a="http://schemas.openxmlformats.org/drawingml/2006/main">
-            <a:off x="702374" y="3429000"/>
-            <a:ext cx="2940082" cy="1359313"/>
-          </a:xfrm>
-          <a:prstGeom xmlns:a="http://schemas.openxmlformats.org/drawingml/2006/main" prst="rect">
-            <a:avLst/>
-          </a:prstGeom>
-        </p:spPr>
-        <p:txBody>
-          <a:bodyPr xmlns:a="http://schemas.openxmlformats.org/drawingml/2006/main" lIns="0" tIns="0" rIns="0" bIns="0" anchor="b">
-            <a:normAutofit fontScale="100000"/>
+            <a:spLocks noGrp="1"/>
+          </p:cNvSpPr>
+          <p:nvPr/>
+        </p:nvSpPr>
+        <p:spPr>
+          <a:xfrm>
+            <a:off x="393668" y="392240"/>
+            <a:ext cx="1612868" cy="649129"/>
+          </a:xfrm>
+          <a:prstGeom prst="rect">
+            <a:avLst/>
+          </a:prstGeom>
+        </p:spPr>
+        <p:txBody>
+          <a:bodyPr lIns="0" tIns="0" rIns="0" bIns="0">
+            <a:noAutofit/>
           </a:bodyPr>
-          <a:lstStyle xmlns:a="http://schemas.openxmlformats.org/drawingml/2006/main"/>
-          <a:p xmlns:a="http://schemas.openxmlformats.org/drawingml/2006/main">
+          <a:lstStyle/>
+          <a:p>
             <a:pPr algn="l">
               <a:defRPr sz="2400">
                 <a:solidFill>
@@ -3703,344 +3936,6 @@
               </a:defRPr>
             </a:pPr>
             <a:r>
-              <a:t>13.55 s</a:t>
-            </a:r>
-          </a:p>
-        </p:txBody>
-      </p:sp>
-      <p:sp>
-        <p:nvSpPr>
-          <p:cNvPr id="10" name="Content-Placeholder-9-10">
-            <a:extLst xmlns:a="http://schemas.openxmlformats.org/drawingml/2006/main">
-              <a:ext uri="{FF2B5EF4-FFF2-40B4-BE49-F238E27FC236}">
-                <a16:creationId xmlns:a16="http://schemas.microsoft.com/office/drawing/2014/main" id="{7E602F5A-C5C5-471C-B25A-9CEA381455DA}"/>
-              </a:ext>
-            </a:extLst>
-          </p:cNvPr>
-          <p:cNvSpPr>
-            <a:spLocks xmlns:a="http://schemas.openxmlformats.org/drawingml/2006/main" noGrp="1"/>
-          </p:cNvSpPr>
-          <p:nvPr/>
-        </p:nvSpPr>
-        <p:spPr>
-          <a:xfrm xmlns:a="http://schemas.openxmlformats.org/drawingml/2006/main">
-            <a:off x="4612958" y="3429000"/>
-            <a:ext cx="2940082" cy="1359313"/>
-          </a:xfrm>
-          <a:prstGeom xmlns:a="http://schemas.openxmlformats.org/drawingml/2006/main" prst="rect">
-            <a:avLst/>
-          </a:prstGeom>
-        </p:spPr>
-        <p:txBody>
-          <a:bodyPr xmlns:a="http://schemas.openxmlformats.org/drawingml/2006/main" lIns="0" tIns="0" rIns="0" bIns="0" anchor="b">
-            <a:normAutofit fontScale="100000"/>
-          </a:bodyPr>
-          <a:lstStyle xmlns:a="http://schemas.openxmlformats.org/drawingml/2006/main"/>
-          <a:p xmlns:a="http://schemas.openxmlformats.org/drawingml/2006/main">
-            <a:pPr algn="l">
-              <a:defRPr sz="2400">
-                <a:solidFill>
-                  <a:srgbClr val="000000"/>
-                </a:solidFill>
-                <a:latin typeface="Helvetica Neue"/>
-                <a:ea typeface="Helvetica Neue"/>
-                <a:cs typeface="Helvetica Neue"/>
-              </a:defRPr>
-            </a:pPr>
-            <a:r>
-              <a:t>2.63 s</a:t>
-            </a:r>
-          </a:p>
-        </p:txBody>
-      </p:sp>
-      <p:sp>
-        <p:nvSpPr>
-          <p:cNvPr id="11" name="Content-Placeholder-9-11">
-            <a:extLst xmlns:a="http://schemas.openxmlformats.org/drawingml/2006/main">
-              <a:ext uri="{FF2B5EF4-FFF2-40B4-BE49-F238E27FC236}">
-                <a16:creationId xmlns:a16="http://schemas.microsoft.com/office/drawing/2014/main" id="{9978C1FA-7423-407F-9035-AA6BE3182CF2}"/>
-              </a:ext>
-            </a:extLst>
-          </p:cNvPr>
-          <p:cNvSpPr>
-            <a:spLocks xmlns:a="http://schemas.openxmlformats.org/drawingml/2006/main" noGrp="1"/>
-          </p:cNvSpPr>
-          <p:nvPr/>
-        </p:nvSpPr>
-        <p:spPr>
-          <a:xfrm xmlns:a="http://schemas.openxmlformats.org/drawingml/2006/main">
-            <a:off x="8562404" y="3429000"/>
-            <a:ext cx="2940082" cy="1359313"/>
-          </a:xfrm>
-          <a:prstGeom xmlns:a="http://schemas.openxmlformats.org/drawingml/2006/main" prst="rect">
-            <a:avLst/>
-          </a:prstGeom>
-        </p:spPr>
-        <p:txBody>
-          <a:bodyPr xmlns:a="http://schemas.openxmlformats.org/drawingml/2006/main" lIns="0" tIns="0" rIns="0" bIns="0" anchor="b">
-            <a:normAutofit fontScale="100000"/>
-          </a:bodyPr>
-          <a:lstStyle xmlns:a="http://schemas.openxmlformats.org/drawingml/2006/main"/>
-          <a:p xmlns:a="http://schemas.openxmlformats.org/drawingml/2006/main">
-            <a:pPr algn="l">
-              <a:defRPr sz="2400">
-                <a:solidFill>
-                  <a:srgbClr val="000000"/>
-                </a:solidFill>
-                <a:latin typeface="Helvetica Neue"/>
-                <a:ea typeface="Helvetica Neue"/>
-                <a:cs typeface="Helvetica Neue"/>
-              </a:defRPr>
-            </a:pPr>
-            <a:r>
-              <a:t>9.536 s</a:t>
-            </a:r>
-          </a:p>
-        </p:txBody>
-      </p:sp>
-      <p:sp>
-        <p:nvSpPr>
-          <p:cNvPr id="12" name="Content-Placeholder-15-12">
-            <a:extLst xmlns:a="http://schemas.openxmlformats.org/drawingml/2006/main">
-              <a:ext uri="{FF2B5EF4-FFF2-40B4-BE49-F238E27FC236}">
-                <a16:creationId xmlns:a16="http://schemas.microsoft.com/office/drawing/2014/main" id="{52CC8A7D-EBE2-4D04-9112-F23C126BDD17}"/>
-              </a:ext>
-            </a:extLst>
-          </p:cNvPr>
-          <p:cNvSpPr>
-            <a:spLocks xmlns:a="http://schemas.openxmlformats.org/drawingml/2006/main" noGrp="1"/>
-          </p:cNvSpPr>
-          <p:nvPr/>
-        </p:nvSpPr>
-        <p:spPr>
-          <a:xfrm xmlns:a="http://schemas.openxmlformats.org/drawingml/2006/main">
-            <a:off x="393668" y="1138333"/>
-            <a:ext cx="11404568" cy="1599438"/>
-          </a:xfrm>
-          <a:prstGeom xmlns:a="http://schemas.openxmlformats.org/drawingml/2006/main" prst="rect">
-            <a:avLst/>
-          </a:prstGeom>
-        </p:spPr>
-        <p:txBody>
-          <a:bodyPr xmlns:a="http://schemas.openxmlformats.org/drawingml/2006/main" lIns="0" tIns="0" rIns="0" bIns="0">
-            <a:noAutofit/>
-          </a:bodyPr>
-          <a:lstStyle xmlns:a="http://schemas.openxmlformats.org/drawingml/2006/main"/>
-          <a:p xmlns:a="http://schemas.openxmlformats.org/drawingml/2006/main">
-            <a:pPr algn="l">
-              <a:defRPr sz="1600">
-                <a:solidFill>
-                  <a:srgbClr val="000000"/>
-                </a:solidFill>
-                <a:latin typeface="Helvetica Neue"/>
-                <a:ea typeface="Helvetica Neue"/>
-                <a:cs typeface="Helvetica Neue"/>
-              </a:defRPr>
-            </a:pPr>
-            <a:r>
-              <a:t>AMD RADEON PRO W7900 48 GB</a:t>
-            </a:r>
-          </a:p>
-          <a:p xmlns:a="http://schemas.openxmlformats.org/drawingml/2006/main">
-            <a:pPr algn="l">
-              <a:defRPr sz="1600">
-                <a:solidFill>
-                  <a:srgbClr val="000000"/>
-                </a:solidFill>
-                <a:latin typeface="Helvetica Neue"/>
-                <a:ea typeface="Helvetica Neue"/>
-                <a:cs typeface="Helvetica Neue"/>
-              </a:defRPr>
-            </a:pPr>
-            <a:r>
-              <a:t>KataGo v1.16.5 uses the official b40 network through OpenCL. Qwen3.6-27B Q4_K_M runs in llama.cpp through ROCm 7.2.1. GPU work is staged: scan, verify, explain, then cache in SQLite.</a:t>
-            </a:r>
-          </a:p>
-        </p:txBody>
-      </p:sp>
-    </p:spTree>
-    <p:extLst>
-      <p:ext uri="{BB962C8B-B14F-4D97-AF65-F5344CB8AC3E}">
-        <p14:creationId xmlns:p14="http://schemas.microsoft.com/office/powerpoint/2010/main" val="869096151"/>
-      </p:ext>
-    </p:extLst>
-  </p:cSld>
-</p:sld>
-</file>
-
-<file path=ppt/slides/slide6.xml><?xml version="1.0" encoding="utf-8"?>
-<p:sld xmlns:p="http://schemas.openxmlformats.org/presentationml/2006/main">
-  <p:cSld>
-    <p:spTree>
-      <p:nvGrpSpPr>
-        <p:cNvPr id="1" name=""/>
-        <p:cNvGrpSpPr/>
-        <p:nvPr/>
-      </p:nvGrpSpPr>
-      <p:grpSpPr>
-        <a:xfrm xmlns:a="http://schemas.openxmlformats.org/drawingml/2006/main"/>
-      </p:grpSpPr>
-      <p:sp>
-        <p:nvSpPr>
-          <p:cNvPr id="4" name="Title-3-1">
-            <a:extLst xmlns:a="http://schemas.openxmlformats.org/drawingml/2006/main">
-              <a:ext uri="{FF2B5EF4-FFF2-40B4-BE49-F238E27FC236}">
-                <a16:creationId xmlns:a16="http://schemas.microsoft.com/office/drawing/2014/main" id="{621FF044-E82E-4565-A4D0-7677280A8E72}"/>
-              </a:ext>
-            </a:extLst>
-          </p:cNvPr>
-          <p:cNvSpPr>
-            <a:spLocks xmlns:a="http://schemas.openxmlformats.org/drawingml/2006/main" noGrp="1"/>
-          </p:cNvSpPr>
-          <p:nvPr/>
-        </p:nvSpPr>
-        <p:spPr>
-          <a:xfrm xmlns:a="http://schemas.openxmlformats.org/drawingml/2006/main">
-            <a:off x="393668" y="1738789"/>
-            <a:ext cx="9448800" cy="2491454"/>
-          </a:xfrm>
-          <a:prstGeom xmlns:a="http://schemas.openxmlformats.org/drawingml/2006/main" prst="rect">
-            <a:avLst/>
-          </a:prstGeom>
-        </p:spPr>
-        <p:txBody>
-          <a:bodyPr xmlns:a="http://schemas.openxmlformats.org/drawingml/2006/main" lIns="0" tIns="0" rIns="0" bIns="0" anchor="b">
-            <a:noAutofit/>
-          </a:bodyPr>
-          <a:lstStyle xmlns:a="http://schemas.openxmlformats.org/drawingml/2006/main"/>
-          <a:p xmlns:a="http://schemas.openxmlformats.org/drawingml/2006/main">
-            <a:pPr algn="l">
-              <a:defRPr sz="6000">
-                <a:solidFill>
-                  <a:srgbClr val="000000"/>
-                </a:solidFill>
-                <a:latin typeface="Helvetica Neue"/>
-                <a:ea typeface="Helvetica Neue"/>
-                <a:cs typeface="Helvetica Neue"/>
-              </a:defRPr>
-            </a:pPr>
-            <a:r>
-              <a:t>Every superhuman move,
-made understandable.</a:t>
-            </a:r>
-          </a:p>
-        </p:txBody>
-      </p:sp>
-      <p:sp>
-        <p:nvSpPr>
-          <p:cNvPr id="2" name="Subtitle-4-2">
-            <a:extLst xmlns:a="http://schemas.openxmlformats.org/drawingml/2006/main">
-              <a:ext uri="{FF2B5EF4-FFF2-40B4-BE49-F238E27FC236}">
-                <a16:creationId xmlns:a16="http://schemas.microsoft.com/office/drawing/2014/main" id="{7B5069B2-0D66-44CD-8BED-E30E464A183B}"/>
-              </a:ext>
-            </a:extLst>
-          </p:cNvPr>
-          <p:cNvSpPr>
-            <a:spLocks xmlns:a="http://schemas.openxmlformats.org/drawingml/2006/main" noGrp="1"/>
-          </p:cNvSpPr>
-          <p:nvPr/>
-        </p:nvSpPr>
-        <p:spPr>
-          <a:xfrm xmlns:a="http://schemas.openxmlformats.org/drawingml/2006/main">
-            <a:off x="393668" y="4973288"/>
-            <a:ext cx="3568732" cy="1080230"/>
-          </a:xfrm>
-          <a:prstGeom xmlns:a="http://schemas.openxmlformats.org/drawingml/2006/main" prst="rect">
-            <a:avLst/>
-          </a:prstGeom>
-        </p:spPr>
-        <p:txBody>
-          <a:bodyPr xmlns:a="http://schemas.openxmlformats.org/drawingml/2006/main" lIns="0" tIns="0" rIns="0" bIns="0">
-            <a:noAutofit/>
-          </a:bodyPr>
-          <a:lstStyle xmlns:a="http://schemas.openxmlformats.org/drawingml/2006/main"/>
-          <a:p xmlns:a="http://schemas.openxmlformats.org/drawingml/2006/main">
-            <a:pPr algn="l">
-              <a:defRPr sz="2400">
-                <a:solidFill>
-                  <a:srgbClr val="000000"/>
-                </a:solidFill>
-                <a:latin typeface="Helvetica Neue"/>
-                <a:ea typeface="Helvetica Neue"/>
-                <a:cs typeface="Helvetica Neue"/>
-              </a:defRPr>
-            </a:pPr>
-            <a:r>
-              <a:t>KataGo authority</a:t>
-            </a:r>
-          </a:p>
-          <a:p xmlns:a="http://schemas.openxmlformats.org/drawingml/2006/main">
-            <a:pPr algn="l">
-              <a:defRPr sz="2400">
-                <a:solidFill>
-                  <a:srgbClr val="000000"/>
-                </a:solidFill>
-                <a:latin typeface="Helvetica Neue"/>
-                <a:ea typeface="Helvetica Neue"/>
-                <a:cs typeface="Helvetica Neue"/>
-              </a:defRPr>
-            </a:pPr>
-            <a:r>
-              <a:t>Qwen explanation</a:t>
-            </a:r>
-          </a:p>
-          <a:p xmlns:a="http://schemas.openxmlformats.org/drawingml/2006/main">
-            <a:pPr algn="l">
-              <a:defRPr sz="2400">
-                <a:solidFill>
-                  <a:srgbClr val="000000"/>
-                </a:solidFill>
-                <a:latin typeface="Helvetica Neue"/>
-                <a:ea typeface="Helvetica Neue"/>
-                <a:cs typeface="Helvetica Neue"/>
-              </a:defRPr>
-            </a:pPr>
-            <a:r>
-              <a:t>Radeon privacy</a:t>
-            </a:r>
-          </a:p>
-        </p:txBody>
-      </p:sp>
-      <p:sp>
-        <p:nvSpPr>
-          <p:cNvPr id="3" name="Subtitle-4-3">
-            <a:extLst xmlns:a="http://schemas.openxmlformats.org/drawingml/2006/main">
-              <a:ext uri="{FF2B5EF4-FFF2-40B4-BE49-F238E27FC236}">
-                <a16:creationId xmlns:a16="http://schemas.microsoft.com/office/drawing/2014/main" id="{991DA397-92E7-4615-91EF-C9C4518B4160}"/>
-              </a:ext>
-            </a:extLst>
-          </p:cNvPr>
-          <p:cNvSpPr>
-            <a:spLocks xmlns:a="http://schemas.openxmlformats.org/drawingml/2006/main" noGrp="1"/>
-          </p:cNvSpPr>
-          <p:nvPr/>
-        </p:nvSpPr>
-        <p:spPr>
-          <a:xfrm xmlns:a="http://schemas.openxmlformats.org/drawingml/2006/main">
-            <a:off x="393668" y="392240"/>
-            <a:ext cx="1612868" cy="649129"/>
-          </a:xfrm>
-          <a:prstGeom xmlns:a="http://schemas.openxmlformats.org/drawingml/2006/main" prst="rect">
-            <a:avLst/>
-          </a:prstGeom>
-        </p:spPr>
-        <p:txBody>
-          <a:bodyPr xmlns:a="http://schemas.openxmlformats.org/drawingml/2006/main" lIns="0" tIns="0" rIns="0" bIns="0">
-            <a:noAutofit/>
-          </a:bodyPr>
-          <a:lstStyle xmlns:a="http://schemas.openxmlformats.org/drawingml/2006/main"/>
-          <a:p xmlns:a="http://schemas.openxmlformats.org/drawingml/2006/main">
-            <a:pPr algn="l">
-              <a:defRPr sz="2400">
-                <a:solidFill>
-                  <a:srgbClr val="000000"/>
-                </a:solidFill>
-                <a:latin typeface="Helvetica Neue"/>
-                <a:ea typeface="Helvetica Neue"/>
-                <a:cs typeface="Helvetica Neue"/>
-              </a:defRPr>
-            </a:pPr>
-            <a:r>
               <a:t>YIJIAN</a:t>
             </a:r>
           </a:p>
@@ -4053,6 +3948,9 @@
       </p:ext>
     </p:extLst>
   </p:cSld>
+  <p:clrMapOvr>
+    <a:masterClrMapping/>
+  </p:clrMapOvr>
 </p:sld>
 </file>
 
@@ -4298,5 +4196,254 @@
       </a:bgFillStyleLst>
     </a:fmtScheme>
   </a:themeElements>
+  <a:objectDefaults/>
+  <a:extraClrSchemeLst/>
+</a:theme>
+</file>
+
+<file path=ppt/theme/theme2.xml><?xml version="1.0" encoding="utf-8"?>
+<a:theme xmlns:a="http://schemas.openxmlformats.org/drawingml/2006/main" name="ChatGPT">
+  <a:themeElements>
+    <a:clrScheme name="ChatGPT">
+      <a:dk1>
+        <a:srgbClr val="000000"/>
+      </a:dk1>
+      <a:lt1>
+        <a:srgbClr val="FFFFFF"/>
+      </a:lt1>
+      <a:dk2>
+        <a:srgbClr val="0E2841"/>
+      </a:dk2>
+      <a:lt2>
+        <a:srgbClr val="E8E8E8"/>
+      </a:lt2>
+      <a:accent1>
+        <a:srgbClr val="156082"/>
+      </a:accent1>
+      <a:accent2>
+        <a:srgbClr val="E97132"/>
+      </a:accent2>
+      <a:accent3>
+        <a:srgbClr val="196B24"/>
+      </a:accent3>
+      <a:accent4>
+        <a:srgbClr val="0F9ED5"/>
+      </a:accent4>
+      <a:accent5>
+        <a:srgbClr val="A02B93"/>
+      </a:accent5>
+      <a:accent6>
+        <a:srgbClr val="4EA72E"/>
+      </a:accent6>
+      <a:hlink>
+        <a:srgbClr val="467886"/>
+      </a:hlink>
+      <a:folHlink>
+        <a:srgbClr val="96607D"/>
+      </a:folHlink>
+    </a:clrScheme>
+    <a:fontScheme name="Office">
+      <a:majorFont>
+        <a:latin typeface="Calibri Light"/>
+        <a:ea typeface="Calibri Light"/>
+        <a:cs typeface="Calibri Light"/>
+      </a:majorFont>
+      <a:minorFont>
+        <a:latin typeface="Calibri"/>
+        <a:ea typeface="Calibri"/>
+        <a:cs typeface="Calibri"/>
+      </a:minorFont>
+    </a:fontScheme>
+    <a:fmtScheme name="ChatGPT">
+      <a:fillStyleLst>
+        <a:solidFill>
+          <a:schemeClr val="phClr"/>
+        </a:solidFill>
+        <a:gradFill>
+          <a:gsLst>
+            <a:gs pos="0">
+              <a:schemeClr val="phClr">
+                <a:tint val="67000"/>
+                <a:lumMod val="110000"/>
+                <a:satMod val="105000"/>
+              </a:schemeClr>
+            </a:gs>
+            <a:gs pos="50000">
+              <a:schemeClr val="phClr">
+                <a:tint val="73000"/>
+                <a:lumMod val="105000"/>
+                <a:satMod val="103000"/>
+              </a:schemeClr>
+            </a:gs>
+            <a:gs pos="100000">
+              <a:schemeClr val="phClr">
+                <a:tint val="81000"/>
+                <a:lumMod val="105000"/>
+                <a:satMod val="109000"/>
+              </a:schemeClr>
+            </a:gs>
+          </a:gsLst>
+          <a:lin ang="5400000" scaled="0"/>
+        </a:gradFill>
+        <a:gradFill>
+          <a:gsLst>
+            <a:gs pos="0">
+              <a:schemeClr val="phClr">
+                <a:tint val="94000"/>
+                <a:lumMod val="102000"/>
+                <a:satMod val="103000"/>
+              </a:schemeClr>
+            </a:gs>
+            <a:gs pos="50000">
+              <a:schemeClr val="phClr">
+                <a:shade val="100000"/>
+                <a:lumMod val="100000"/>
+                <a:satMod val="110000"/>
+              </a:schemeClr>
+            </a:gs>
+            <a:gs pos="100000">
+              <a:schemeClr val="phClr">
+                <a:shade val="78000"/>
+                <a:lumMod val="99000"/>
+                <a:satMod val="120000"/>
+              </a:schemeClr>
+            </a:gs>
+          </a:gsLst>
+          <a:lin ang="5400000" scaled="0"/>
+        </a:gradFill>
+      </a:fillStyleLst>
+      <a:lnStyleLst>
+        <a:ln w="12700">
+          <a:solidFill>
+            <a:schemeClr val="phClr"/>
+          </a:solidFill>
+          <a:prstDash val="solid"/>
+        </a:ln>
+        <a:ln w="19050">
+          <a:solidFill>
+            <a:schemeClr val="phClr"/>
+          </a:solidFill>
+          <a:prstDash val="solid"/>
+        </a:ln>
+        <a:ln w="25400">
+          <a:solidFill>
+            <a:schemeClr val="phClr"/>
+          </a:solidFill>
+          <a:prstDash val="solid"/>
+        </a:ln>
+      </a:lnStyleLst>
+      <a:effectStyleLst>
+        <a:effectStyle>
+          <a:effectLst/>
+        </a:effectStyle>
+        <a:effectStyle>
+          <a:effectLst/>
+        </a:effectStyle>
+        <a:effectStyle>
+          <a:effectLst>
+            <a:outerShdw blurRad="57150" dist="19050" dir="5400000">
+              <a:srgbClr val="000000">
+                <a:alpha val="16000"/>
+              </a:srgbClr>
+            </a:outerShdw>
+          </a:effectLst>
+        </a:effectStyle>
+        <a:effectStyle>
+          <a:effectLst>
+            <a:outerShdw blurRad="19050" dist="9525" dir="5400000">
+              <a:srgbClr val="000000">
+                <a:alpha val="6000"/>
+              </a:srgbClr>
+            </a:outerShdw>
+          </a:effectLst>
+        </a:effectStyle>
+        <a:effectStyle>
+          <a:effectLst>
+            <a:outerShdw blurRad="28575" dist="9525" dir="5400000">
+              <a:srgbClr val="000000">
+                <a:alpha val="8000"/>
+              </a:srgbClr>
+            </a:outerShdw>
+          </a:effectLst>
+        </a:effectStyle>
+        <a:effectStyle>
+          <a:effectLst>
+            <a:outerShdw blurRad="57150" dist="19050" dir="5400000">
+              <a:srgbClr val="000000">
+                <a:alpha val="10000"/>
+              </a:srgbClr>
+            </a:outerShdw>
+          </a:effectLst>
+        </a:effectStyle>
+        <a:effectStyle>
+          <a:effectLst>
+            <a:outerShdw blurRad="114300" dist="38100" dir="5400000">
+              <a:srgbClr val="000000">
+                <a:alpha val="12000"/>
+              </a:srgbClr>
+            </a:outerShdw>
+          </a:effectLst>
+        </a:effectStyle>
+        <a:effectStyle>
+          <a:effectLst>
+            <a:outerShdw blurRad="171450" dist="57150" dir="5400000">
+              <a:srgbClr val="000000">
+                <a:alpha val="16000"/>
+              </a:srgbClr>
+            </a:outerShdw>
+          </a:effectLst>
+        </a:effectStyle>
+        <a:effectStyle>
+          <a:effectLst>
+            <a:outerShdw blurRad="266700" dist="95250" dir="5400000">
+              <a:srgbClr val="000000">
+                <a:alpha val="24000"/>
+              </a:srgbClr>
+            </a:outerShdw>
+          </a:effectLst>
+        </a:effectStyle>
+      </a:effectStyleLst>
+      <a:bgFillStyleLst>
+        <a:solidFill>
+          <a:schemeClr val="phClr"/>
+        </a:solidFill>
+        <a:solidFill>
+          <a:schemeClr val="phClr">
+            <a:tint val="95000"/>
+            <a:satMod val="170000"/>
+          </a:schemeClr>
+        </a:solidFill>
+        <a:gradFill>
+          <a:gsLst>
+            <a:gs pos="0">
+              <a:schemeClr val="phClr">
+                <a:tint val="93000"/>
+                <a:shade val="98000"/>
+                <a:lumMod val="102000"/>
+                <a:satMod val="150000"/>
+              </a:schemeClr>
+            </a:gs>
+            <a:gs pos="50000">
+              <a:schemeClr val="phClr">
+                <a:tint val="98000"/>
+                <a:shade val="90000"/>
+                <a:lumMod val="103000"/>
+                <a:satMod val="130000"/>
+              </a:schemeClr>
+            </a:gs>
+            <a:gs pos="100000">
+              <a:schemeClr val="phClr">
+                <a:shade val="63000"/>
+                <a:satMod val="120000"/>
+              </a:schemeClr>
+            </a:gs>
+          </a:gsLst>
+          <a:lin ang="5400000" scaled="0"/>
+        </a:gradFill>
+      </a:bgFillStyleLst>
+    </a:fmtScheme>
+  </a:themeElements>
+  <a:objectDefaults/>
+  <a:extraClrSchemeLst/>
 </a:theme>
 </file>